--- a/courses/theory/slides/lec05-proplogic.pptx
+++ b/courses/theory/slides/lec05-proplogic.pptx
@@ -5,7 +5,7 @@
     <p:sldMasterId id="2147483649" r:id="rId1"/>
   </p:sldMasterIdLst>
   <p:handoutMasterIdLst>
-    <p:handoutMasterId r:id="rId39"/>
+    <p:handoutMasterId r:id="rId44"/>
   </p:handoutMasterIdLst>
   <p:sldIdLst>
     <p:sldId id="256" r:id="rId2"/>
@@ -23,28 +23,33 @@
     <p:sldId id="338" r:id="rId14"/>
     <p:sldId id="339" r:id="rId15"/>
     <p:sldId id="340" r:id="rId16"/>
-    <p:sldId id="341" r:id="rId17"/>
-    <p:sldId id="342" r:id="rId18"/>
-    <p:sldId id="343" r:id="rId19"/>
-    <p:sldId id="344" r:id="rId20"/>
-    <p:sldId id="345" r:id="rId21"/>
-    <p:sldId id="346" r:id="rId22"/>
-    <p:sldId id="347" r:id="rId23"/>
-    <p:sldId id="348" r:id="rId24"/>
-    <p:sldId id="349" r:id="rId25"/>
-    <p:sldId id="350" r:id="rId26"/>
-    <p:sldId id="351" r:id="rId27"/>
-    <p:sldId id="352" r:id="rId28"/>
-    <p:sldId id="353" r:id="rId29"/>
-    <p:sldId id="355" r:id="rId30"/>
-    <p:sldId id="354" r:id="rId31"/>
-    <p:sldId id="356" r:id="rId32"/>
-    <p:sldId id="357" r:id="rId33"/>
-    <p:sldId id="358" r:id="rId34"/>
-    <p:sldId id="359" r:id="rId35"/>
-    <p:sldId id="361" r:id="rId36"/>
-    <p:sldId id="360" r:id="rId37"/>
-    <p:sldId id="362" r:id="rId38"/>
+    <p:sldId id="363" r:id="rId17"/>
+    <p:sldId id="341" r:id="rId18"/>
+    <p:sldId id="365" r:id="rId19"/>
+    <p:sldId id="366" r:id="rId20"/>
+    <p:sldId id="367" r:id="rId21"/>
+    <p:sldId id="364" r:id="rId22"/>
+    <p:sldId id="342" r:id="rId23"/>
+    <p:sldId id="343" r:id="rId24"/>
+    <p:sldId id="344" r:id="rId25"/>
+    <p:sldId id="345" r:id="rId26"/>
+    <p:sldId id="346" r:id="rId27"/>
+    <p:sldId id="347" r:id="rId28"/>
+    <p:sldId id="348" r:id="rId29"/>
+    <p:sldId id="349" r:id="rId30"/>
+    <p:sldId id="350" r:id="rId31"/>
+    <p:sldId id="351" r:id="rId32"/>
+    <p:sldId id="352" r:id="rId33"/>
+    <p:sldId id="353" r:id="rId34"/>
+    <p:sldId id="355" r:id="rId35"/>
+    <p:sldId id="354" r:id="rId36"/>
+    <p:sldId id="356" r:id="rId37"/>
+    <p:sldId id="357" r:id="rId38"/>
+    <p:sldId id="358" r:id="rId39"/>
+    <p:sldId id="359" r:id="rId40"/>
+    <p:sldId id="361" r:id="rId41"/>
+    <p:sldId id="360" r:id="rId42"/>
+    <p:sldId id="362" r:id="rId43"/>
   </p:sldIdLst>
   <p:sldSz cx="9144000" cy="6858000" type="screen4x3"/>
   <p:notesSz cx="7099300" cy="10234613"/>
@@ -6895,7 +6900,7 @@
                     <m:oMathParaPr>
                       <m:jc m:val="left"/>
                     </m:oMathParaPr>
-                    <m:oMath xmlns:m="http://schemas.openxmlformats.org/officeDocument/2006/math">
+                    <m:oMath>
                       <m:r>
                         <m:rPr>
                           <m:nor/>
@@ -6907,14 +6912,14 @@
                         <m:rPr>
                           <m:nor/>
                         </m:rPr>
-                        <a:rPr kumimoji="1" lang="en-US" altLang="zh-CN" dirty="0"/>
+                        <a:rPr kumimoji="1" lang="en-US" altLang="zh-CN" i="0" dirty="0"/>
                         <m:t>|</m:t>
                       </m:r>
                       <m:r>
                         <m:rPr>
                           <m:nor/>
                         </m:rPr>
-                        <a:rPr kumimoji="1" lang="zh-CN" altLang="en-US" dirty="0"/>
+                        <a:rPr kumimoji="1" lang="zh-CN" altLang="en-US" i="0" dirty="0"/>
                         <m:t> </m:t>
                       </m:r>
                       <m:r>
@@ -6957,7 +6962,7 @@
                     <m:oMathParaPr>
                       <m:jc m:val="left"/>
                     </m:oMathParaPr>
-                    <m:oMath xmlns:m="http://schemas.openxmlformats.org/officeDocument/2006/math">
+                    <m:oMath>
                       <m:r>
                         <m:rPr>
                           <m:nor/>
@@ -6969,14 +6974,14 @@
                         <m:rPr>
                           <m:nor/>
                         </m:rPr>
-                        <a:rPr kumimoji="1" lang="en-US" altLang="zh-CN" dirty="0"/>
+                        <a:rPr kumimoji="1" lang="en-US" altLang="zh-CN" i="0" dirty="0"/>
                         <m:t>|</m:t>
                       </m:r>
                       <m:r>
                         <m:rPr>
                           <m:nor/>
                         </m:rPr>
-                        <a:rPr kumimoji="1" lang="zh-CN" altLang="en-US" dirty="0"/>
+                        <a:rPr kumimoji="1" lang="zh-CN" altLang="en-US" i="0" dirty="0"/>
                         <m:t> </m:t>
                       </m:r>
                       <m:r>
@@ -7019,7 +7024,7 @@
                     <m:oMathParaPr>
                       <m:jc m:val="left"/>
                     </m:oMathParaPr>
-                    <m:oMath xmlns:m="http://schemas.openxmlformats.org/officeDocument/2006/math">
+                    <m:oMath>
                       <m:r>
                         <m:rPr>
                           <m:nor/>
@@ -7031,7 +7036,7 @@
                         <m:rPr>
                           <m:nor/>
                         </m:rPr>
-                        <a:rPr kumimoji="1" lang="en-US" altLang="zh-CN" dirty="0"/>
+                        <a:rPr kumimoji="1" lang="en-US" altLang="zh-CN" i="0" dirty="0"/>
                         <m:t>|</m:t>
                       </m:r>
                       <m:r>
@@ -9306,26 +9311,26 @@
                     <m:oMathParaPr>
                       <m:jc m:val="left"/>
                     </m:oMathParaPr>
-                    <m:oMath xmlns:m="http://schemas.openxmlformats.org/officeDocument/2006/math">
+                    <m:oMath>
                       <m:r>
                         <m:rPr>
                           <m:nor/>
                         </m:rPr>
-                        <a:rPr kumimoji="1" lang="zh-CN" altLang="en-US" kern="0" dirty="0" smtClean="0"/>
+                        <a:rPr kumimoji="1" lang="zh-CN" altLang="en-US" i="0" kern="0" dirty="0" smtClean="0"/>
                         <m:t>               </m:t>
                       </m:r>
                       <m:r>
                         <m:rPr>
                           <m:nor/>
                         </m:rPr>
-                        <a:rPr kumimoji="1" lang="en-US" altLang="zh-CN" kern="0" dirty="0"/>
+                        <a:rPr kumimoji="1" lang="en-US" altLang="zh-CN" i="0" kern="0" dirty="0"/>
                         <m:t>|</m:t>
                       </m:r>
                       <m:r>
                         <m:rPr>
                           <m:nor/>
                         </m:rPr>
-                        <a:rPr kumimoji="1" lang="zh-CN" altLang="en-US" kern="0" dirty="0"/>
+                        <a:rPr kumimoji="1" lang="zh-CN" altLang="en-US" i="0" kern="0" dirty="0"/>
                         <m:t> </m:t>
                       </m:r>
                       <m:r>
@@ -9369,26 +9374,26 @@
                     <m:oMathParaPr>
                       <m:jc m:val="left"/>
                     </m:oMathParaPr>
-                    <m:oMath xmlns:m="http://schemas.openxmlformats.org/officeDocument/2006/math">
+                    <m:oMath>
                       <m:r>
                         <m:rPr>
                           <m:nor/>
                         </m:rPr>
-                        <a:rPr kumimoji="1" lang="zh-CN" altLang="en-US" kern="0" dirty="0" smtClean="0"/>
+                        <a:rPr kumimoji="1" lang="zh-CN" altLang="en-US" i="0" kern="0" dirty="0" smtClean="0"/>
                         <m:t>               </m:t>
                       </m:r>
                       <m:r>
                         <m:rPr>
                           <m:nor/>
                         </m:rPr>
-                        <a:rPr kumimoji="1" lang="en-US" altLang="zh-CN" kern="0" dirty="0"/>
+                        <a:rPr kumimoji="1" lang="en-US" altLang="zh-CN" i="0" kern="0" dirty="0"/>
                         <m:t>|</m:t>
                       </m:r>
                       <m:r>
                         <m:rPr>
                           <m:nor/>
                         </m:rPr>
-                        <a:rPr kumimoji="1" lang="zh-CN" altLang="en-US" kern="0" dirty="0"/>
+                        <a:rPr kumimoji="1" lang="zh-CN" altLang="en-US" i="0" kern="0" dirty="0"/>
                         <m:t> </m:t>
                       </m:r>
                       <m:r>
@@ -9432,19 +9437,19 @@
                     <m:oMathParaPr>
                       <m:jc m:val="left"/>
                     </m:oMathParaPr>
-                    <m:oMath xmlns:m="http://schemas.openxmlformats.org/officeDocument/2006/math">
+                    <m:oMath>
                       <m:r>
                         <m:rPr>
                           <m:nor/>
                         </m:rPr>
-                        <a:rPr kumimoji="1" lang="zh-CN" altLang="en-US" kern="0" dirty="0" smtClean="0"/>
+                        <a:rPr kumimoji="1" lang="zh-CN" altLang="en-US" i="0" kern="0" dirty="0" smtClean="0"/>
                         <m:t>               </m:t>
                       </m:r>
                       <m:r>
                         <m:rPr>
                           <m:nor/>
                         </m:rPr>
-                        <a:rPr kumimoji="1" lang="en-US" altLang="zh-CN" kern="0" dirty="0"/>
+                        <a:rPr kumimoji="1" lang="en-US" altLang="zh-CN" i="0" kern="0" dirty="0"/>
                         <m:t>|</m:t>
                       </m:r>
                       <m:r>
@@ -9648,7 +9653,7 @@
                     <m:oMathParaPr>
                       <m:jc m:val="left"/>
                     </m:oMathParaPr>
-                    <m:oMath xmlns:m="http://schemas.openxmlformats.org/officeDocument/2006/math">
+                    <m:oMath>
                       <m:r>
                         <m:rPr>
                           <m:nor/>
@@ -9689,7 +9694,7 @@
                     <m:oMathParaPr>
                       <m:jc m:val="left"/>
                     </m:oMathParaPr>
-                    <m:oMath xmlns:m="http://schemas.openxmlformats.org/officeDocument/2006/math">
+                    <m:oMath>
                       <m:r>
                         <m:rPr>
                           <m:nor/>
@@ -9745,7 +9750,7 @@
                     <m:oMathParaPr>
                       <m:jc m:val="left"/>
                     </m:oMathParaPr>
-                    <m:oMath xmlns:m="http://schemas.openxmlformats.org/officeDocument/2006/math">
+                    <m:oMath>
                       <m:r>
                         <a:rPr kumimoji="1" lang="en-US" altLang="zh-CN" i="1">
                           <a:latin typeface="Cambria Math" panose="02040503050406030204" pitchFamily="18" charset="0"/>
@@ -10310,26 +10315,26 @@
                     <m:oMathParaPr>
                       <m:jc m:val="left"/>
                     </m:oMathParaPr>
-                    <m:oMath xmlns:m="http://schemas.openxmlformats.org/officeDocument/2006/math">
+                    <m:oMath>
                       <m:r>
                         <m:rPr>
                           <m:nor/>
                         </m:rPr>
-                        <a:rPr kumimoji="1" lang="zh-CN" altLang="en-US" kern="0" dirty="0" smtClean="0"/>
+                        <a:rPr kumimoji="1" lang="zh-CN" altLang="en-US" i="0" kern="0" dirty="0" smtClean="0"/>
                         <m:t>               </m:t>
                       </m:r>
                       <m:r>
                         <m:rPr>
                           <m:nor/>
                         </m:rPr>
-                        <a:rPr kumimoji="1" lang="en-US" altLang="zh-CN" kern="0" dirty="0"/>
+                        <a:rPr kumimoji="1" lang="en-US" altLang="zh-CN" i="0" kern="0" dirty="0"/>
                         <m:t>|</m:t>
                       </m:r>
                       <m:r>
                         <m:rPr>
                           <m:nor/>
                         </m:rPr>
-                        <a:rPr kumimoji="1" lang="zh-CN" altLang="en-US" kern="0" dirty="0"/>
+                        <a:rPr kumimoji="1" lang="zh-CN" altLang="en-US" i="0" kern="0" dirty="0"/>
                         <m:t> </m:t>
                       </m:r>
                       <m:r>
@@ -10373,26 +10378,26 @@
                     <m:oMathParaPr>
                       <m:jc m:val="left"/>
                     </m:oMathParaPr>
-                    <m:oMath xmlns:m="http://schemas.openxmlformats.org/officeDocument/2006/math">
+                    <m:oMath>
                       <m:r>
                         <m:rPr>
                           <m:nor/>
                         </m:rPr>
-                        <a:rPr kumimoji="1" lang="zh-CN" altLang="en-US" kern="0" dirty="0" smtClean="0"/>
+                        <a:rPr kumimoji="1" lang="zh-CN" altLang="en-US" i="0" kern="0" dirty="0" smtClean="0"/>
                         <m:t>               </m:t>
                       </m:r>
                       <m:r>
                         <m:rPr>
                           <m:nor/>
                         </m:rPr>
-                        <a:rPr kumimoji="1" lang="en-US" altLang="zh-CN" kern="0" dirty="0"/>
+                        <a:rPr kumimoji="1" lang="en-US" altLang="zh-CN" i="0" kern="0" dirty="0"/>
                         <m:t>|</m:t>
                       </m:r>
                       <m:r>
                         <m:rPr>
                           <m:nor/>
                         </m:rPr>
-                        <a:rPr kumimoji="1" lang="zh-CN" altLang="en-US" kern="0" dirty="0"/>
+                        <a:rPr kumimoji="1" lang="zh-CN" altLang="en-US" i="0" kern="0" dirty="0"/>
                         <m:t> </m:t>
                       </m:r>
                       <m:r>
@@ -10436,19 +10441,19 @@
                     <m:oMathParaPr>
                       <m:jc m:val="left"/>
                     </m:oMathParaPr>
-                    <m:oMath xmlns:m="http://schemas.openxmlformats.org/officeDocument/2006/math">
+                    <m:oMath>
                       <m:r>
                         <m:rPr>
                           <m:nor/>
                         </m:rPr>
-                        <a:rPr kumimoji="1" lang="zh-CN" altLang="en-US" kern="0" dirty="0" smtClean="0"/>
+                        <a:rPr kumimoji="1" lang="zh-CN" altLang="en-US" i="0" kern="0" dirty="0" smtClean="0"/>
                         <m:t>               </m:t>
                       </m:r>
                       <m:r>
                         <m:rPr>
                           <m:nor/>
                         </m:rPr>
-                        <a:rPr kumimoji="1" lang="en-US" altLang="zh-CN" kern="0" dirty="0"/>
+                        <a:rPr kumimoji="1" lang="en-US" altLang="zh-CN" i="0" kern="0" dirty="0"/>
                         <m:t>|</m:t>
                       </m:r>
                       <m:r>
@@ -10758,8 +10763,8 @@
           </a:p>
         </p:txBody>
       </p:sp>
-      <mc:AlternateContent xmlns:mc="http://schemas.openxmlformats.org/markup-compatibility/2006" xmlns:a14="http://schemas.microsoft.com/office/drawing/2010/main">
-        <mc:Choice Requires="a14">
+      <mc:AlternateContent xmlns:mc="http://schemas.openxmlformats.org/markup-compatibility/2006">
+        <mc:Choice xmlns:a14="http://schemas.microsoft.com/office/drawing/2010/main" Requires="a14">
           <p:sp>
             <p:nvSpPr>
               <p:cNvPr id="3" name="内容占位符 2">
@@ -10807,7 +10812,7 @@
                 </a:r>
                 <a:r>
                   <a:rPr kumimoji="1" lang="en-US" altLang="zh-CN" dirty="0"/>
-                  <a:t>provability</a:t>
+                  <a:t>validity</a:t>
                 </a:r>
                 <a:r>
                   <a:rPr kumimoji="1" lang="zh-CN" altLang="en-US" dirty="0"/>
@@ -10878,7 +10883,7 @@
                   <a:rPr kumimoji="1" lang="en-US" altLang="zh-CN" dirty="0">
                     <a:latin typeface="Cambria Math" panose="02040503050406030204" pitchFamily="18" charset="0"/>
                   </a:rPr>
-                  <a:t>provable</a:t>
+                  <a:t>valid</a:t>
                 </a:r>
               </a:p>
               <a:p>
@@ -11034,6 +11039,14 @@
                 </a:r>
                 <a:r>
                   <a:rPr kumimoji="1" lang="en-US" altLang="zh-CN" dirty="0"/>
+                  <a:t>proof</a:t>
+                </a:r>
+                <a:r>
+                  <a:rPr kumimoji="1" lang="zh-CN" altLang="en-US" dirty="0"/>
+                  <a:t> </a:t>
+                </a:r>
+                <a:r>
+                  <a:rPr kumimoji="1" lang="en-US" altLang="zh-CN" dirty="0"/>
                   <a:t>systems</a:t>
                 </a:r>
               </a:p>
@@ -11127,19 +11140,35 @@
                   <a:t> </a:t>
                 </a:r>
                 <a:r>
-                  <a:rPr kumimoji="1" lang="en-US" altLang="zh-CN" dirty="0"/>
+                  <a:rPr kumimoji="1" lang="en-US" altLang="zh-CN" dirty="0">
+                    <a:solidFill>
+                      <a:srgbClr val="0432FF"/>
+                    </a:solidFill>
+                  </a:rPr>
                   <a:t>natural</a:t>
                 </a:r>
                 <a:r>
-                  <a:rPr kumimoji="1" lang="zh-CN" altLang="en-US" dirty="0"/>
-                  <a:t> </a:t>
-                </a:r>
-                <a:r>
-                  <a:rPr kumimoji="1" lang="en-US" altLang="zh-CN" dirty="0"/>
+                  <a:rPr kumimoji="1" lang="zh-CN" altLang="en-US" dirty="0">
+                    <a:solidFill>
+                      <a:srgbClr val="0432FF"/>
+                    </a:solidFill>
+                  </a:rPr>
+                  <a:t> </a:t>
+                </a:r>
+                <a:r>
+                  <a:rPr kumimoji="1" lang="en-US" altLang="zh-CN" dirty="0">
+                    <a:solidFill>
+                      <a:srgbClr val="0432FF"/>
+                    </a:solidFill>
+                  </a:rPr>
                   <a:t>deduction</a:t>
                 </a:r>
                 <a:r>
-                  <a:rPr kumimoji="1" lang="zh-CN" altLang="en-US" dirty="0"/>
+                  <a:rPr kumimoji="1" lang="zh-CN" altLang="en-US" dirty="0">
+                    <a:solidFill>
+                      <a:srgbClr val="0432FF"/>
+                    </a:solidFill>
+                  </a:rPr>
                   <a:t> </a:t>
                 </a:r>
                 <a:r>
@@ -11160,14 +11189,62 @@
                 </a:r>
                 <a:r>
                   <a:rPr kumimoji="1" lang="en-US" altLang="zh-CN" dirty="0"/>
-                  <a:t>popular</a:t>
+                  <a:t>popular,</a:t>
+                </a:r>
+                <a:r>
+                  <a:rPr kumimoji="1" lang="zh-CN" altLang="en-US" dirty="0"/>
+                  <a:t> </a:t>
+                </a:r>
+                <a:r>
+                  <a:rPr kumimoji="1" lang="en-US" altLang="zh-CN" dirty="0"/>
+                  <a:t>because</a:t>
+                </a:r>
+                <a:r>
+                  <a:rPr kumimoji="1" lang="zh-CN" altLang="en-US" dirty="0"/>
+                  <a:t> </a:t>
+                </a:r>
+                <a:r>
+                  <a:rPr kumimoji="1" lang="en-US" altLang="zh-CN" dirty="0"/>
+                  <a:t>it</a:t>
+                </a:r>
+                <a:r>
+                  <a:rPr kumimoji="1" lang="zh-CN" altLang="en-US" dirty="0"/>
+                  <a:t> </a:t>
+                </a:r>
+                <a:r>
+                  <a:rPr kumimoji="1" lang="en-US" altLang="zh-CN" dirty="0"/>
+                  <a:t>is</a:t>
+                </a:r>
+                <a:r>
+                  <a:rPr kumimoji="1" lang="zh-CN" altLang="en-US" dirty="0"/>
+                  <a:t> </a:t>
+                </a:r>
+                <a:r>
+                  <a:rPr kumimoji="1" lang="en-US" altLang="zh-CN" dirty="0"/>
+                  <a:t>easy</a:t>
+                </a:r>
+                <a:r>
+                  <a:rPr kumimoji="1" lang="zh-CN" altLang="en-US" dirty="0"/>
+                  <a:t> </a:t>
+                </a:r>
+                <a:r>
+                  <a:rPr kumimoji="1" lang="en-US" altLang="zh-CN" dirty="0"/>
+                  <a:t>to</a:t>
+                </a:r>
+                <a:r>
+                  <a:rPr kumimoji="1" lang="zh-CN" altLang="en-US" dirty="0"/>
+                  <a:t> </a:t>
+                </a:r>
+                <a:r>
+                  <a:rPr kumimoji="1" lang="en-US" altLang="zh-CN" dirty="0"/>
+                  <a:t>implement</a:t>
                 </a:r>
                 <a:endParaRPr kumimoji="1" lang="zh-CN" altLang="en-US" dirty="0"/>
               </a:p>
             </p:txBody>
           </p:sp>
         </mc:Choice>
-        <mc:Fallback xmlns="">
+        <mc:Fallback>
           <p:sp>
             <p:nvSpPr>
               <p:cNvPr id="3" name="内容占位符 2">
@@ -11188,7 +11265,7 @@
               <a:blipFill>
                 <a:blip r:embed="rId2"/>
                 <a:stretch>
-                  <a:fillRect l="-489" t="-1846" b="-18462"/>
+                  <a:fillRect l="-653" t="-1846" b="-7077"/>
                 </a:stretch>
               </a:blipFill>
             </p:spPr>
@@ -11221,6 +11298,237 @@
 </file>
 
 <file path=ppt/slides/slide16.xml><?xml version="1.0" encoding="utf-8"?>
+<p:sld xmlns:a="http://schemas.openxmlformats.org/drawingml/2006/main" xmlns:r="http://schemas.openxmlformats.org/officeDocument/2006/relationships" xmlns:p="http://schemas.openxmlformats.org/presentationml/2006/main">
+  <p:cSld>
+    <p:spTree>
+      <p:nvGrpSpPr>
+        <p:cNvPr id="1" name="">
+          <a:extLst>
+            <a:ext uri="{FF2B5EF4-FFF2-40B4-BE49-F238E27FC236}">
+              <a16:creationId xmlns:a16="http://schemas.microsoft.com/office/drawing/2014/main" id="{00D3D9E6-4CDE-9493-C834-0CE9424E5854}"/>
+            </a:ext>
+          </a:extLst>
+        </p:cNvPr>
+        <p:cNvGrpSpPr/>
+        <p:nvPr/>
+      </p:nvGrpSpPr>
+      <p:grpSpPr>
+        <a:xfrm>
+          <a:off x="0" y="0"/>
+          <a:ext cx="0" cy="0"/>
+          <a:chOff x="0" y="0"/>
+          <a:chExt cx="0" cy="0"/>
+        </a:xfrm>
+      </p:grpSpPr>
+      <p:sp>
+        <p:nvSpPr>
+          <p:cNvPr id="2" name="标题 1">
+            <a:extLst>
+              <a:ext uri="{FF2B5EF4-FFF2-40B4-BE49-F238E27FC236}">
+                <a16:creationId xmlns:a16="http://schemas.microsoft.com/office/drawing/2014/main" id="{061F6BDE-72D5-E2F6-B241-D1ACB70F74ED}"/>
+              </a:ext>
+            </a:extLst>
+          </p:cNvPr>
+          <p:cNvSpPr>
+            <a:spLocks noGrp="1"/>
+          </p:cNvSpPr>
+          <p:nvPr>
+            <p:ph type="title"/>
+          </p:nvPr>
+        </p:nvSpPr>
+        <p:spPr/>
+        <p:txBody>
+          <a:bodyPr/>
+          <a:lstStyle/>
+          <a:p>
+            <a:r>
+              <a:rPr kumimoji="1" lang="en-US" altLang="zh-CN" dirty="0"/>
+              <a:t>Brief</a:t>
+            </a:r>
+            <a:r>
+              <a:rPr kumimoji="1" lang="zh-CN" altLang="en-US" dirty="0"/>
+              <a:t> </a:t>
+            </a:r>
+            <a:r>
+              <a:rPr kumimoji="1" lang="en-US" altLang="zh-CN" dirty="0"/>
+              <a:t>History</a:t>
+            </a:r>
+            <a:endParaRPr kumimoji="1" lang="zh-CN" altLang="en-US" dirty="0"/>
+          </a:p>
+        </p:txBody>
+      </p:sp>
+      <p:sp>
+        <p:nvSpPr>
+          <p:cNvPr id="3" name="内容占位符 2">
+            <a:extLst>
+              <a:ext uri="{FF2B5EF4-FFF2-40B4-BE49-F238E27FC236}">
+                <a16:creationId xmlns:a16="http://schemas.microsoft.com/office/drawing/2014/main" id="{53B44872-7830-7717-5096-DED4A74F43D7}"/>
+              </a:ext>
+            </a:extLst>
+          </p:cNvPr>
+          <p:cNvSpPr>
+            <a:spLocks noGrp="1"/>
+          </p:cNvSpPr>
+          <p:nvPr>
+            <p:ph idx="1"/>
+          </p:nvPr>
+        </p:nvSpPr>
+        <p:spPr>
+          <a:xfrm>
+            <a:off x="1182688" y="2017713"/>
+            <a:ext cx="6513512" cy="4114800"/>
+          </a:xfrm>
+        </p:spPr>
+        <p:txBody>
+          <a:bodyPr/>
+          <a:lstStyle/>
+          <a:p>
+            <a:r>
+              <a:rPr lang="nl-NL" altLang="zh-CN" dirty="0"/>
+              <a:t>Gerhard </a:t>
+            </a:r>
+            <a:r>
+              <a:rPr lang="nl-NL" altLang="zh-CN" dirty="0" err="1"/>
+              <a:t>Gentzen</a:t>
+            </a:r>
+            <a:r>
+              <a:rPr lang="en-US" altLang="zh-CN" dirty="0"/>
+              <a:t>,</a:t>
+            </a:r>
+            <a:r>
+              <a:rPr lang="zh-CN" altLang="en-US" dirty="0"/>
+              <a:t> </a:t>
+            </a:r>
+            <a:r>
+              <a:rPr lang="en-US" altLang="zh-CN" dirty="0"/>
+              <a:t>1934/35</a:t>
+            </a:r>
+          </a:p>
+          <a:p>
+            <a:pPr lvl="1"/>
+            <a:r>
+              <a:rPr lang="zh-CN" altLang="zh-CN" dirty="0"/>
+              <a:t>Untersuchungen über das logische Schließen</a:t>
+            </a:r>
+            <a:endParaRPr lang="en-US" altLang="zh-CN" dirty="0"/>
+          </a:p>
+          <a:p>
+            <a:pPr lvl="2"/>
+            <a:r>
+              <a:rPr lang="en-US" altLang="zh-CN" dirty="0"/>
+              <a:t>Investigations into Logical Reasoning</a:t>
+            </a:r>
+            <a:endParaRPr lang="zh-CN" altLang="zh-CN" dirty="0"/>
+          </a:p>
+          <a:p>
+            <a:r>
+              <a:rPr kumimoji="1" lang="en-US" altLang="zh-CN" dirty="0"/>
+              <a:t>A</a:t>
+            </a:r>
+            <a:r>
+              <a:rPr kumimoji="1" lang="zh-CN" altLang="en-US" dirty="0"/>
+              <a:t> </a:t>
+            </a:r>
+            <a:r>
+              <a:rPr kumimoji="1" lang="en-US" altLang="zh-CN" dirty="0"/>
+              <a:t>system</a:t>
+            </a:r>
+            <a:r>
+              <a:rPr kumimoji="1" lang="zh-CN" altLang="en-US" dirty="0"/>
+              <a:t> </a:t>
+            </a:r>
+            <a:r>
+              <a:rPr kumimoji="1" lang="en-US" altLang="zh-CN" dirty="0"/>
+              <a:t>to</a:t>
+            </a:r>
+            <a:r>
+              <a:rPr kumimoji="1" lang="zh-CN" altLang="en-US" dirty="0"/>
+              <a:t> </a:t>
+            </a:r>
+            <a:r>
+              <a:rPr kumimoji="1" lang="en-US" altLang="zh-CN" dirty="0"/>
+              <a:t>reason</a:t>
+            </a:r>
+            <a:r>
+              <a:rPr kumimoji="1" lang="zh-CN" altLang="en-US" dirty="0"/>
+              <a:t> </a:t>
+            </a:r>
+            <a:r>
+              <a:rPr kumimoji="1" lang="en-US" altLang="zh-CN" dirty="0"/>
+              <a:t>the</a:t>
+            </a:r>
+            <a:r>
+              <a:rPr kumimoji="1" lang="zh-CN" altLang="en-US" dirty="0"/>
+              <a:t> </a:t>
+            </a:r>
+            <a:r>
+              <a:rPr kumimoji="1" lang="en-US" altLang="zh-CN" dirty="0"/>
+              <a:t>logic</a:t>
+            </a:r>
+            <a:r>
+              <a:rPr kumimoji="1" lang="zh-CN" altLang="en-US" dirty="0"/>
+              <a:t> </a:t>
+            </a:r>
+            <a:r>
+              <a:rPr kumimoji="1" lang="en-US" altLang="zh-CN" dirty="0"/>
+              <a:t>deduction</a:t>
+            </a:r>
+            <a:r>
+              <a:rPr kumimoji="1" lang="zh-CN" altLang="en-US" dirty="0"/>
+              <a:t> </a:t>
+            </a:r>
+            <a:r>
+              <a:rPr kumimoji="1" lang="en-US" altLang="zh-CN" dirty="0"/>
+              <a:t>itself</a:t>
+            </a:r>
+            <a:endParaRPr kumimoji="1" lang="zh-CN" altLang="en-US" dirty="0"/>
+          </a:p>
+        </p:txBody>
+      </p:sp>
+      <p:pic>
+        <p:nvPicPr>
+          <p:cNvPr id="4" name="图片 3">
+            <a:extLst>
+              <a:ext uri="{FF2B5EF4-FFF2-40B4-BE49-F238E27FC236}">
+                <a16:creationId xmlns:a16="http://schemas.microsoft.com/office/drawing/2014/main" id="{119B8266-5435-72B6-9701-E864373012B0}"/>
+              </a:ext>
+            </a:extLst>
+          </p:cNvPr>
+          <p:cNvPicPr>
+            <a:picLocks noChangeAspect="1"/>
+          </p:cNvPicPr>
+          <p:nvPr/>
+        </p:nvPicPr>
+        <p:blipFill>
+          <a:blip r:embed="rId2"/>
+          <a:stretch>
+            <a:fillRect/>
+          </a:stretch>
+        </p:blipFill>
+        <p:spPr>
+          <a:xfrm>
+            <a:off x="7848599" y="2017713"/>
+            <a:ext cx="1127273" cy="1621976"/>
+          </a:xfrm>
+          <a:prstGeom prst="rect">
+            <a:avLst/>
+          </a:prstGeom>
+        </p:spPr>
+      </p:pic>
+    </p:spTree>
+    <p:extLst>
+      <p:ext uri="{BB962C8B-B14F-4D97-AF65-F5344CB8AC3E}">
+        <p14:creationId xmlns:p14="http://schemas.microsoft.com/office/powerpoint/2010/main" val="1837339361"/>
+      </p:ext>
+    </p:extLst>
+  </p:cSld>
+  <p:clrMapOvr>
+    <a:masterClrMapping/>
+  </p:clrMapOvr>
+</p:sld>
+</file>
+
+<file path=ppt/slides/slide17.xml><?xml version="1.0" encoding="utf-8"?>
 <p:sld xmlns:a="http://schemas.openxmlformats.org/drawingml/2006/main" xmlns:r="http://schemas.openxmlformats.org/officeDocument/2006/relationships" xmlns:p="http://schemas.openxmlformats.org/presentationml/2006/main">
   <p:cSld>
     <p:spTree>
@@ -11276,14 +11584,22 @@
             </a:r>
             <a:r>
               <a:rPr kumimoji="1" lang="en-US" altLang="zh-CN" dirty="0"/>
-              <a:t>judgments</a:t>
+              <a:t>basic</a:t>
+            </a:r>
+            <a:r>
+              <a:rPr kumimoji="1" lang="zh-CN" altLang="en-US" dirty="0"/>
+              <a:t> </a:t>
+            </a:r>
+            <a:r>
+              <a:rPr kumimoji="1" lang="en-US" altLang="zh-CN" dirty="0"/>
+              <a:t>idea</a:t>
             </a:r>
             <a:endParaRPr kumimoji="1" lang="zh-CN" altLang="en-US" dirty="0"/>
           </a:p>
         </p:txBody>
       </p:sp>
-      <mc:AlternateContent xmlns:mc="http://schemas.openxmlformats.org/markup-compatibility/2006" xmlns:a14="http://schemas.microsoft.com/office/drawing/2010/main">
-        <mc:Choice Requires="a14">
+      <mc:AlternateContent xmlns:mc="http://schemas.openxmlformats.org/markup-compatibility/2006">
+        <mc:Choice xmlns:a14="http://schemas.microsoft.com/office/drawing/2010/main" Requires="a14">
           <p:sp>
             <p:nvSpPr>
               <p:cNvPr id="3" name="内容占位符 2">
@@ -11311,8 +11627,56 @@
               <a:lstStyle/>
               <a:p>
                 <a:r>
-                  <a:rPr kumimoji="1" lang="en-US" altLang="zh-CN" dirty="0"/>
-                  <a:t>Judgment:</a:t>
+                  <a:rPr kumimoji="1" lang="en-US" altLang="zh-CN" sz="2400" dirty="0"/>
+                  <a:t>Suppose</a:t>
+                </a:r>
+                <a:r>
+                  <a:rPr kumimoji="1" lang="zh-CN" altLang="en-US" sz="2400" dirty="0"/>
+                  <a:t> </a:t>
+                </a:r>
+                <a:r>
+                  <a:rPr kumimoji="1" lang="en-US" altLang="zh-CN" sz="2400" dirty="0"/>
+                  <a:t>we</a:t>
+                </a:r>
+                <a:r>
+                  <a:rPr kumimoji="1" lang="zh-CN" altLang="en-US" sz="2400" dirty="0"/>
+                  <a:t> </a:t>
+                </a:r>
+                <a:r>
+                  <a:rPr kumimoji="1" lang="en-US" altLang="zh-CN" sz="2400" dirty="0"/>
+                  <a:t>aim</a:t>
+                </a:r>
+                <a:r>
+                  <a:rPr kumimoji="1" lang="zh-CN" altLang="en-US" sz="2400" dirty="0"/>
+                  <a:t> </a:t>
+                </a:r>
+                <a:r>
+                  <a:rPr kumimoji="1" lang="en-US" altLang="zh-CN" sz="2400" dirty="0"/>
+                  <a:t>to</a:t>
+                </a:r>
+                <a:r>
+                  <a:rPr kumimoji="1" lang="zh-CN" altLang="en-US" sz="2400" dirty="0"/>
+                  <a:t> </a:t>
+                </a:r>
+                <a:r>
+                  <a:rPr kumimoji="1" lang="en-US" altLang="zh-CN" sz="2400" dirty="0"/>
+                  <a:t>prove</a:t>
+                </a:r>
+                <a:r>
+                  <a:rPr kumimoji="1" lang="zh-CN" altLang="en-US" sz="2400" dirty="0"/>
+                  <a:t> </a:t>
+                </a:r>
+                <a:r>
+                  <a:rPr kumimoji="1" lang="en-US" altLang="zh-CN" sz="2400" dirty="0"/>
+                  <a:t>a</a:t>
+                </a:r>
+                <a:r>
+                  <a:rPr kumimoji="1" lang="zh-CN" altLang="en-US" sz="2400" dirty="0"/>
+                  <a:t> </a:t>
+                </a:r>
+                <a:r>
+                  <a:rPr kumimoji="1" lang="en-US" altLang="zh-CN" sz="2400" dirty="0"/>
+                  <a:t>proposition</a:t>
                 </a:r>
               </a:p>
               <a:p>
@@ -11321,10 +11685,2414 @@
                 </a:pPr>
                 <a14:m>
                   <m:oMathPara xmlns:m="http://schemas.openxmlformats.org/officeDocument/2006/math">
-                    <m:oMathParaPr>
-                      <m:jc m:val="centerGroup"/>
-                    </m:oMathParaPr>
-                    <m:oMath xmlns:m="http://schemas.openxmlformats.org/officeDocument/2006/math">
+                    <m:oMath>
+                      <m:r>
+                        <a:rPr kumimoji="1" lang="en-US" altLang="zh-CN" sz="2400" b="0" i="1" smtClean="0">
+                          <a:solidFill>
+                            <a:srgbClr val="0432FF"/>
+                          </a:solidFill>
+                          <a:latin typeface="Cambria Math" panose="02040503050406030204" pitchFamily="18" charset="0"/>
+                          <a:ea typeface="Cambria Math" panose="02040503050406030204" pitchFamily="18" charset="0"/>
+                        </a:rPr>
+                        <m:t>𝑃</m:t>
+                      </m:r>
+                      <m:r>
+                        <a:rPr kumimoji="1" lang="en-US" altLang="zh-CN" sz="2400" b="0" i="1" smtClean="0">
+                          <a:solidFill>
+                            <a:srgbClr val="0432FF"/>
+                          </a:solidFill>
+                          <a:latin typeface="Cambria Math" panose="02040503050406030204" pitchFamily="18" charset="0"/>
+                          <a:ea typeface="Cambria Math" panose="02040503050406030204" pitchFamily="18" charset="0"/>
+                        </a:rPr>
+                        <m:t>→</m:t>
+                      </m:r>
+                      <m:r>
+                        <a:rPr kumimoji="1" lang="en-US" altLang="zh-CN" sz="2400" b="0" i="1" smtClean="0">
+                          <a:solidFill>
+                            <a:srgbClr val="0432FF"/>
+                          </a:solidFill>
+                          <a:latin typeface="Cambria Math" panose="02040503050406030204" pitchFamily="18" charset="0"/>
+                          <a:ea typeface="Cambria Math" panose="02040503050406030204" pitchFamily="18" charset="0"/>
+                        </a:rPr>
+                        <m:t>𝑄</m:t>
+                      </m:r>
+                    </m:oMath>
+                  </m:oMathPara>
+                </a14:m>
+                <a:endParaRPr kumimoji="1" lang="en-US" altLang="zh-CN" sz="2400" dirty="0">
+                  <a:solidFill>
+                    <a:srgbClr val="0432FF"/>
+                  </a:solidFill>
+                </a:endParaRPr>
+              </a:p>
+              <a:p>
+                <a:pPr marL="0" indent="0">
+                  <a:buNone/>
+                </a:pPr>
+                <a:r>
+                  <a:rPr kumimoji="1" lang="en-US" altLang="zh-CN" sz="2400" dirty="0"/>
+                  <a:t>Reads:</a:t>
+                </a:r>
+                <a:r>
+                  <a:rPr kumimoji="1" lang="zh-CN" altLang="en-US" sz="2400" dirty="0"/>
+                  <a:t> </a:t>
+                </a:r>
+                <a:r>
+                  <a:rPr kumimoji="1" lang="en-US" altLang="zh-CN" sz="2400" dirty="0"/>
+                  <a:t>“if</a:t>
+                </a:r>
+                <a:r>
+                  <a:rPr kumimoji="1" lang="zh-CN" altLang="en-US" sz="2400" dirty="0"/>
+                  <a:t> </a:t>
+                </a:r>
+                <a:r>
+                  <a:rPr kumimoji="1" lang="en-US" altLang="zh-CN" sz="2400" dirty="0"/>
+                  <a:t>we</a:t>
+                </a:r>
+                <a:r>
+                  <a:rPr kumimoji="1" lang="zh-CN" altLang="en-US" sz="2400" dirty="0"/>
+                  <a:t> </a:t>
+                </a:r>
+                <a:r>
+                  <a:rPr kumimoji="1" lang="en-US" altLang="zh-CN" sz="2400" dirty="0"/>
+                  <a:t>suppose</a:t>
+                </a:r>
+                <a:r>
+                  <a:rPr kumimoji="1" lang="zh-CN" altLang="en-US" sz="2400" dirty="0"/>
+                  <a:t> </a:t>
+                </a:r>
+                <a:r>
+                  <a:rPr kumimoji="1" lang="en-US" altLang="zh-CN" sz="2400" dirty="0"/>
+                  <a:t>P,</a:t>
+                </a:r>
+                <a:r>
+                  <a:rPr kumimoji="1" lang="zh-CN" altLang="en-US" sz="2400" dirty="0"/>
+                  <a:t> </a:t>
+                </a:r>
+                <a:r>
+                  <a:rPr kumimoji="1" lang="en-US" altLang="zh-CN" sz="2400" dirty="0"/>
+                  <a:t>then</a:t>
+                </a:r>
+                <a:r>
+                  <a:rPr kumimoji="1" lang="zh-CN" altLang="en-US" sz="2400" dirty="0"/>
+                  <a:t> </a:t>
+                </a:r>
+                <a:r>
+                  <a:rPr kumimoji="1" lang="en-US" altLang="zh-CN" sz="2400" dirty="0"/>
+                  <a:t>we</a:t>
+                </a:r>
+                <a:r>
+                  <a:rPr kumimoji="1" lang="zh-CN" altLang="en-US" sz="2400" dirty="0"/>
+                  <a:t> </a:t>
+                </a:r>
+                <a:r>
+                  <a:rPr kumimoji="1" lang="en-US" altLang="zh-CN" sz="2400" dirty="0"/>
+                  <a:t>can</a:t>
+                </a:r>
+                <a:r>
+                  <a:rPr kumimoji="1" lang="zh-CN" altLang="en-US" sz="2400" dirty="0"/>
+                  <a:t> </a:t>
+                </a:r>
+                <a:r>
+                  <a:rPr kumimoji="1" lang="en-US" altLang="zh-CN" sz="2400" dirty="0"/>
+                  <a:t>prove</a:t>
+                </a:r>
+                <a:r>
+                  <a:rPr kumimoji="1" lang="zh-CN" altLang="en-US" sz="2400" dirty="0"/>
+                  <a:t> </a:t>
+                </a:r>
+                <a:r>
+                  <a:rPr kumimoji="1" lang="en-US" altLang="zh-CN" sz="2400" dirty="0"/>
+                  <a:t>Q”</a:t>
+                </a:r>
+              </a:p>
+              <a:p>
+                <a:pPr marL="0" indent="0">
+                  <a:buNone/>
+                </a:pPr>
+                <a:r>
+                  <a:rPr kumimoji="1" lang="en-US" altLang="zh-CN" sz="2400" dirty="0"/>
+                  <a:t>Then</a:t>
+                </a:r>
+                <a:r>
+                  <a:rPr kumimoji="1" lang="zh-CN" altLang="en-US" sz="2400" dirty="0"/>
+                  <a:t> </a:t>
+                </a:r>
+                <a:r>
+                  <a:rPr kumimoji="1" lang="en-US" altLang="zh-CN" sz="2400" dirty="0"/>
+                  <a:t>we</a:t>
+                </a:r>
+                <a:r>
+                  <a:rPr kumimoji="1" lang="zh-CN" altLang="en-US" sz="2400" dirty="0"/>
+                  <a:t> </a:t>
+                </a:r>
+                <a:r>
+                  <a:rPr kumimoji="1" lang="en-US" altLang="zh-CN" sz="2400" dirty="0"/>
+                  <a:t>can</a:t>
+                </a:r>
+                <a:r>
+                  <a:rPr kumimoji="1" lang="zh-CN" altLang="en-US" sz="2400" dirty="0"/>
+                  <a:t> </a:t>
+                </a:r>
+                <a:r>
+                  <a:rPr kumimoji="1" lang="en-US" altLang="zh-CN" sz="2400" dirty="0"/>
+                  <a:t>rewrite</a:t>
+                </a:r>
+                <a:r>
+                  <a:rPr kumimoji="1" lang="zh-CN" altLang="en-US" sz="2400" dirty="0"/>
+                  <a:t> </a:t>
+                </a:r>
+                <a:r>
+                  <a:rPr kumimoji="1" lang="en-US" altLang="zh-CN" sz="2400" dirty="0"/>
+                  <a:t>the</a:t>
+                </a:r>
+                <a:r>
+                  <a:rPr kumimoji="1" lang="zh-CN" altLang="en-US" sz="2400" dirty="0"/>
+                  <a:t> </a:t>
+                </a:r>
+                <a:r>
+                  <a:rPr kumimoji="1" lang="en-US" altLang="zh-CN" sz="2400" dirty="0"/>
+                  <a:t>target</a:t>
+                </a:r>
+                <a:r>
+                  <a:rPr kumimoji="1" lang="zh-CN" altLang="en-US" sz="2400" dirty="0"/>
+                  <a:t> </a:t>
+                </a:r>
+                <a:r>
+                  <a:rPr kumimoji="1" lang="en-US" altLang="zh-CN" sz="2400" dirty="0"/>
+                  <a:t>as</a:t>
+                </a:r>
+                <a:r>
+                  <a:rPr kumimoji="1" lang="zh-CN" altLang="en-US" sz="2400" dirty="0"/>
+                  <a:t>  </a:t>
+                </a:r>
+                <a:endParaRPr kumimoji="1" lang="en-US" altLang="zh-CN" sz="2400" dirty="0"/>
+              </a:p>
+              <a:p>
+                <a:pPr marL="0" indent="0" algn="ctr">
+                  <a:buNone/>
+                </a:pPr>
+                <a:r>
+                  <a:rPr kumimoji="1" lang="en-US" altLang="zh-CN" sz="2400" i="1" dirty="0">
+                    <a:solidFill>
+                      <a:srgbClr val="0432FF"/>
+                    </a:solidFill>
+                    <a:latin typeface="Cambria Math" panose="02040503050406030204" pitchFamily="18" charset="0"/>
+                    <a:ea typeface="Cambria Math" panose="02040503050406030204" pitchFamily="18" charset="0"/>
+                  </a:rPr>
+                  <a:t>P</a:t>
+                </a:r>
+                <a:r>
+                  <a:rPr kumimoji="1" lang="zh-CN" altLang="en-US" sz="2400" i="1" dirty="0">
+                    <a:solidFill>
+                      <a:srgbClr val="0432FF"/>
+                    </a:solidFill>
+                    <a:latin typeface="Cambria Math" panose="02040503050406030204" pitchFamily="18" charset="0"/>
+                    <a:ea typeface="Cambria Math" panose="02040503050406030204" pitchFamily="18" charset="0"/>
+                  </a:rPr>
+                  <a:t> </a:t>
+                </a:r>
+                <a14:m>
+                  <m:oMath xmlns:m="http://schemas.openxmlformats.org/officeDocument/2006/math">
+                    <m:r>
+                      <a:rPr kumimoji="1" lang="el-GR" altLang="zh-CN" sz="2400" i="1">
+                        <a:solidFill>
+                          <a:srgbClr val="0432FF"/>
+                        </a:solidFill>
+                        <a:latin typeface="Cambria Math" panose="02040503050406030204" pitchFamily="18" charset="0"/>
+                        <a:ea typeface="Cambria Math" panose="02040503050406030204" pitchFamily="18" charset="0"/>
+                      </a:rPr>
+                      <m:t>⊢</m:t>
+                    </m:r>
+                    <m:r>
+                      <a:rPr kumimoji="1" lang="en-US" altLang="zh-CN" sz="2400" b="0" i="1" smtClean="0">
+                        <a:solidFill>
+                          <a:srgbClr val="0432FF"/>
+                        </a:solidFill>
+                        <a:latin typeface="Cambria Math" panose="02040503050406030204" pitchFamily="18" charset="0"/>
+                        <a:ea typeface="Cambria Math" panose="02040503050406030204" pitchFamily="18" charset="0"/>
+                      </a:rPr>
+                      <m:t>𝑄</m:t>
+                    </m:r>
+                  </m:oMath>
+                </a14:m>
+                <a:endParaRPr kumimoji="1" lang="en-US" altLang="zh-CN" sz="2400" dirty="0">
+                  <a:solidFill>
+                    <a:srgbClr val="0432FF"/>
+                  </a:solidFill>
+                </a:endParaRPr>
+              </a:p>
+              <a:p>
+                <a:pPr marL="0" indent="0">
+                  <a:buNone/>
+                </a:pPr>
+                <a:r>
+                  <a:rPr kumimoji="1" lang="en-US" altLang="zh-CN" sz="2400" dirty="0"/>
+                  <a:t>where</a:t>
+                </a:r>
+                <a:r>
+                  <a:rPr kumimoji="1" lang="zh-CN" altLang="en-US" sz="2400" dirty="0"/>
+                  <a:t> </a:t>
+                </a:r>
+                <a:r>
+                  <a:rPr kumimoji="1" lang="en-US" altLang="zh-CN" sz="2400" dirty="0"/>
+                  <a:t>P</a:t>
+                </a:r>
+                <a:r>
+                  <a:rPr kumimoji="1" lang="zh-CN" altLang="en-US" sz="2400" dirty="0"/>
+                  <a:t> </a:t>
+                </a:r>
+                <a:r>
+                  <a:rPr kumimoji="1" lang="en-US" altLang="zh-CN" sz="2400" dirty="0"/>
+                  <a:t>is</a:t>
+                </a:r>
+                <a:r>
+                  <a:rPr kumimoji="1" lang="zh-CN" altLang="en-US" sz="2400" dirty="0"/>
+                  <a:t> </a:t>
+                </a:r>
+                <a:r>
+                  <a:rPr kumimoji="1" lang="en-US" altLang="zh-CN" sz="2400" dirty="0"/>
+                  <a:t>the</a:t>
+                </a:r>
+                <a:r>
+                  <a:rPr kumimoji="1" lang="zh-CN" altLang="en-US" sz="2400" dirty="0"/>
+                  <a:t> </a:t>
+                </a:r>
+                <a:r>
+                  <a:rPr kumimoji="1" lang="en-US" altLang="zh-CN" sz="2400" dirty="0"/>
+                  <a:t>assumption</a:t>
+                </a:r>
+                <a:r>
+                  <a:rPr kumimoji="1" lang="zh-CN" altLang="en-US" sz="2400" dirty="0"/>
+                  <a:t> </a:t>
+                </a:r>
+                <a:r>
+                  <a:rPr kumimoji="1" lang="en-US" altLang="zh-CN" sz="2400" dirty="0"/>
+                  <a:t>and</a:t>
+                </a:r>
+                <a:r>
+                  <a:rPr kumimoji="1" lang="zh-CN" altLang="en-US" sz="2400" dirty="0"/>
+                  <a:t> </a:t>
+                </a:r>
+                <a:r>
+                  <a:rPr kumimoji="1" lang="en-US" altLang="zh-CN" sz="2400" dirty="0"/>
+                  <a:t>Q</a:t>
+                </a:r>
+                <a:r>
+                  <a:rPr kumimoji="1" lang="zh-CN" altLang="en-US" sz="2400" dirty="0"/>
+                  <a:t> </a:t>
+                </a:r>
+                <a:r>
+                  <a:rPr kumimoji="1" lang="en-US" altLang="zh-CN" sz="2400" dirty="0"/>
+                  <a:t>is</a:t>
+                </a:r>
+                <a:r>
+                  <a:rPr kumimoji="1" lang="zh-CN" altLang="en-US" sz="2400" dirty="0"/>
+                  <a:t> </a:t>
+                </a:r>
+                <a:r>
+                  <a:rPr kumimoji="1" lang="en-US" altLang="zh-CN" sz="2400" dirty="0"/>
+                  <a:t>the</a:t>
+                </a:r>
+                <a:r>
+                  <a:rPr kumimoji="1" lang="zh-CN" altLang="en-US" sz="2400" dirty="0"/>
+                  <a:t> </a:t>
+                </a:r>
+                <a:r>
+                  <a:rPr kumimoji="1" lang="en-US" altLang="zh-CN" sz="2400" dirty="0"/>
+                  <a:t>target</a:t>
+                </a:r>
+              </a:p>
+              <a:p>
+                <a:pPr marL="0" indent="0">
+                  <a:buNone/>
+                </a:pPr>
+                <a:r>
+                  <a:rPr kumimoji="1" lang="en-US" altLang="zh-CN" sz="2400" dirty="0"/>
+                  <a:t>So</a:t>
+                </a:r>
+                <a:r>
+                  <a:rPr kumimoji="1" lang="zh-CN" altLang="en-US" sz="2400" dirty="0"/>
+                  <a:t> </a:t>
+                </a:r>
+                <a:r>
+                  <a:rPr kumimoji="1" lang="en-US" altLang="zh-CN" sz="2400" dirty="0"/>
+                  <a:t>that</a:t>
+                </a:r>
+                <a:r>
+                  <a:rPr kumimoji="1" lang="zh-CN" altLang="en-US" sz="2400" dirty="0"/>
+                  <a:t> </a:t>
+                </a:r>
+                <a:r>
+                  <a:rPr kumimoji="1" lang="en-US" altLang="zh-CN" sz="2400" dirty="0"/>
+                  <a:t>the</a:t>
+                </a:r>
+                <a:r>
+                  <a:rPr kumimoji="1" lang="zh-CN" altLang="en-US" sz="2400" dirty="0"/>
+                  <a:t> </a:t>
+                </a:r>
+                <a:r>
+                  <a:rPr kumimoji="1" lang="en-US" altLang="zh-CN" sz="2400" dirty="0"/>
+                  <a:t>proof</a:t>
+                </a:r>
+                <a:r>
+                  <a:rPr kumimoji="1" lang="zh-CN" altLang="en-US" sz="2400" dirty="0"/>
+                  <a:t> </a:t>
+                </a:r>
+                <a:r>
+                  <a:rPr kumimoji="1" lang="en-US" altLang="zh-CN" sz="2400" dirty="0"/>
+                  <a:t>can</a:t>
+                </a:r>
+                <a:r>
+                  <a:rPr kumimoji="1" lang="zh-CN" altLang="en-US" sz="2400" dirty="0"/>
+                  <a:t> </a:t>
+                </a:r>
+                <a:r>
+                  <a:rPr kumimoji="1" lang="en-US" altLang="zh-CN" sz="2400" dirty="0"/>
+                  <a:t>proceed</a:t>
+                </a:r>
+                <a:r>
+                  <a:rPr kumimoji="1" lang="zh-CN" altLang="en-US" sz="2400" dirty="0"/>
+                  <a:t> </a:t>
+                </a:r>
+                <a:r>
+                  <a:rPr kumimoji="1" lang="en-US" altLang="zh-CN" sz="2400" dirty="0"/>
+                  <a:t>to</a:t>
+                </a:r>
+                <a:r>
+                  <a:rPr kumimoji="1" lang="zh-CN" altLang="en-US" sz="2400" dirty="0"/>
+                  <a:t> </a:t>
+                </a:r>
+                <a:r>
+                  <a:rPr kumimoji="1" lang="en-US" altLang="zh-CN" sz="2400" dirty="0"/>
+                  <a:t>prove</a:t>
+                </a:r>
+                <a:r>
+                  <a:rPr kumimoji="1" lang="zh-CN" altLang="en-US" sz="2400" dirty="0"/>
+                  <a:t> </a:t>
+                </a:r>
+                <a:r>
+                  <a:rPr kumimoji="1" lang="en-US" altLang="zh-CN" sz="2400" dirty="0"/>
+                  <a:t>Q</a:t>
+                </a:r>
+              </a:p>
+            </p:txBody>
+          </p:sp>
+        </mc:Choice>
+        <mc:Fallback>
+          <p:sp>
+            <p:nvSpPr>
+              <p:cNvPr id="3" name="内容占位符 2">
+                <a:extLst>
+                  <a:ext uri="{FF2B5EF4-FFF2-40B4-BE49-F238E27FC236}">
+                    <a16:creationId xmlns:a16="http://schemas.microsoft.com/office/drawing/2014/main" id="{DB11951C-1764-D141-AF08-2BA3416EEABE}"/>
+                  </a:ext>
+                </a:extLst>
+              </p:cNvPr>
+              <p:cNvSpPr>
+                <a:spLocks noGrp="1" noRot="1" noChangeAspect="1" noMove="1" noResize="1" noEditPoints="1" noAdjustHandles="1" noChangeArrowheads="1" noChangeShapeType="1" noTextEdit="1"/>
+              </p:cNvSpPr>
+              <p:nvPr>
+                <p:ph idx="1"/>
+              </p:nvPr>
+            </p:nvSpPr>
+            <p:spPr>
+              <a:xfrm>
+                <a:off x="1182688" y="2017713"/>
+                <a:ext cx="7772400" cy="4114800"/>
+              </a:xfrm>
+              <a:blipFill>
+                <a:blip r:embed="rId2"/>
+                <a:stretch>
+                  <a:fillRect l="-1305" t="-923"/>
+                </a:stretch>
+              </a:blipFill>
+            </p:spPr>
+            <p:txBody>
+              <a:bodyPr/>
+              <a:lstStyle/>
+              <a:p>
+                <a:r>
+                  <a:rPr lang="zh-CN" altLang="en-US">
+                    <a:noFill/>
+                  </a:rPr>
+                  <a:t> </a:t>
+                </a:r>
+              </a:p>
+            </p:txBody>
+          </p:sp>
+        </mc:Fallback>
+      </mc:AlternateContent>
+    </p:spTree>
+    <p:extLst>
+      <p:ext uri="{BB962C8B-B14F-4D97-AF65-F5344CB8AC3E}">
+        <p14:creationId xmlns:p14="http://schemas.microsoft.com/office/powerpoint/2010/main" val="2956083337"/>
+      </p:ext>
+    </p:extLst>
+  </p:cSld>
+  <p:clrMapOvr>
+    <a:masterClrMapping/>
+  </p:clrMapOvr>
+</p:sld>
+</file>
+
+<file path=ppt/slides/slide18.xml><?xml version="1.0" encoding="utf-8"?>
+<p:sld xmlns:a="http://schemas.openxmlformats.org/drawingml/2006/main" xmlns:r="http://schemas.openxmlformats.org/officeDocument/2006/relationships" xmlns:p="http://schemas.openxmlformats.org/presentationml/2006/main">
+  <p:cSld>
+    <p:spTree>
+      <p:nvGrpSpPr>
+        <p:cNvPr id="1" name="">
+          <a:extLst>
+            <a:ext uri="{FF2B5EF4-FFF2-40B4-BE49-F238E27FC236}">
+              <a16:creationId xmlns:a16="http://schemas.microsoft.com/office/drawing/2014/main" id="{AF543AED-34E3-C508-F8D9-3E9C86E99D6E}"/>
+            </a:ext>
+          </a:extLst>
+        </p:cNvPr>
+        <p:cNvGrpSpPr/>
+        <p:nvPr/>
+      </p:nvGrpSpPr>
+      <p:grpSpPr>
+        <a:xfrm>
+          <a:off x="0" y="0"/>
+          <a:ext cx="0" cy="0"/>
+          <a:chOff x="0" y="0"/>
+          <a:chExt cx="0" cy="0"/>
+        </a:xfrm>
+      </p:grpSpPr>
+      <p:sp>
+        <p:nvSpPr>
+          <p:cNvPr id="2" name="标题 1">
+            <a:extLst>
+              <a:ext uri="{FF2B5EF4-FFF2-40B4-BE49-F238E27FC236}">
+                <a16:creationId xmlns:a16="http://schemas.microsoft.com/office/drawing/2014/main" id="{862AE6D3-9C5B-5C12-7C8C-7E5A78CAA2DC}"/>
+              </a:ext>
+            </a:extLst>
+          </p:cNvPr>
+          <p:cNvSpPr>
+            <a:spLocks noGrp="1"/>
+          </p:cNvSpPr>
+          <p:nvPr>
+            <p:ph type="title"/>
+          </p:nvPr>
+        </p:nvSpPr>
+        <p:spPr/>
+        <p:txBody>
+          <a:bodyPr/>
+          <a:lstStyle/>
+          <a:p>
+            <a:r>
+              <a:rPr kumimoji="1" lang="en-US" altLang="zh-CN" dirty="0"/>
+              <a:t>Natural</a:t>
+            </a:r>
+            <a:r>
+              <a:rPr kumimoji="1" lang="zh-CN" altLang="en-US" dirty="0"/>
+              <a:t> </a:t>
+            </a:r>
+            <a:r>
+              <a:rPr kumimoji="1" lang="en-US" altLang="zh-CN" dirty="0"/>
+              <a:t>deduction:</a:t>
+            </a:r>
+            <a:r>
+              <a:rPr kumimoji="1" lang="zh-CN" altLang="en-US" dirty="0"/>
+              <a:t> </a:t>
+            </a:r>
+            <a:r>
+              <a:rPr kumimoji="1" lang="en-US" altLang="zh-CN" dirty="0"/>
+              <a:t>basic</a:t>
+            </a:r>
+            <a:r>
+              <a:rPr kumimoji="1" lang="zh-CN" altLang="en-US" dirty="0"/>
+              <a:t> </a:t>
+            </a:r>
+            <a:r>
+              <a:rPr kumimoji="1" lang="en-US" altLang="zh-CN" dirty="0"/>
+              <a:t>idea</a:t>
+            </a:r>
+            <a:endParaRPr kumimoji="1" lang="zh-CN" altLang="en-US" dirty="0"/>
+          </a:p>
+        </p:txBody>
+      </p:sp>
+      <mc:AlternateContent xmlns:mc="http://schemas.openxmlformats.org/markup-compatibility/2006">
+        <mc:Choice xmlns:a14="http://schemas.microsoft.com/office/drawing/2010/main" Requires="a14">
+          <p:sp>
+            <p:nvSpPr>
+              <p:cNvPr id="3" name="内容占位符 2">
+                <a:extLst>
+                  <a:ext uri="{FF2B5EF4-FFF2-40B4-BE49-F238E27FC236}">
+                    <a16:creationId xmlns:a16="http://schemas.microsoft.com/office/drawing/2014/main" id="{920D56A3-0971-3E34-EC41-A28B9D54A48C}"/>
+                  </a:ext>
+                </a:extLst>
+              </p:cNvPr>
+              <p:cNvSpPr>
+                <a:spLocks noGrp="1"/>
+              </p:cNvSpPr>
+              <p:nvPr>
+                <p:ph idx="1"/>
+              </p:nvPr>
+            </p:nvSpPr>
+            <p:spPr>
+              <a:xfrm>
+                <a:off x="1182688" y="2017713"/>
+                <a:ext cx="7772400" cy="4114800"/>
+              </a:xfrm>
+            </p:spPr>
+            <p:txBody>
+              <a:bodyPr/>
+              <a:lstStyle/>
+              <a:p>
+                <a:r>
+                  <a:rPr kumimoji="1" lang="en-US" altLang="zh-CN" sz="2400" dirty="0"/>
+                  <a:t>One</a:t>
+                </a:r>
+                <a:r>
+                  <a:rPr kumimoji="1" lang="zh-CN" altLang="en-US" sz="2400" dirty="0"/>
+                  <a:t> </a:t>
+                </a:r>
+                <a:r>
+                  <a:rPr kumimoji="1" lang="en-US" altLang="zh-CN" sz="2400" dirty="0"/>
+                  <a:t>example:</a:t>
+                </a:r>
+              </a:p>
+              <a:p>
+                <a:pPr marL="0" indent="0">
+                  <a:buNone/>
+                </a:pPr>
+                <a14:m>
+                  <m:oMathPara xmlns:m="http://schemas.openxmlformats.org/officeDocument/2006/math">
+                    <m:oMath>
+                      <m:r>
+                        <a:rPr kumimoji="1" lang="en-US" altLang="zh-CN" sz="2400" b="0" i="1" smtClean="0">
+                          <a:solidFill>
+                            <a:srgbClr val="0432FF"/>
+                          </a:solidFill>
+                          <a:latin typeface="Cambria Math" panose="02040503050406030204" pitchFamily="18" charset="0"/>
+                          <a:ea typeface="Cambria Math" panose="02040503050406030204" pitchFamily="18" charset="0"/>
+                        </a:rPr>
+                        <m:t>𝑃</m:t>
+                      </m:r>
+                      <m:r>
+                        <a:rPr kumimoji="1" lang="en-US" altLang="zh-CN" sz="2400" b="0" i="1" smtClean="0">
+                          <a:solidFill>
+                            <a:srgbClr val="0432FF"/>
+                          </a:solidFill>
+                          <a:latin typeface="Cambria Math" panose="02040503050406030204" pitchFamily="18" charset="0"/>
+                          <a:ea typeface="Cambria Math" panose="02040503050406030204" pitchFamily="18" charset="0"/>
+                        </a:rPr>
+                        <m:t>→</m:t>
+                      </m:r>
+                      <m:r>
+                        <a:rPr kumimoji="1" lang="en-US" altLang="zh-CN" sz="2400" b="0" i="1" smtClean="0">
+                          <a:solidFill>
+                            <a:srgbClr val="0432FF"/>
+                          </a:solidFill>
+                          <a:latin typeface="Cambria Math" panose="02040503050406030204" pitchFamily="18" charset="0"/>
+                          <a:ea typeface="Cambria Math" panose="02040503050406030204" pitchFamily="18" charset="0"/>
+                        </a:rPr>
+                        <m:t>𝑃</m:t>
+                      </m:r>
+                    </m:oMath>
+                  </m:oMathPara>
+                </a14:m>
+                <a:endParaRPr kumimoji="1" lang="en-US" altLang="zh-CN" sz="2400" dirty="0">
+                  <a:solidFill>
+                    <a:srgbClr val="0432FF"/>
+                  </a:solidFill>
+                </a:endParaRPr>
+              </a:p>
+              <a:p>
+                <a:pPr marL="0" indent="0">
+                  <a:buNone/>
+                </a:pPr>
+                <a:r>
+                  <a:rPr kumimoji="1" lang="en-US" altLang="zh-CN" sz="2400" dirty="0"/>
+                  <a:t>is</a:t>
+                </a:r>
+                <a:r>
+                  <a:rPr kumimoji="1" lang="zh-CN" altLang="en-US" sz="2400" dirty="0"/>
+                  <a:t> </a:t>
+                </a:r>
+                <a:r>
+                  <a:rPr kumimoji="1" lang="en-US" altLang="zh-CN" sz="2400" dirty="0"/>
+                  <a:t>converted</a:t>
+                </a:r>
+                <a:r>
+                  <a:rPr kumimoji="1" lang="zh-CN" altLang="en-US" sz="2400" dirty="0"/>
+                  <a:t> </a:t>
+                </a:r>
+                <a:r>
+                  <a:rPr kumimoji="1" lang="en-US" altLang="zh-CN" sz="2400" dirty="0"/>
+                  <a:t>into</a:t>
+                </a:r>
+                <a:r>
+                  <a:rPr kumimoji="1" lang="zh-CN" altLang="en-US" sz="2400" dirty="0"/>
+                  <a:t>  </a:t>
+                </a:r>
+                <a:endParaRPr kumimoji="1" lang="en-US" altLang="zh-CN" sz="2400" dirty="0"/>
+              </a:p>
+              <a:p>
+                <a:pPr marL="0" indent="0" algn="ctr">
+                  <a:buNone/>
+                </a:pPr>
+                <a:r>
+                  <a:rPr kumimoji="1" lang="en-US" altLang="zh-CN" sz="2400" i="1" dirty="0">
+                    <a:solidFill>
+                      <a:srgbClr val="0432FF"/>
+                    </a:solidFill>
+                    <a:latin typeface="Cambria Math" panose="02040503050406030204" pitchFamily="18" charset="0"/>
+                    <a:ea typeface="Cambria Math" panose="02040503050406030204" pitchFamily="18" charset="0"/>
+                  </a:rPr>
+                  <a:t>P</a:t>
+                </a:r>
+                <a:r>
+                  <a:rPr kumimoji="1" lang="zh-CN" altLang="en-US" sz="2400" i="1" dirty="0">
+                    <a:solidFill>
+                      <a:srgbClr val="0432FF"/>
+                    </a:solidFill>
+                    <a:latin typeface="Cambria Math" panose="02040503050406030204" pitchFamily="18" charset="0"/>
+                    <a:ea typeface="Cambria Math" panose="02040503050406030204" pitchFamily="18" charset="0"/>
+                  </a:rPr>
+                  <a:t> </a:t>
+                </a:r>
+                <a14:m>
+                  <m:oMath xmlns:m="http://schemas.openxmlformats.org/officeDocument/2006/math">
+                    <m:r>
+                      <a:rPr kumimoji="1" lang="el-GR" altLang="zh-CN" sz="2400" i="1">
+                        <a:solidFill>
+                          <a:srgbClr val="0432FF"/>
+                        </a:solidFill>
+                        <a:latin typeface="Cambria Math" panose="02040503050406030204" pitchFamily="18" charset="0"/>
+                        <a:ea typeface="Cambria Math" panose="02040503050406030204" pitchFamily="18" charset="0"/>
+                      </a:rPr>
+                      <m:t>⊢</m:t>
+                    </m:r>
+                    <m:r>
+                      <a:rPr kumimoji="1" lang="en-US" altLang="zh-CN" sz="2400" b="0" i="1" smtClean="0">
+                        <a:solidFill>
+                          <a:srgbClr val="0432FF"/>
+                        </a:solidFill>
+                        <a:latin typeface="Cambria Math" panose="02040503050406030204" pitchFamily="18" charset="0"/>
+                        <a:ea typeface="Cambria Math" panose="02040503050406030204" pitchFamily="18" charset="0"/>
+                      </a:rPr>
+                      <m:t>𝑃</m:t>
+                    </m:r>
+                  </m:oMath>
+                </a14:m>
+                <a:endParaRPr kumimoji="1" lang="en-US" altLang="zh-CN" sz="2400" dirty="0">
+                  <a:solidFill>
+                    <a:srgbClr val="0432FF"/>
+                  </a:solidFill>
+                </a:endParaRPr>
+              </a:p>
+              <a:p>
+                <a:pPr marL="0" indent="0">
+                  <a:buNone/>
+                </a:pPr>
+                <a:r>
+                  <a:rPr kumimoji="1" lang="en-US" altLang="zh-CN" sz="2400" dirty="0"/>
+                  <a:t>because</a:t>
+                </a:r>
+                <a:r>
+                  <a:rPr kumimoji="1" lang="zh-CN" altLang="en-US" sz="2400" dirty="0"/>
+                  <a:t> </a:t>
+                </a:r>
+                <a:r>
+                  <a:rPr kumimoji="1" lang="en-US" altLang="zh-CN" sz="2400" dirty="0"/>
+                  <a:t>P</a:t>
+                </a:r>
+                <a:r>
+                  <a:rPr kumimoji="1" lang="zh-CN" altLang="en-US" sz="2400" dirty="0"/>
+                  <a:t> </a:t>
+                </a:r>
+                <a:r>
+                  <a:rPr kumimoji="1" lang="en-US" altLang="zh-CN" sz="2400" dirty="0"/>
+                  <a:t>is</a:t>
+                </a:r>
+                <a:r>
+                  <a:rPr kumimoji="1" lang="zh-CN" altLang="en-US" sz="2400" dirty="0"/>
+                  <a:t> </a:t>
+                </a:r>
+                <a:r>
+                  <a:rPr kumimoji="1" lang="en-US" altLang="zh-CN" sz="2400" dirty="0"/>
+                  <a:t>the</a:t>
+                </a:r>
+                <a:r>
+                  <a:rPr kumimoji="1" lang="zh-CN" altLang="en-US" sz="2400" dirty="0"/>
+                  <a:t> </a:t>
+                </a:r>
+                <a:r>
+                  <a:rPr kumimoji="1" lang="en-US" altLang="zh-CN" sz="2400" dirty="0"/>
+                  <a:t>assumption</a:t>
+                </a:r>
+                <a:r>
+                  <a:rPr kumimoji="1" lang="zh-CN" altLang="en-US" sz="2400" dirty="0"/>
+                  <a:t> </a:t>
+                </a:r>
+                <a:r>
+                  <a:rPr kumimoji="1" lang="en-US" altLang="zh-CN" sz="2400" dirty="0"/>
+                  <a:t>and</a:t>
+                </a:r>
+                <a:r>
+                  <a:rPr kumimoji="1" lang="zh-CN" altLang="en-US" sz="2400" dirty="0"/>
+                  <a:t> </a:t>
+                </a:r>
+                <a:r>
+                  <a:rPr kumimoji="1" lang="en-US" altLang="zh-CN" sz="2400" dirty="0"/>
+                  <a:t>the</a:t>
+                </a:r>
+                <a:r>
+                  <a:rPr kumimoji="1" lang="zh-CN" altLang="en-US" sz="2400" dirty="0"/>
+                  <a:t> </a:t>
+                </a:r>
+                <a:r>
+                  <a:rPr kumimoji="1" lang="en-US" altLang="zh-CN" sz="2400" dirty="0"/>
+                  <a:t>target</a:t>
+                </a:r>
+                <a:r>
+                  <a:rPr kumimoji="1" lang="zh-CN" altLang="en-US" sz="2400" dirty="0"/>
+                  <a:t> </a:t>
+                </a:r>
+                <a:r>
+                  <a:rPr kumimoji="1" lang="en-US" altLang="zh-CN" sz="2400" dirty="0"/>
+                  <a:t>is</a:t>
+                </a:r>
+                <a:r>
+                  <a:rPr kumimoji="1" lang="zh-CN" altLang="en-US" sz="2400" dirty="0"/>
+                  <a:t> </a:t>
+                </a:r>
+                <a:r>
+                  <a:rPr kumimoji="1" lang="en-US" altLang="zh-CN" sz="2400" dirty="0"/>
+                  <a:t>P,</a:t>
+                </a:r>
+                <a:r>
+                  <a:rPr kumimoji="1" lang="zh-CN" altLang="en-US" sz="2400" dirty="0"/>
+                  <a:t> </a:t>
+                </a:r>
+                <a:r>
+                  <a:rPr kumimoji="1" lang="en-US" altLang="zh-CN" sz="2400" dirty="0"/>
+                  <a:t>then</a:t>
+                </a:r>
+                <a:r>
+                  <a:rPr kumimoji="1" lang="zh-CN" altLang="en-US" sz="2400" dirty="0"/>
+                  <a:t> </a:t>
+                </a:r>
+                <a:r>
+                  <a:rPr kumimoji="1" lang="en-US" altLang="zh-CN" sz="2400" dirty="0"/>
+                  <a:t>the</a:t>
+                </a:r>
+                <a:r>
+                  <a:rPr kumimoji="1" lang="zh-CN" altLang="en-US" sz="2400" dirty="0"/>
+                  <a:t> </a:t>
+                </a:r>
+                <a:r>
+                  <a:rPr kumimoji="1" lang="en-US" altLang="zh-CN" sz="2400" dirty="0"/>
+                  <a:t>original</a:t>
+                </a:r>
+                <a:r>
+                  <a:rPr kumimoji="1" lang="zh-CN" altLang="en-US" sz="2400" dirty="0"/>
+                  <a:t> </a:t>
+                </a:r>
+                <a:r>
+                  <a:rPr kumimoji="1" lang="en-US" altLang="zh-CN" sz="2400" dirty="0"/>
+                  <a:t>proposition</a:t>
+                </a:r>
+                <a:r>
+                  <a:rPr kumimoji="1" lang="zh-CN" altLang="en-US" sz="2400" dirty="0"/>
+                  <a:t> </a:t>
+                </a:r>
+                <a:r>
+                  <a:rPr kumimoji="1" lang="en-US" altLang="zh-CN" sz="2400" dirty="0"/>
+                  <a:t>is</a:t>
+                </a:r>
+                <a:r>
+                  <a:rPr kumimoji="1" lang="zh-CN" altLang="en-US" sz="2400" dirty="0"/>
+                  <a:t> </a:t>
+                </a:r>
+                <a:r>
+                  <a:rPr kumimoji="1" lang="en-US" altLang="zh-CN" sz="2400" dirty="0"/>
+                  <a:t>valid</a:t>
+                </a:r>
+              </a:p>
+            </p:txBody>
+          </p:sp>
+        </mc:Choice>
+        <mc:Fallback>
+          <p:sp>
+            <p:nvSpPr>
+              <p:cNvPr id="3" name="内容占位符 2">
+                <a:extLst>
+                  <a:ext uri="{FF2B5EF4-FFF2-40B4-BE49-F238E27FC236}">
+                    <a16:creationId xmlns:a16="http://schemas.microsoft.com/office/drawing/2014/main" id="{920D56A3-0971-3E34-EC41-A28B9D54A48C}"/>
+                  </a:ext>
+                </a:extLst>
+              </p:cNvPr>
+              <p:cNvSpPr>
+                <a:spLocks noGrp="1" noRot="1" noChangeAspect="1" noMove="1" noResize="1" noEditPoints="1" noAdjustHandles="1" noChangeArrowheads="1" noChangeShapeType="1" noTextEdit="1"/>
+              </p:cNvSpPr>
+              <p:nvPr>
+                <p:ph idx="1"/>
+              </p:nvPr>
+            </p:nvSpPr>
+            <p:spPr>
+              <a:xfrm>
+                <a:off x="1182688" y="2017713"/>
+                <a:ext cx="7772400" cy="4114800"/>
+              </a:xfrm>
+              <a:blipFill>
+                <a:blip r:embed="rId2"/>
+                <a:stretch>
+                  <a:fillRect l="-1305" t="-923"/>
+                </a:stretch>
+              </a:blipFill>
+            </p:spPr>
+            <p:txBody>
+              <a:bodyPr/>
+              <a:lstStyle/>
+              <a:p>
+                <a:r>
+                  <a:rPr lang="zh-CN" altLang="en-US">
+                    <a:noFill/>
+                  </a:rPr>
+                  <a:t> </a:t>
+                </a:r>
+              </a:p>
+            </p:txBody>
+          </p:sp>
+        </mc:Fallback>
+      </mc:AlternateContent>
+    </p:spTree>
+    <p:extLst>
+      <p:ext uri="{BB962C8B-B14F-4D97-AF65-F5344CB8AC3E}">
+        <p14:creationId xmlns:p14="http://schemas.microsoft.com/office/powerpoint/2010/main" val="1533296001"/>
+      </p:ext>
+    </p:extLst>
+  </p:cSld>
+  <p:clrMapOvr>
+    <a:masterClrMapping/>
+  </p:clrMapOvr>
+</p:sld>
+</file>
+
+<file path=ppt/slides/slide19.xml><?xml version="1.0" encoding="utf-8"?>
+<p:sld xmlns:a="http://schemas.openxmlformats.org/drawingml/2006/main" xmlns:r="http://schemas.openxmlformats.org/officeDocument/2006/relationships" xmlns:p="http://schemas.openxmlformats.org/presentationml/2006/main">
+  <p:cSld>
+    <p:spTree>
+      <p:nvGrpSpPr>
+        <p:cNvPr id="1" name="">
+          <a:extLst>
+            <a:ext uri="{FF2B5EF4-FFF2-40B4-BE49-F238E27FC236}">
+              <a16:creationId xmlns:a16="http://schemas.microsoft.com/office/drawing/2014/main" id="{0EF3F6BF-D54D-0141-009B-102121A874C8}"/>
+            </a:ext>
+          </a:extLst>
+        </p:cNvPr>
+        <p:cNvGrpSpPr/>
+        <p:nvPr/>
+      </p:nvGrpSpPr>
+      <p:grpSpPr>
+        <a:xfrm>
+          <a:off x="0" y="0"/>
+          <a:ext cx="0" cy="0"/>
+          <a:chOff x="0" y="0"/>
+          <a:chExt cx="0" cy="0"/>
+        </a:xfrm>
+      </p:grpSpPr>
+      <p:sp>
+        <p:nvSpPr>
+          <p:cNvPr id="2" name="标题 1">
+            <a:extLst>
+              <a:ext uri="{FF2B5EF4-FFF2-40B4-BE49-F238E27FC236}">
+                <a16:creationId xmlns:a16="http://schemas.microsoft.com/office/drawing/2014/main" id="{34513F70-8F16-BA99-7D45-7F91A02C44E0}"/>
+              </a:ext>
+            </a:extLst>
+          </p:cNvPr>
+          <p:cNvSpPr>
+            <a:spLocks noGrp="1"/>
+          </p:cNvSpPr>
+          <p:nvPr>
+            <p:ph type="title"/>
+          </p:nvPr>
+        </p:nvSpPr>
+        <p:spPr/>
+        <p:txBody>
+          <a:bodyPr/>
+          <a:lstStyle/>
+          <a:p>
+            <a:r>
+              <a:rPr kumimoji="1" lang="en-US" altLang="zh-CN" dirty="0"/>
+              <a:t>Natural</a:t>
+            </a:r>
+            <a:r>
+              <a:rPr kumimoji="1" lang="zh-CN" altLang="en-US" dirty="0"/>
+              <a:t> </a:t>
+            </a:r>
+            <a:r>
+              <a:rPr kumimoji="1" lang="en-US" altLang="zh-CN" dirty="0"/>
+              <a:t>deduction:</a:t>
+            </a:r>
+            <a:r>
+              <a:rPr kumimoji="1" lang="zh-CN" altLang="en-US" dirty="0"/>
+              <a:t> </a:t>
+            </a:r>
+            <a:r>
+              <a:rPr kumimoji="1" lang="en-US" altLang="zh-CN" dirty="0"/>
+              <a:t>basic</a:t>
+            </a:r>
+            <a:r>
+              <a:rPr kumimoji="1" lang="zh-CN" altLang="en-US" dirty="0"/>
+              <a:t> </a:t>
+            </a:r>
+            <a:r>
+              <a:rPr kumimoji="1" lang="en-US" altLang="zh-CN" dirty="0"/>
+              <a:t>idea</a:t>
+            </a:r>
+            <a:endParaRPr kumimoji="1" lang="zh-CN" altLang="en-US" dirty="0"/>
+          </a:p>
+        </p:txBody>
+      </p:sp>
+      <mc:AlternateContent xmlns:mc="http://schemas.openxmlformats.org/markup-compatibility/2006">
+        <mc:Choice xmlns:a14="http://schemas.microsoft.com/office/drawing/2010/main" Requires="a14">
+          <p:sp>
+            <p:nvSpPr>
+              <p:cNvPr id="3" name="内容占位符 2">
+                <a:extLst>
+                  <a:ext uri="{FF2B5EF4-FFF2-40B4-BE49-F238E27FC236}">
+                    <a16:creationId xmlns:a16="http://schemas.microsoft.com/office/drawing/2014/main" id="{A268A6BE-6346-D759-F5D8-16E02472E599}"/>
+                  </a:ext>
+                </a:extLst>
+              </p:cNvPr>
+              <p:cNvSpPr>
+                <a:spLocks noGrp="1"/>
+              </p:cNvSpPr>
+              <p:nvPr>
+                <p:ph idx="1"/>
+              </p:nvPr>
+            </p:nvSpPr>
+            <p:spPr>
+              <a:xfrm>
+                <a:off x="1182688" y="2017713"/>
+                <a:ext cx="7772400" cy="4114800"/>
+              </a:xfrm>
+            </p:spPr>
+            <p:txBody>
+              <a:bodyPr/>
+              <a:lstStyle/>
+              <a:p>
+                <a:r>
+                  <a:rPr kumimoji="1" lang="en-US" altLang="zh-CN" sz="2400" dirty="0"/>
+                  <a:t>Another</a:t>
+                </a:r>
+                <a:r>
+                  <a:rPr kumimoji="1" lang="zh-CN" altLang="en-US" sz="2400" dirty="0"/>
+                  <a:t> </a:t>
+                </a:r>
+                <a:r>
+                  <a:rPr kumimoji="1" lang="en-US" altLang="zh-CN" sz="2400" dirty="0"/>
+                  <a:t>example:</a:t>
+                </a:r>
+              </a:p>
+              <a:p>
+                <a:pPr marL="0" indent="0">
+                  <a:buNone/>
+                </a:pPr>
+                <a14:m>
+                  <m:oMathPara xmlns:m="http://schemas.openxmlformats.org/officeDocument/2006/math">
+                    <m:oMath>
+                      <m:r>
+                        <a:rPr kumimoji="1" lang="en-US" altLang="zh-CN" sz="2400" b="0" i="1" smtClean="0">
+                          <a:solidFill>
+                            <a:srgbClr val="0432FF"/>
+                          </a:solidFill>
+                          <a:latin typeface="Cambria Math" panose="02040503050406030204" pitchFamily="18" charset="0"/>
+                          <a:ea typeface="Cambria Math" panose="02040503050406030204" pitchFamily="18" charset="0"/>
+                        </a:rPr>
+                        <m:t>𝑃</m:t>
+                      </m:r>
+                      <m:r>
+                        <a:rPr kumimoji="1" lang="en-US" altLang="zh-CN" sz="2400" b="0" i="1" smtClean="0">
+                          <a:solidFill>
+                            <a:srgbClr val="0432FF"/>
+                          </a:solidFill>
+                          <a:latin typeface="Cambria Math" panose="02040503050406030204" pitchFamily="18" charset="0"/>
+                          <a:ea typeface="Cambria Math" panose="02040503050406030204" pitchFamily="18" charset="0"/>
+                        </a:rPr>
+                        <m:t>→</m:t>
+                      </m:r>
+                      <m:r>
+                        <a:rPr kumimoji="1" lang="en-US" altLang="zh-CN" sz="2400" b="0" i="1" smtClean="0">
+                          <a:solidFill>
+                            <a:srgbClr val="0432FF"/>
+                          </a:solidFill>
+                          <a:latin typeface="Cambria Math" panose="02040503050406030204" pitchFamily="18" charset="0"/>
+                          <a:ea typeface="Cambria Math" panose="02040503050406030204" pitchFamily="18" charset="0"/>
+                        </a:rPr>
+                        <m:t>𝑃</m:t>
+                      </m:r>
+                      <m:r>
+                        <a:rPr kumimoji="1" lang="en-US" altLang="zh-CN" sz="2400" b="0" i="1" smtClean="0">
+                          <a:solidFill>
+                            <a:srgbClr val="0432FF"/>
+                          </a:solidFill>
+                          <a:latin typeface="Cambria Math" panose="02040503050406030204" pitchFamily="18" charset="0"/>
+                          <a:ea typeface="Cambria Math" panose="02040503050406030204" pitchFamily="18" charset="0"/>
+                        </a:rPr>
+                        <m:t>/\</m:t>
+                      </m:r>
+                      <m:r>
+                        <a:rPr kumimoji="1" lang="en-US" altLang="zh-CN" sz="2400" b="0" i="1" smtClean="0">
+                          <a:solidFill>
+                            <a:srgbClr val="0432FF"/>
+                          </a:solidFill>
+                          <a:latin typeface="Cambria Math" panose="02040503050406030204" pitchFamily="18" charset="0"/>
+                          <a:ea typeface="Cambria Math" panose="02040503050406030204" pitchFamily="18" charset="0"/>
+                        </a:rPr>
+                        <m:t>𝑃</m:t>
+                      </m:r>
+                    </m:oMath>
+                  </m:oMathPara>
+                </a14:m>
+                <a:endParaRPr kumimoji="1" lang="en-US" altLang="zh-CN" sz="2400" dirty="0">
+                  <a:solidFill>
+                    <a:srgbClr val="0432FF"/>
+                  </a:solidFill>
+                </a:endParaRPr>
+              </a:p>
+              <a:p>
+                <a:pPr marL="0" indent="0">
+                  <a:buNone/>
+                </a:pPr>
+                <a:r>
+                  <a:rPr kumimoji="1" lang="en-US" altLang="zh-CN" sz="2400" dirty="0"/>
+                  <a:t>is</a:t>
+                </a:r>
+                <a:r>
+                  <a:rPr kumimoji="1" lang="zh-CN" altLang="en-US" sz="2400" dirty="0"/>
+                  <a:t> </a:t>
+                </a:r>
+                <a:r>
+                  <a:rPr kumimoji="1" lang="en-US" altLang="zh-CN" sz="2400" dirty="0"/>
+                  <a:t>converted</a:t>
+                </a:r>
+                <a:r>
+                  <a:rPr kumimoji="1" lang="zh-CN" altLang="en-US" sz="2400" dirty="0"/>
+                  <a:t> </a:t>
+                </a:r>
+                <a:r>
+                  <a:rPr kumimoji="1" lang="en-US" altLang="zh-CN" sz="2400" dirty="0"/>
+                  <a:t>into</a:t>
+                </a:r>
+                <a:r>
+                  <a:rPr kumimoji="1" lang="zh-CN" altLang="en-US" sz="2400" dirty="0"/>
+                  <a:t>  </a:t>
+                </a:r>
+                <a:endParaRPr kumimoji="1" lang="en-US" altLang="zh-CN" sz="2400" dirty="0"/>
+              </a:p>
+              <a:p>
+                <a:pPr marL="0" indent="0" algn="ctr">
+                  <a:buNone/>
+                </a:pPr>
+                <a:r>
+                  <a:rPr kumimoji="1" lang="en-US" altLang="zh-CN" sz="2400" i="1" dirty="0">
+                    <a:solidFill>
+                      <a:srgbClr val="0432FF"/>
+                    </a:solidFill>
+                    <a:latin typeface="Cambria Math" panose="02040503050406030204" pitchFamily="18" charset="0"/>
+                    <a:ea typeface="Cambria Math" panose="02040503050406030204" pitchFamily="18" charset="0"/>
+                  </a:rPr>
+                  <a:t>P</a:t>
+                </a:r>
+                <a:r>
+                  <a:rPr kumimoji="1" lang="zh-CN" altLang="en-US" sz="2400" i="1" dirty="0">
+                    <a:solidFill>
+                      <a:srgbClr val="0432FF"/>
+                    </a:solidFill>
+                    <a:latin typeface="Cambria Math" panose="02040503050406030204" pitchFamily="18" charset="0"/>
+                    <a:ea typeface="Cambria Math" panose="02040503050406030204" pitchFamily="18" charset="0"/>
+                  </a:rPr>
+                  <a:t> </a:t>
+                </a:r>
+                <a14:m>
+                  <m:oMath xmlns:m="http://schemas.openxmlformats.org/officeDocument/2006/math">
+                    <m:r>
+                      <a:rPr kumimoji="1" lang="el-GR" altLang="zh-CN" sz="2400" i="1">
+                        <a:solidFill>
+                          <a:srgbClr val="0432FF"/>
+                        </a:solidFill>
+                        <a:latin typeface="Cambria Math" panose="02040503050406030204" pitchFamily="18" charset="0"/>
+                        <a:ea typeface="Cambria Math" panose="02040503050406030204" pitchFamily="18" charset="0"/>
+                      </a:rPr>
+                      <m:t>⊢</m:t>
+                    </m:r>
+                    <m:r>
+                      <a:rPr kumimoji="1" lang="en-US" altLang="zh-CN" sz="2400" b="0" i="1" smtClean="0">
+                        <a:solidFill>
+                          <a:schemeClr val="tx1"/>
+                        </a:solidFill>
+                        <a:latin typeface="Cambria Math" panose="02040503050406030204" pitchFamily="18" charset="0"/>
+                        <a:ea typeface="Cambria Math" panose="02040503050406030204" pitchFamily="18" charset="0"/>
+                      </a:rPr>
+                      <m:t>𝑃</m:t>
+                    </m:r>
+                    <m:r>
+                      <a:rPr kumimoji="1" lang="en-US" altLang="zh-CN" sz="2400" b="0" i="1" smtClean="0">
+                        <a:solidFill>
+                          <a:srgbClr val="0432FF"/>
+                        </a:solidFill>
+                        <a:latin typeface="Cambria Math" panose="02040503050406030204" pitchFamily="18" charset="0"/>
+                        <a:ea typeface="Cambria Math" panose="02040503050406030204" pitchFamily="18" charset="0"/>
+                      </a:rPr>
+                      <m:t>/\</m:t>
+                    </m:r>
+                    <m:r>
+                      <a:rPr kumimoji="1" lang="en-US" altLang="zh-CN" sz="2400" b="0" i="1" smtClean="0">
+                        <a:solidFill>
+                          <a:srgbClr val="FF0000"/>
+                        </a:solidFill>
+                        <a:latin typeface="Cambria Math" panose="02040503050406030204" pitchFamily="18" charset="0"/>
+                        <a:ea typeface="Cambria Math" panose="02040503050406030204" pitchFamily="18" charset="0"/>
+                      </a:rPr>
+                      <m:t>𝑃</m:t>
+                    </m:r>
+                  </m:oMath>
+                </a14:m>
+                <a:endParaRPr kumimoji="1" lang="en-US" altLang="zh-CN" sz="2400" dirty="0">
+                  <a:solidFill>
+                    <a:srgbClr val="FF0000"/>
+                  </a:solidFill>
+                </a:endParaRPr>
+              </a:p>
+              <a:p>
+                <a:pPr marL="0" indent="0">
+                  <a:buNone/>
+                </a:pPr>
+                <a:r>
+                  <a:rPr kumimoji="1" lang="en-US" altLang="zh-CN" sz="2400" dirty="0"/>
+                  <a:t>then</a:t>
+                </a:r>
+                <a:r>
+                  <a:rPr kumimoji="1" lang="zh-CN" altLang="en-US" sz="2400" dirty="0"/>
+                  <a:t> </a:t>
+                </a:r>
+                <a:r>
+                  <a:rPr kumimoji="1" lang="en-US" altLang="zh-CN" sz="2400" dirty="0"/>
+                  <a:t>converted</a:t>
+                </a:r>
+                <a:r>
+                  <a:rPr kumimoji="1" lang="zh-CN" altLang="en-US" sz="2400" dirty="0"/>
+                  <a:t> </a:t>
+                </a:r>
+                <a:r>
+                  <a:rPr kumimoji="1" lang="en-US" altLang="zh-CN" sz="2400" dirty="0"/>
+                  <a:t>into</a:t>
+                </a:r>
+                <a:r>
+                  <a:rPr kumimoji="1" lang="zh-CN" altLang="en-US" sz="2400" dirty="0"/>
+                  <a:t> </a:t>
+                </a:r>
+                <a:r>
+                  <a:rPr kumimoji="1" lang="en-US" altLang="zh-CN" sz="2400" dirty="0"/>
+                  <a:t>two</a:t>
+                </a:r>
+                <a:r>
+                  <a:rPr kumimoji="1" lang="zh-CN" altLang="en-US" sz="2400" dirty="0"/>
+                  <a:t> </a:t>
+                </a:r>
+                <a:r>
+                  <a:rPr kumimoji="1" lang="en-US" altLang="zh-CN" sz="2400" dirty="0"/>
+                  <a:t>sub-goals:</a:t>
+                </a:r>
+              </a:p>
+              <a:p>
+                <a:pPr marL="0" indent="0" algn="ctr">
+                  <a:buNone/>
+                </a:pPr>
+                <a:r>
+                  <a:rPr kumimoji="1" lang="en-US" altLang="zh-CN" sz="2400" i="1" dirty="0">
+                    <a:solidFill>
+                      <a:srgbClr val="0432FF"/>
+                    </a:solidFill>
+                    <a:latin typeface="Cambria Math" panose="02040503050406030204" pitchFamily="18" charset="0"/>
+                    <a:ea typeface="Cambria Math" panose="02040503050406030204" pitchFamily="18" charset="0"/>
+                  </a:rPr>
+                  <a:t>P</a:t>
+                </a:r>
+                <a:r>
+                  <a:rPr kumimoji="1" lang="zh-CN" altLang="en-US" sz="2400" i="1" dirty="0">
+                    <a:solidFill>
+                      <a:srgbClr val="0432FF"/>
+                    </a:solidFill>
+                    <a:latin typeface="Cambria Math" panose="02040503050406030204" pitchFamily="18" charset="0"/>
+                    <a:ea typeface="Cambria Math" panose="02040503050406030204" pitchFamily="18" charset="0"/>
+                  </a:rPr>
+                  <a:t> </a:t>
+                </a:r>
+                <a14:m>
+                  <m:oMath xmlns:m="http://schemas.openxmlformats.org/officeDocument/2006/math">
+                    <m:r>
+                      <a:rPr kumimoji="1" lang="el-GR" altLang="zh-CN" sz="2400" i="1">
+                        <a:solidFill>
+                          <a:srgbClr val="0432FF"/>
+                        </a:solidFill>
+                        <a:latin typeface="Cambria Math" panose="02040503050406030204" pitchFamily="18" charset="0"/>
+                        <a:ea typeface="Cambria Math" panose="02040503050406030204" pitchFamily="18" charset="0"/>
+                      </a:rPr>
+                      <m:t>⊢</m:t>
+                    </m:r>
+                    <m:r>
+                      <a:rPr kumimoji="1" lang="en-US" altLang="zh-CN" sz="2400" i="1">
+                        <a:latin typeface="Cambria Math" panose="02040503050406030204" pitchFamily="18" charset="0"/>
+                        <a:ea typeface="Cambria Math" panose="02040503050406030204" pitchFamily="18" charset="0"/>
+                      </a:rPr>
+                      <m:t>𝑃</m:t>
+                    </m:r>
+                  </m:oMath>
+                </a14:m>
+                <a:r>
+                  <a:rPr kumimoji="1" lang="zh-CN" altLang="en-US" sz="2400" i="1" dirty="0">
+                    <a:solidFill>
+                      <a:srgbClr val="0432FF"/>
+                    </a:solidFill>
+                    <a:latin typeface="Cambria Math" panose="02040503050406030204" pitchFamily="18" charset="0"/>
+                    <a:ea typeface="Cambria Math" panose="02040503050406030204" pitchFamily="18" charset="0"/>
+                  </a:rPr>
+                  <a:t>             </a:t>
+                </a:r>
+                <a:r>
+                  <a:rPr kumimoji="1" lang="en-US" altLang="zh-CN" sz="2400" i="1" dirty="0">
+                    <a:solidFill>
+                      <a:srgbClr val="0432FF"/>
+                    </a:solidFill>
+                    <a:latin typeface="Cambria Math" panose="02040503050406030204" pitchFamily="18" charset="0"/>
+                    <a:ea typeface="Cambria Math" panose="02040503050406030204" pitchFamily="18" charset="0"/>
+                  </a:rPr>
+                  <a:t>P</a:t>
+                </a:r>
+                <a:r>
+                  <a:rPr kumimoji="1" lang="zh-CN" altLang="en-US" sz="2400" i="1" dirty="0">
+                    <a:solidFill>
+                      <a:srgbClr val="0432FF"/>
+                    </a:solidFill>
+                    <a:latin typeface="Cambria Math" panose="02040503050406030204" pitchFamily="18" charset="0"/>
+                    <a:ea typeface="Cambria Math" panose="02040503050406030204" pitchFamily="18" charset="0"/>
+                  </a:rPr>
+                  <a:t> </a:t>
+                </a:r>
+                <a14:m>
+                  <m:oMath xmlns:m="http://schemas.openxmlformats.org/officeDocument/2006/math">
+                    <m:r>
+                      <a:rPr kumimoji="1" lang="el-GR" altLang="zh-CN" sz="2400" i="1">
+                        <a:solidFill>
+                          <a:srgbClr val="0432FF"/>
+                        </a:solidFill>
+                        <a:latin typeface="Cambria Math" panose="02040503050406030204" pitchFamily="18" charset="0"/>
+                        <a:ea typeface="Cambria Math" panose="02040503050406030204" pitchFamily="18" charset="0"/>
+                      </a:rPr>
+                      <m:t>⊢</m:t>
+                    </m:r>
+                    <m:r>
+                      <a:rPr kumimoji="1" lang="en-US" altLang="zh-CN" sz="2400" i="1">
+                        <a:solidFill>
+                          <a:srgbClr val="FF0000"/>
+                        </a:solidFill>
+                        <a:latin typeface="Cambria Math" panose="02040503050406030204" pitchFamily="18" charset="0"/>
+                        <a:ea typeface="Cambria Math" panose="02040503050406030204" pitchFamily="18" charset="0"/>
+                      </a:rPr>
+                      <m:t>𝑃</m:t>
+                    </m:r>
+                  </m:oMath>
+                </a14:m>
+                <a:endParaRPr kumimoji="1" lang="en-US" altLang="zh-CN" sz="2400" dirty="0"/>
+              </a:p>
+              <a:p>
+                <a:pPr marL="0" indent="0">
+                  <a:buNone/>
+                </a:pPr>
+                <a:r>
+                  <a:rPr kumimoji="1" lang="en-US" altLang="zh-CN" sz="2400" dirty="0"/>
+                  <a:t>both</a:t>
+                </a:r>
+                <a:r>
+                  <a:rPr kumimoji="1" lang="zh-CN" altLang="en-US" sz="2400" dirty="0"/>
+                  <a:t> </a:t>
+                </a:r>
+                <a:r>
+                  <a:rPr kumimoji="1" lang="en-US" altLang="zh-CN" sz="2400" dirty="0"/>
+                  <a:t>of</a:t>
+                </a:r>
+                <a:r>
+                  <a:rPr kumimoji="1" lang="zh-CN" altLang="en-US" sz="2400" dirty="0"/>
+                  <a:t> </a:t>
+                </a:r>
+                <a:r>
+                  <a:rPr kumimoji="1" lang="en-US" altLang="zh-CN" sz="2400" dirty="0"/>
+                  <a:t>which</a:t>
+                </a:r>
+                <a:r>
+                  <a:rPr kumimoji="1" lang="zh-CN" altLang="en-US" sz="2400" dirty="0"/>
+                  <a:t> </a:t>
+                </a:r>
+                <a:r>
+                  <a:rPr kumimoji="1" lang="en-US" altLang="zh-CN" sz="2400" dirty="0"/>
+                  <a:t>can</a:t>
+                </a:r>
+                <a:r>
+                  <a:rPr kumimoji="1" lang="zh-CN" altLang="en-US" sz="2400" dirty="0"/>
+                  <a:t> </a:t>
+                </a:r>
+                <a:r>
+                  <a:rPr kumimoji="1" lang="en-US" altLang="zh-CN" sz="2400" dirty="0"/>
+                  <a:t>be</a:t>
+                </a:r>
+                <a:r>
+                  <a:rPr kumimoji="1" lang="zh-CN" altLang="en-US" sz="2400" dirty="0"/>
+                  <a:t> </a:t>
+                </a:r>
+                <a:r>
+                  <a:rPr kumimoji="1" lang="en-US" altLang="zh-CN" sz="2400" dirty="0"/>
+                  <a:t>proved</a:t>
+                </a:r>
+                <a:r>
+                  <a:rPr kumimoji="1" lang="zh-CN" altLang="en-US" sz="2400" dirty="0"/>
+                  <a:t> </a:t>
+                </a:r>
+                <a:r>
+                  <a:rPr kumimoji="1" lang="en-US" altLang="zh-CN" sz="2400" dirty="0"/>
+                  <a:t>trivially.</a:t>
+                </a:r>
+              </a:p>
+            </p:txBody>
+          </p:sp>
+        </mc:Choice>
+        <mc:Fallback>
+          <p:sp>
+            <p:nvSpPr>
+              <p:cNvPr id="3" name="内容占位符 2">
+                <a:extLst>
+                  <a:ext uri="{FF2B5EF4-FFF2-40B4-BE49-F238E27FC236}">
+                    <a16:creationId xmlns:a16="http://schemas.microsoft.com/office/drawing/2014/main" id="{A268A6BE-6346-D759-F5D8-16E02472E599}"/>
+                  </a:ext>
+                </a:extLst>
+              </p:cNvPr>
+              <p:cNvSpPr>
+                <a:spLocks noGrp="1" noRot="1" noChangeAspect="1" noMove="1" noResize="1" noEditPoints="1" noAdjustHandles="1" noChangeArrowheads="1" noChangeShapeType="1" noTextEdit="1"/>
+              </p:cNvSpPr>
+              <p:nvPr>
+                <p:ph idx="1"/>
+              </p:nvPr>
+            </p:nvSpPr>
+            <p:spPr>
+              <a:xfrm>
+                <a:off x="1182688" y="2017713"/>
+                <a:ext cx="7772400" cy="4114800"/>
+              </a:xfrm>
+              <a:blipFill>
+                <a:blip r:embed="rId2"/>
+                <a:stretch>
+                  <a:fillRect l="-1305" t="-923"/>
+                </a:stretch>
+              </a:blipFill>
+            </p:spPr>
+            <p:txBody>
+              <a:bodyPr/>
+              <a:lstStyle/>
+              <a:p>
+                <a:r>
+                  <a:rPr lang="zh-CN" altLang="en-US">
+                    <a:noFill/>
+                  </a:rPr>
+                  <a:t> </a:t>
+                </a:r>
+              </a:p>
+            </p:txBody>
+          </p:sp>
+        </mc:Fallback>
+      </mc:AlternateContent>
+    </p:spTree>
+    <p:extLst>
+      <p:ext uri="{BB962C8B-B14F-4D97-AF65-F5344CB8AC3E}">
+        <p14:creationId xmlns:p14="http://schemas.microsoft.com/office/powerpoint/2010/main" val="1429695655"/>
+      </p:ext>
+    </p:extLst>
+  </p:cSld>
+  <p:clrMapOvr>
+    <a:masterClrMapping/>
+  </p:clrMapOvr>
+</p:sld>
+</file>
+
+<file path=ppt/slides/slide2.xml><?xml version="1.0" encoding="utf-8"?>
+<p:sld xmlns:a="http://schemas.openxmlformats.org/drawingml/2006/main" xmlns:r="http://schemas.openxmlformats.org/officeDocument/2006/relationships" xmlns:p="http://schemas.openxmlformats.org/presentationml/2006/main">
+  <p:cSld>
+    <p:spTree>
+      <p:nvGrpSpPr>
+        <p:cNvPr id="1" name=""/>
+        <p:cNvGrpSpPr/>
+        <p:nvPr/>
+      </p:nvGrpSpPr>
+      <p:grpSpPr>
+        <a:xfrm>
+          <a:off x="0" y="0"/>
+          <a:ext cx="0" cy="0"/>
+          <a:chOff x="0" y="0"/>
+          <a:chExt cx="0" cy="0"/>
+        </a:xfrm>
+      </p:grpSpPr>
+      <p:sp>
+        <p:nvSpPr>
+          <p:cNvPr id="2" name="标题 1">
+            <a:extLst>
+              <a:ext uri="{FF2B5EF4-FFF2-40B4-BE49-F238E27FC236}">
+                <a16:creationId xmlns:a16="http://schemas.microsoft.com/office/drawing/2014/main" id="{F83B1A98-5D2E-F84C-8A75-A8FC62CA10DB}"/>
+              </a:ext>
+            </a:extLst>
+          </p:cNvPr>
+          <p:cNvSpPr>
+            <a:spLocks noGrp="1"/>
+          </p:cNvSpPr>
+          <p:nvPr>
+            <p:ph type="title"/>
+          </p:nvPr>
+        </p:nvSpPr>
+        <p:spPr/>
+        <p:txBody>
+          <a:bodyPr/>
+          <a:lstStyle/>
+          <a:p>
+            <a:r>
+              <a:rPr kumimoji="1" lang="en-US" altLang="zh-CN" dirty="0"/>
+              <a:t>Mathematical</a:t>
+            </a:r>
+            <a:r>
+              <a:rPr kumimoji="1" lang="zh-CN" altLang="en-US" dirty="0"/>
+              <a:t> </a:t>
+            </a:r>
+            <a:r>
+              <a:rPr kumimoji="1" lang="en-US" altLang="zh-CN" dirty="0"/>
+              <a:t>logic</a:t>
+            </a:r>
+            <a:endParaRPr kumimoji="1" lang="zh-CN" altLang="en-US" dirty="0"/>
+          </a:p>
+        </p:txBody>
+      </p:sp>
+      <p:sp>
+        <p:nvSpPr>
+          <p:cNvPr id="3" name="内容占位符 2">
+            <a:extLst>
+              <a:ext uri="{FF2B5EF4-FFF2-40B4-BE49-F238E27FC236}">
+                <a16:creationId xmlns:a16="http://schemas.microsoft.com/office/drawing/2014/main" id="{8EA67DCE-2389-6343-AFC1-54E1B9454D1E}"/>
+              </a:ext>
+            </a:extLst>
+          </p:cNvPr>
+          <p:cNvSpPr>
+            <a:spLocks noGrp="1"/>
+          </p:cNvSpPr>
+          <p:nvPr>
+            <p:ph idx="1"/>
+          </p:nvPr>
+        </p:nvSpPr>
+        <p:spPr/>
+        <p:txBody>
+          <a:bodyPr/>
+          <a:lstStyle/>
+          <a:p>
+            <a:r>
+              <a:rPr kumimoji="1" lang="en-US" altLang="zh-CN" dirty="0"/>
+              <a:t>A mathematical field to study </a:t>
+            </a:r>
+            <a:r>
+              <a:rPr kumimoji="1" lang="en-US" altLang="zh-CN" dirty="0">
+                <a:solidFill>
+                  <a:srgbClr val="0432FF"/>
+                </a:solidFill>
+              </a:rPr>
+              <a:t>reasoning</a:t>
+            </a:r>
+          </a:p>
+          <a:p>
+            <a:pPr lvl="1"/>
+            <a:r>
+              <a:rPr kumimoji="1" lang="en-US" altLang="zh-CN" dirty="0"/>
+              <a:t>Proof theory, set theory, model theory, recursion theory</a:t>
+            </a:r>
+          </a:p>
+          <a:p>
+            <a:pPr lvl="1"/>
+            <a:r>
+              <a:rPr kumimoji="1" lang="en-US" altLang="zh-CN" dirty="0"/>
+              <a:t>Many connection to other fields of math.</a:t>
+            </a:r>
+          </a:p>
+          <a:p>
+            <a:pPr lvl="2"/>
+            <a:r>
+              <a:rPr kumimoji="1" lang="en-US" altLang="zh-CN" dirty="0"/>
+              <a:t>The foundation of math</a:t>
+            </a:r>
+          </a:p>
+          <a:p>
+            <a:r>
+              <a:rPr kumimoji="1" lang="en-US" altLang="zh-CN" dirty="0"/>
+              <a:t>Also deep connection to CS:</a:t>
+            </a:r>
+          </a:p>
+          <a:p>
+            <a:pPr lvl="1"/>
+            <a:r>
+              <a:rPr kumimoji="1" lang="en-US" altLang="zh-CN" dirty="0"/>
+              <a:t>Type theory, logic programming, computer-aided verification (CAV), etc..</a:t>
+            </a:r>
+          </a:p>
+        </p:txBody>
+      </p:sp>
+    </p:spTree>
+    <p:extLst>
+      <p:ext uri="{BB962C8B-B14F-4D97-AF65-F5344CB8AC3E}">
+        <p14:creationId xmlns:p14="http://schemas.microsoft.com/office/powerpoint/2010/main" val="539919153"/>
+      </p:ext>
+    </p:extLst>
+  </p:cSld>
+  <p:clrMapOvr>
+    <a:masterClrMapping/>
+  </p:clrMapOvr>
+</p:sld>
+</file>
+
+<file path=ppt/slides/slide20.xml><?xml version="1.0" encoding="utf-8"?>
+<p:sld xmlns:a="http://schemas.openxmlformats.org/drawingml/2006/main" xmlns:r="http://schemas.openxmlformats.org/officeDocument/2006/relationships" xmlns:p="http://schemas.openxmlformats.org/presentationml/2006/main">
+  <p:cSld>
+    <p:spTree>
+      <p:nvGrpSpPr>
+        <p:cNvPr id="1" name="">
+          <a:extLst>
+            <a:ext uri="{FF2B5EF4-FFF2-40B4-BE49-F238E27FC236}">
+              <a16:creationId xmlns:a16="http://schemas.microsoft.com/office/drawing/2014/main" id="{CA5AFEFC-0622-D3FF-500E-3B1EEEA52924}"/>
+            </a:ext>
+          </a:extLst>
+        </p:cNvPr>
+        <p:cNvGrpSpPr/>
+        <p:nvPr/>
+      </p:nvGrpSpPr>
+      <p:grpSpPr>
+        <a:xfrm>
+          <a:off x="0" y="0"/>
+          <a:ext cx="0" cy="0"/>
+          <a:chOff x="0" y="0"/>
+          <a:chExt cx="0" cy="0"/>
+        </a:xfrm>
+      </p:grpSpPr>
+      <p:sp>
+        <p:nvSpPr>
+          <p:cNvPr id="2" name="标题 1">
+            <a:extLst>
+              <a:ext uri="{FF2B5EF4-FFF2-40B4-BE49-F238E27FC236}">
+                <a16:creationId xmlns:a16="http://schemas.microsoft.com/office/drawing/2014/main" id="{ABD46372-3A77-0DA4-9AA4-B7BEFA96EF31}"/>
+              </a:ext>
+            </a:extLst>
+          </p:cNvPr>
+          <p:cNvSpPr>
+            <a:spLocks noGrp="1"/>
+          </p:cNvSpPr>
+          <p:nvPr>
+            <p:ph type="title"/>
+          </p:nvPr>
+        </p:nvSpPr>
+        <p:spPr/>
+        <p:txBody>
+          <a:bodyPr/>
+          <a:lstStyle/>
+          <a:p>
+            <a:r>
+              <a:rPr kumimoji="1" lang="en-US" altLang="zh-CN" dirty="0"/>
+              <a:t>Natural</a:t>
+            </a:r>
+            <a:r>
+              <a:rPr kumimoji="1" lang="zh-CN" altLang="en-US" dirty="0"/>
+              <a:t> </a:t>
+            </a:r>
+            <a:r>
+              <a:rPr kumimoji="1" lang="en-US" altLang="zh-CN" dirty="0"/>
+              <a:t>deduction:</a:t>
+            </a:r>
+            <a:r>
+              <a:rPr kumimoji="1" lang="zh-CN" altLang="en-US" dirty="0"/>
+              <a:t> </a:t>
+            </a:r>
+            <a:r>
+              <a:rPr kumimoji="1" lang="en-US" altLang="zh-CN" dirty="0"/>
+              <a:t>basic</a:t>
+            </a:r>
+            <a:r>
+              <a:rPr kumimoji="1" lang="zh-CN" altLang="en-US" dirty="0"/>
+              <a:t> </a:t>
+            </a:r>
+            <a:r>
+              <a:rPr kumimoji="1" lang="en-US" altLang="zh-CN" dirty="0"/>
+              <a:t>idea</a:t>
+            </a:r>
+            <a:endParaRPr kumimoji="1" lang="zh-CN" altLang="en-US" dirty="0"/>
+          </a:p>
+        </p:txBody>
+      </p:sp>
+      <mc:AlternateContent xmlns:mc="http://schemas.openxmlformats.org/markup-compatibility/2006">
+        <mc:Choice xmlns:a14="http://schemas.microsoft.com/office/drawing/2010/main" Requires="a14">
+          <p:sp>
+            <p:nvSpPr>
+              <p:cNvPr id="3" name="内容占位符 2">
+                <a:extLst>
+                  <a:ext uri="{FF2B5EF4-FFF2-40B4-BE49-F238E27FC236}">
+                    <a16:creationId xmlns:a16="http://schemas.microsoft.com/office/drawing/2014/main" id="{3656A17E-8388-0CE7-2E94-8629CC2D37A9}"/>
+                  </a:ext>
+                </a:extLst>
+              </p:cNvPr>
+              <p:cNvSpPr>
+                <a:spLocks noGrp="1"/>
+              </p:cNvSpPr>
+              <p:nvPr>
+                <p:ph idx="1"/>
+              </p:nvPr>
+            </p:nvSpPr>
+            <p:spPr>
+              <a:xfrm>
+                <a:off x="1182688" y="2017713"/>
+                <a:ext cx="7772400" cy="4114800"/>
+              </a:xfrm>
+            </p:spPr>
+            <p:txBody>
+              <a:bodyPr/>
+              <a:lstStyle/>
+              <a:p>
+                <a:r>
+                  <a:rPr kumimoji="1" lang="en-US" altLang="zh-CN" sz="2400" dirty="0"/>
+                  <a:t>Yet</a:t>
+                </a:r>
+                <a:r>
+                  <a:rPr kumimoji="1" lang="zh-CN" altLang="en-US" sz="2400" dirty="0"/>
+                  <a:t> </a:t>
+                </a:r>
+                <a:r>
+                  <a:rPr kumimoji="1" lang="en-US" altLang="zh-CN" sz="2400" dirty="0"/>
+                  <a:t>another</a:t>
+                </a:r>
+                <a:r>
+                  <a:rPr kumimoji="1" lang="zh-CN" altLang="en-US" sz="2400" dirty="0"/>
+                  <a:t> </a:t>
+                </a:r>
+                <a:r>
+                  <a:rPr kumimoji="1" lang="en-US" altLang="zh-CN" sz="2400" dirty="0"/>
+                  <a:t>example:</a:t>
+                </a:r>
+              </a:p>
+              <a:p>
+                <a:pPr marL="0" indent="0">
+                  <a:buNone/>
+                </a:pPr>
+                <a14:m>
+                  <m:oMathPara xmlns:m="http://schemas.openxmlformats.org/officeDocument/2006/math">
+                    <m:oMath>
+                      <m:r>
+                        <a:rPr kumimoji="1" lang="en-US" altLang="zh-CN" sz="2400" b="0" i="1" smtClean="0">
+                          <a:solidFill>
+                            <a:srgbClr val="0432FF"/>
+                          </a:solidFill>
+                          <a:latin typeface="Cambria Math" panose="02040503050406030204" pitchFamily="18" charset="0"/>
+                          <a:ea typeface="Cambria Math" panose="02040503050406030204" pitchFamily="18" charset="0"/>
+                        </a:rPr>
+                        <m:t>𝑃</m:t>
+                      </m:r>
+                      <m:r>
+                        <a:rPr kumimoji="1" lang="en-US" altLang="zh-CN" sz="2400" b="0" i="1" smtClean="0">
+                          <a:solidFill>
+                            <a:srgbClr val="0432FF"/>
+                          </a:solidFill>
+                          <a:latin typeface="Cambria Math" panose="02040503050406030204" pitchFamily="18" charset="0"/>
+                          <a:ea typeface="Cambria Math" panose="02040503050406030204" pitchFamily="18" charset="0"/>
+                        </a:rPr>
+                        <m:t>/\</m:t>
+                      </m:r>
+                      <m:r>
+                        <m:rPr>
+                          <m:sty m:val="p"/>
+                        </m:rPr>
+                        <a:rPr kumimoji="1" lang="en-US" altLang="zh-CN" sz="2400" b="0" i="1" smtClean="0">
+                          <a:solidFill>
+                            <a:srgbClr val="0432FF"/>
+                          </a:solidFill>
+                          <a:latin typeface="Cambria Math" panose="02040503050406030204" pitchFamily="18" charset="0"/>
+                          <a:ea typeface="Cambria Math" panose="02040503050406030204" pitchFamily="18" charset="0"/>
+                        </a:rPr>
+                        <m:t>Q</m:t>
+                      </m:r>
+                      <m:r>
+                        <a:rPr kumimoji="1" lang="en-US" altLang="zh-CN" sz="2400" b="0" i="1" smtClean="0">
+                          <a:solidFill>
+                            <a:srgbClr val="0432FF"/>
+                          </a:solidFill>
+                          <a:latin typeface="Cambria Math" panose="02040503050406030204" pitchFamily="18" charset="0"/>
+                          <a:ea typeface="Cambria Math" panose="02040503050406030204" pitchFamily="18" charset="0"/>
+                        </a:rPr>
+                        <m:t>→</m:t>
+                      </m:r>
+                      <m:r>
+                        <a:rPr kumimoji="1" lang="en-US" altLang="zh-CN" sz="2400" b="0" i="1" smtClean="0">
+                          <a:solidFill>
+                            <a:srgbClr val="0432FF"/>
+                          </a:solidFill>
+                          <a:latin typeface="Cambria Math" panose="02040503050406030204" pitchFamily="18" charset="0"/>
+                          <a:ea typeface="Cambria Math" panose="02040503050406030204" pitchFamily="18" charset="0"/>
+                        </a:rPr>
+                        <m:t>𝑄</m:t>
+                      </m:r>
+                      <m:r>
+                        <a:rPr kumimoji="1" lang="en-US" altLang="zh-CN" sz="2400" b="0" i="1" smtClean="0">
+                          <a:solidFill>
+                            <a:srgbClr val="0432FF"/>
+                          </a:solidFill>
+                          <a:latin typeface="Cambria Math" panose="02040503050406030204" pitchFamily="18" charset="0"/>
+                          <a:ea typeface="Cambria Math" panose="02040503050406030204" pitchFamily="18" charset="0"/>
+                        </a:rPr>
+                        <m:t>/\</m:t>
+                      </m:r>
+                      <m:r>
+                        <a:rPr kumimoji="1" lang="en-US" altLang="zh-CN" sz="2400" b="0" i="1" smtClean="0">
+                          <a:solidFill>
+                            <a:srgbClr val="0432FF"/>
+                          </a:solidFill>
+                          <a:latin typeface="Cambria Math" panose="02040503050406030204" pitchFamily="18" charset="0"/>
+                          <a:ea typeface="Cambria Math" panose="02040503050406030204" pitchFamily="18" charset="0"/>
+                        </a:rPr>
+                        <m:t>𝑃</m:t>
+                      </m:r>
+                    </m:oMath>
+                  </m:oMathPara>
+                </a14:m>
+                <a:endParaRPr kumimoji="1" lang="en-US" altLang="zh-CN" sz="2400" dirty="0">
+                  <a:solidFill>
+                    <a:srgbClr val="0432FF"/>
+                  </a:solidFill>
+                </a:endParaRPr>
+              </a:p>
+              <a:p>
+                <a:pPr marL="0" indent="0">
+                  <a:buNone/>
+                </a:pPr>
+                <a:r>
+                  <a:rPr kumimoji="1" lang="en-US" altLang="zh-CN" sz="2400" dirty="0"/>
+                  <a:t>is</a:t>
+                </a:r>
+                <a:r>
+                  <a:rPr kumimoji="1" lang="zh-CN" altLang="en-US" sz="2400" dirty="0"/>
+                  <a:t> </a:t>
+                </a:r>
+                <a:r>
+                  <a:rPr kumimoji="1" lang="en-US" altLang="zh-CN" sz="2400" dirty="0"/>
+                  <a:t>converted</a:t>
+                </a:r>
+                <a:r>
+                  <a:rPr kumimoji="1" lang="zh-CN" altLang="en-US" sz="2400" dirty="0"/>
+                  <a:t> </a:t>
+                </a:r>
+                <a:r>
+                  <a:rPr kumimoji="1" lang="en-US" altLang="zh-CN" sz="2400" dirty="0"/>
+                  <a:t>into</a:t>
+                </a:r>
+                <a:r>
+                  <a:rPr kumimoji="1" lang="zh-CN" altLang="en-US" sz="2400" dirty="0"/>
+                  <a:t>  </a:t>
+                </a:r>
+                <a:endParaRPr kumimoji="1" lang="en-US" altLang="zh-CN" sz="2400" dirty="0"/>
+              </a:p>
+              <a:p>
+                <a:pPr marL="0" indent="0" algn="ctr">
+                  <a:buNone/>
+                </a:pPr>
+                <a:r>
+                  <a:rPr kumimoji="1" lang="en-US" altLang="zh-CN" sz="2400" i="1" dirty="0">
+                    <a:solidFill>
+                      <a:srgbClr val="0432FF"/>
+                    </a:solidFill>
+                    <a:latin typeface="Cambria Math" panose="02040503050406030204" pitchFamily="18" charset="0"/>
+                    <a:ea typeface="Cambria Math" panose="02040503050406030204" pitchFamily="18" charset="0"/>
+                  </a:rPr>
+                  <a:t>P</a:t>
+                </a:r>
+                <a:r>
+                  <a:rPr kumimoji="1" lang="en-US" altLang="zh-CN" sz="2400" dirty="0">
+                    <a:solidFill>
+                      <a:srgbClr val="0432FF"/>
+                    </a:solidFill>
+                    <a:ea typeface="Cambria Math" panose="02040503050406030204" pitchFamily="18" charset="0"/>
+                  </a:rPr>
+                  <a:t> </a:t>
+                </a:r>
+                <a14:m>
+                  <m:oMath xmlns:m="http://schemas.openxmlformats.org/officeDocument/2006/math">
+                    <m:r>
+                      <a:rPr kumimoji="1" lang="en-US" altLang="zh-CN" sz="2400" i="1">
+                        <a:solidFill>
+                          <a:srgbClr val="0432FF"/>
+                        </a:solidFill>
+                        <a:latin typeface="Cambria Math" panose="02040503050406030204" pitchFamily="18" charset="0"/>
+                        <a:ea typeface="Cambria Math" panose="02040503050406030204" pitchFamily="18" charset="0"/>
+                      </a:rPr>
+                      <m:t>/</m:t>
+                    </m:r>
+                    <m:r>
+                      <a:rPr kumimoji="1" lang="en-US" altLang="zh-CN" sz="2400" b="0" i="1" smtClean="0">
+                        <a:solidFill>
+                          <a:srgbClr val="0432FF"/>
+                        </a:solidFill>
+                        <a:latin typeface="Cambria Math" panose="02040503050406030204" pitchFamily="18" charset="0"/>
+                        <a:ea typeface="Cambria Math" panose="02040503050406030204" pitchFamily="18" charset="0"/>
+                      </a:rPr>
+                      <m:t>\</m:t>
+                    </m:r>
+                    <m:r>
+                      <m:rPr>
+                        <m:sty m:val="p"/>
+                      </m:rPr>
+                      <a:rPr kumimoji="1" lang="en-US" altLang="zh-CN" sz="2400" b="0" i="1" smtClean="0">
+                        <a:solidFill>
+                          <a:srgbClr val="0432FF"/>
+                        </a:solidFill>
+                        <a:latin typeface="Cambria Math" panose="02040503050406030204" pitchFamily="18" charset="0"/>
+                        <a:ea typeface="Cambria Math" panose="02040503050406030204" pitchFamily="18" charset="0"/>
+                      </a:rPr>
+                      <m:t>Q</m:t>
+                    </m:r>
+                  </m:oMath>
+                </a14:m>
+                <a:r>
+                  <a:rPr kumimoji="1" lang="zh-CN" altLang="en-US" sz="2400" i="1" dirty="0">
+                    <a:solidFill>
+                      <a:srgbClr val="0432FF"/>
+                    </a:solidFill>
+                    <a:latin typeface="Cambria Math" panose="02040503050406030204" pitchFamily="18" charset="0"/>
+                    <a:ea typeface="Cambria Math" panose="02040503050406030204" pitchFamily="18" charset="0"/>
+                  </a:rPr>
+                  <a:t>  </a:t>
+                </a:r>
+                <a14:m>
+                  <m:oMath xmlns:m="http://schemas.openxmlformats.org/officeDocument/2006/math">
+                    <m:r>
+                      <a:rPr kumimoji="1" lang="el-GR" altLang="zh-CN" sz="2400" i="1">
+                        <a:solidFill>
+                          <a:srgbClr val="0432FF"/>
+                        </a:solidFill>
+                        <a:latin typeface="Cambria Math" panose="02040503050406030204" pitchFamily="18" charset="0"/>
+                        <a:ea typeface="Cambria Math" panose="02040503050406030204" pitchFamily="18" charset="0"/>
+                      </a:rPr>
+                      <m:t>⊢</m:t>
+                    </m:r>
+                    <m:r>
+                      <a:rPr kumimoji="1" lang="en-US" altLang="zh-CN" sz="2400" b="0" i="1" smtClean="0">
+                        <a:solidFill>
+                          <a:srgbClr val="0432FF"/>
+                        </a:solidFill>
+                        <a:latin typeface="Cambria Math" panose="02040503050406030204" pitchFamily="18" charset="0"/>
+                        <a:ea typeface="Cambria Math" panose="02040503050406030204" pitchFamily="18" charset="0"/>
+                      </a:rPr>
+                      <m:t>𝑄</m:t>
+                    </m:r>
+                    <m:r>
+                      <a:rPr kumimoji="1" lang="en-US" altLang="zh-CN" sz="2400" b="0" i="1" smtClean="0">
+                        <a:solidFill>
+                          <a:srgbClr val="0432FF"/>
+                        </a:solidFill>
+                        <a:latin typeface="Cambria Math" panose="02040503050406030204" pitchFamily="18" charset="0"/>
+                        <a:ea typeface="Cambria Math" panose="02040503050406030204" pitchFamily="18" charset="0"/>
+                      </a:rPr>
+                      <m:t>/\</m:t>
+                    </m:r>
+                    <m:r>
+                      <a:rPr kumimoji="1" lang="en-US" altLang="zh-CN" sz="2400" b="0" i="1" smtClean="0">
+                        <a:solidFill>
+                          <a:srgbClr val="0432FF"/>
+                        </a:solidFill>
+                        <a:latin typeface="Cambria Math" panose="02040503050406030204" pitchFamily="18" charset="0"/>
+                        <a:ea typeface="Cambria Math" panose="02040503050406030204" pitchFamily="18" charset="0"/>
+                      </a:rPr>
+                      <m:t>𝑃</m:t>
+                    </m:r>
+                  </m:oMath>
+                </a14:m>
+                <a:endParaRPr kumimoji="1" lang="en-US" altLang="zh-CN" sz="2400" dirty="0">
+                  <a:solidFill>
+                    <a:srgbClr val="FF0000"/>
+                  </a:solidFill>
+                </a:endParaRPr>
+              </a:p>
+              <a:p>
+                <a:pPr marL="0" indent="0">
+                  <a:buNone/>
+                </a:pPr>
+                <a:r>
+                  <a:rPr kumimoji="1" lang="en-US" altLang="zh-CN" sz="2400" dirty="0"/>
+                  <a:t>then</a:t>
+                </a:r>
+                <a:r>
+                  <a:rPr kumimoji="1" lang="zh-CN" altLang="en-US" sz="2400" dirty="0"/>
+                  <a:t> </a:t>
+                </a:r>
+                <a:r>
+                  <a:rPr kumimoji="1" lang="en-US" altLang="zh-CN" sz="2400" dirty="0"/>
+                  <a:t>converted</a:t>
+                </a:r>
+                <a:r>
+                  <a:rPr kumimoji="1" lang="zh-CN" altLang="en-US" sz="2400" dirty="0"/>
+                  <a:t> </a:t>
+                </a:r>
+                <a:r>
+                  <a:rPr kumimoji="1" lang="en-US" altLang="zh-CN" sz="2400" dirty="0"/>
+                  <a:t>into</a:t>
+                </a:r>
+                <a:r>
+                  <a:rPr kumimoji="1" lang="zh-CN" altLang="en-US" sz="2400" dirty="0"/>
+                  <a:t> </a:t>
+                </a:r>
+                <a:r>
+                  <a:rPr kumimoji="1" lang="en-US" altLang="zh-CN" sz="2400" dirty="0"/>
+                  <a:t>two</a:t>
+                </a:r>
+                <a:r>
+                  <a:rPr kumimoji="1" lang="zh-CN" altLang="en-US" sz="2400" dirty="0"/>
+                  <a:t> </a:t>
+                </a:r>
+                <a:r>
+                  <a:rPr kumimoji="1" lang="en-US" altLang="zh-CN" sz="2400" dirty="0"/>
+                  <a:t>sub-goals:</a:t>
+                </a:r>
+              </a:p>
+              <a:p>
+                <a:pPr marL="457200" indent="-457200" algn="ctr">
+                  <a:buAutoNum type="arabicParenBoth"/>
+                </a:pPr>
+                <a:r>
+                  <a:rPr kumimoji="1" lang="en-US" altLang="zh-CN" sz="2400" i="1" dirty="0">
+                    <a:solidFill>
+                      <a:srgbClr val="0432FF"/>
+                    </a:solidFill>
+                    <a:latin typeface="Cambria Math" panose="02040503050406030204" pitchFamily="18" charset="0"/>
+                    <a:ea typeface="Cambria Math" panose="02040503050406030204" pitchFamily="18" charset="0"/>
+                  </a:rPr>
+                  <a:t>P</a:t>
+                </a:r>
+                <a:r>
+                  <a:rPr kumimoji="1" lang="en-US" altLang="zh-CN" sz="2400" dirty="0">
+                    <a:solidFill>
+                      <a:srgbClr val="0432FF"/>
+                    </a:solidFill>
+                    <a:ea typeface="Cambria Math" panose="02040503050406030204" pitchFamily="18" charset="0"/>
+                  </a:rPr>
+                  <a:t> </a:t>
+                </a:r>
+                <a14:m>
+                  <m:oMath xmlns:m="http://schemas.openxmlformats.org/officeDocument/2006/math">
+                    <m:r>
+                      <a:rPr kumimoji="1" lang="en-US" altLang="zh-CN" sz="2400" i="1">
+                        <a:solidFill>
+                          <a:srgbClr val="0432FF"/>
+                        </a:solidFill>
+                        <a:latin typeface="Cambria Math" panose="02040503050406030204" pitchFamily="18" charset="0"/>
+                        <a:ea typeface="Cambria Math" panose="02040503050406030204" pitchFamily="18" charset="0"/>
+                      </a:rPr>
+                      <m:t>/</m:t>
+                    </m:r>
+                    <m:r>
+                      <a:rPr kumimoji="1" lang="en-US" altLang="zh-CN" sz="2400" i="1">
+                        <a:solidFill>
+                          <a:srgbClr val="0432FF"/>
+                        </a:solidFill>
+                        <a:latin typeface="Cambria Math" panose="02040503050406030204" pitchFamily="18" charset="0"/>
+                        <a:ea typeface="Cambria Math" panose="02040503050406030204" pitchFamily="18" charset="0"/>
+                      </a:rPr>
+                      <m:t>\</m:t>
+                    </m:r>
+                    <m:r>
+                      <m:rPr>
+                        <m:sty m:val="p"/>
+                      </m:rPr>
+                      <a:rPr kumimoji="1" lang="en-US" altLang="zh-CN" sz="2400" i="1">
+                        <a:solidFill>
+                          <a:srgbClr val="0432FF"/>
+                        </a:solidFill>
+                        <a:latin typeface="Cambria Math" panose="02040503050406030204" pitchFamily="18" charset="0"/>
+                        <a:ea typeface="Cambria Math" panose="02040503050406030204" pitchFamily="18" charset="0"/>
+                      </a:rPr>
+                      <m:t>Q</m:t>
+                    </m:r>
+                  </m:oMath>
+                </a14:m>
+                <a:r>
+                  <a:rPr kumimoji="1" lang="zh-CN" altLang="en-US" sz="2400" i="1" dirty="0">
+                    <a:solidFill>
+                      <a:srgbClr val="0432FF"/>
+                    </a:solidFill>
+                    <a:latin typeface="Cambria Math" panose="02040503050406030204" pitchFamily="18" charset="0"/>
+                    <a:ea typeface="Cambria Math" panose="02040503050406030204" pitchFamily="18" charset="0"/>
+                  </a:rPr>
+                  <a:t> </a:t>
+                </a:r>
+                <a14:m>
+                  <m:oMath xmlns:m="http://schemas.openxmlformats.org/officeDocument/2006/math">
+                    <m:r>
+                      <a:rPr kumimoji="1" lang="el-GR" altLang="zh-CN" sz="2400" i="1">
+                        <a:solidFill>
+                          <a:srgbClr val="0432FF"/>
+                        </a:solidFill>
+                        <a:latin typeface="Cambria Math" panose="02040503050406030204" pitchFamily="18" charset="0"/>
+                        <a:ea typeface="Cambria Math" panose="02040503050406030204" pitchFamily="18" charset="0"/>
+                      </a:rPr>
+                      <m:t>⊢</m:t>
+                    </m:r>
+                    <m:r>
+                      <a:rPr kumimoji="1" lang="en-US" altLang="zh-CN" sz="2400" b="0" i="1" smtClean="0">
+                        <a:solidFill>
+                          <a:srgbClr val="0432FF"/>
+                        </a:solidFill>
+                        <a:latin typeface="Cambria Math" panose="02040503050406030204" pitchFamily="18" charset="0"/>
+                        <a:ea typeface="Cambria Math" panose="02040503050406030204" pitchFamily="18" charset="0"/>
+                      </a:rPr>
+                      <m:t>𝑄</m:t>
+                    </m:r>
+                  </m:oMath>
+                </a14:m>
+                <a:r>
+                  <a:rPr kumimoji="1" lang="zh-CN" altLang="en-US" sz="2400" i="1" dirty="0">
+                    <a:solidFill>
+                      <a:srgbClr val="0432FF"/>
+                    </a:solidFill>
+                    <a:latin typeface="Cambria Math" panose="02040503050406030204" pitchFamily="18" charset="0"/>
+                    <a:ea typeface="Cambria Math" panose="02040503050406030204" pitchFamily="18" charset="0"/>
+                  </a:rPr>
+                  <a:t>              </a:t>
+                </a:r>
+                <a:endParaRPr kumimoji="1" lang="en-US" altLang="zh-CN" sz="2400" i="1" dirty="0">
+                  <a:solidFill>
+                    <a:srgbClr val="0432FF"/>
+                  </a:solidFill>
+                  <a:latin typeface="Cambria Math" panose="02040503050406030204" pitchFamily="18" charset="0"/>
+                  <a:ea typeface="Cambria Math" panose="02040503050406030204" pitchFamily="18" charset="0"/>
+                </a:endParaRPr>
+              </a:p>
+              <a:p>
+                <a:pPr marL="457200" indent="-457200" algn="ctr">
+                  <a:buAutoNum type="arabicParenBoth"/>
+                </a:pPr>
+                <a:r>
+                  <a:rPr kumimoji="1" lang="en-US" altLang="zh-CN" sz="2400" i="1" dirty="0">
+                    <a:solidFill>
+                      <a:srgbClr val="0432FF"/>
+                    </a:solidFill>
+                    <a:latin typeface="Cambria Math" panose="02040503050406030204" pitchFamily="18" charset="0"/>
+                    <a:ea typeface="Cambria Math" panose="02040503050406030204" pitchFamily="18" charset="0"/>
+                  </a:rPr>
+                  <a:t>P</a:t>
+                </a:r>
+                <a:r>
+                  <a:rPr kumimoji="1" lang="en-US" altLang="zh-CN" sz="2400" dirty="0">
+                    <a:solidFill>
+                      <a:srgbClr val="0432FF"/>
+                    </a:solidFill>
+                    <a:ea typeface="Cambria Math" panose="02040503050406030204" pitchFamily="18" charset="0"/>
+                  </a:rPr>
+                  <a:t> </a:t>
+                </a:r>
+                <a14:m>
+                  <m:oMath xmlns:m="http://schemas.openxmlformats.org/officeDocument/2006/math">
+                    <m:r>
+                      <a:rPr kumimoji="1" lang="en-US" altLang="zh-CN" sz="2400" i="1">
+                        <a:solidFill>
+                          <a:srgbClr val="0432FF"/>
+                        </a:solidFill>
+                        <a:latin typeface="Cambria Math" panose="02040503050406030204" pitchFamily="18" charset="0"/>
+                        <a:ea typeface="Cambria Math" panose="02040503050406030204" pitchFamily="18" charset="0"/>
+                      </a:rPr>
+                      <m:t>/</m:t>
+                    </m:r>
+                    <m:r>
+                      <a:rPr kumimoji="1" lang="en-US" altLang="zh-CN" sz="2400" i="1">
+                        <a:solidFill>
+                          <a:srgbClr val="0432FF"/>
+                        </a:solidFill>
+                        <a:latin typeface="Cambria Math" panose="02040503050406030204" pitchFamily="18" charset="0"/>
+                        <a:ea typeface="Cambria Math" panose="02040503050406030204" pitchFamily="18" charset="0"/>
+                      </a:rPr>
+                      <m:t>\</m:t>
+                    </m:r>
+                    <m:r>
+                      <m:rPr>
+                        <m:sty m:val="p"/>
+                      </m:rPr>
+                      <a:rPr kumimoji="1" lang="en-US" altLang="zh-CN" sz="2400" i="1">
+                        <a:solidFill>
+                          <a:srgbClr val="0432FF"/>
+                        </a:solidFill>
+                        <a:latin typeface="Cambria Math" panose="02040503050406030204" pitchFamily="18" charset="0"/>
+                        <a:ea typeface="Cambria Math" panose="02040503050406030204" pitchFamily="18" charset="0"/>
+                      </a:rPr>
+                      <m:t>Q</m:t>
+                    </m:r>
+                  </m:oMath>
+                </a14:m>
+                <a:r>
+                  <a:rPr kumimoji="1" lang="zh-CN" altLang="en-US" sz="2400" i="1" dirty="0">
+                    <a:solidFill>
+                      <a:srgbClr val="0432FF"/>
+                    </a:solidFill>
+                    <a:latin typeface="Cambria Math" panose="02040503050406030204" pitchFamily="18" charset="0"/>
+                    <a:ea typeface="Cambria Math" panose="02040503050406030204" pitchFamily="18" charset="0"/>
+                  </a:rPr>
+                  <a:t> </a:t>
+                </a:r>
+                <a14:m>
+                  <m:oMath xmlns:m="http://schemas.openxmlformats.org/officeDocument/2006/math">
+                    <m:r>
+                      <a:rPr kumimoji="1" lang="el-GR" altLang="zh-CN" sz="2400" i="1">
+                        <a:solidFill>
+                          <a:srgbClr val="0432FF"/>
+                        </a:solidFill>
+                        <a:latin typeface="Cambria Math" panose="02040503050406030204" pitchFamily="18" charset="0"/>
+                        <a:ea typeface="Cambria Math" panose="02040503050406030204" pitchFamily="18" charset="0"/>
+                      </a:rPr>
+                      <m:t>⊢</m:t>
+                    </m:r>
+                    <m:r>
+                      <a:rPr kumimoji="1" lang="en-US" altLang="zh-CN" sz="2400" i="1" smtClean="0">
+                        <a:solidFill>
+                          <a:srgbClr val="0432FF"/>
+                        </a:solidFill>
+                        <a:latin typeface="Cambria Math" panose="02040503050406030204" pitchFamily="18" charset="0"/>
+                        <a:ea typeface="Cambria Math" panose="02040503050406030204" pitchFamily="18" charset="0"/>
+                      </a:rPr>
+                      <m:t>𝑃</m:t>
+                    </m:r>
+                  </m:oMath>
+                </a14:m>
+                <a:endParaRPr kumimoji="1" lang="en-US" altLang="zh-CN" sz="2400" dirty="0"/>
+              </a:p>
+              <a:p>
+                <a:pPr marL="0" indent="0">
+                  <a:buNone/>
+                </a:pPr>
+                <a:r>
+                  <a:rPr kumimoji="1" lang="en-US" altLang="zh-CN" sz="2400" dirty="0"/>
+                  <a:t>both</a:t>
+                </a:r>
+                <a:r>
+                  <a:rPr kumimoji="1" lang="zh-CN" altLang="en-US" sz="2400" dirty="0"/>
+                  <a:t> </a:t>
+                </a:r>
+                <a:r>
+                  <a:rPr kumimoji="1" lang="en-US" altLang="zh-CN" sz="2400" dirty="0"/>
+                  <a:t>of</a:t>
+                </a:r>
+                <a:r>
+                  <a:rPr kumimoji="1" lang="zh-CN" altLang="en-US" sz="2400" dirty="0"/>
+                  <a:t> </a:t>
+                </a:r>
+                <a:r>
+                  <a:rPr kumimoji="1" lang="en-US" altLang="zh-CN" sz="2400" dirty="0"/>
+                  <a:t>which</a:t>
+                </a:r>
+                <a:r>
+                  <a:rPr kumimoji="1" lang="zh-CN" altLang="en-US" sz="2400" dirty="0"/>
+                  <a:t> </a:t>
+                </a:r>
+                <a:r>
+                  <a:rPr kumimoji="1" lang="en-US" altLang="zh-CN" sz="2400" dirty="0"/>
+                  <a:t>can</a:t>
+                </a:r>
+                <a:r>
+                  <a:rPr kumimoji="1" lang="zh-CN" altLang="en-US" sz="2400" dirty="0"/>
+                  <a:t> </a:t>
+                </a:r>
+                <a:r>
+                  <a:rPr kumimoji="1" lang="en-US" altLang="zh-CN" sz="2400" dirty="0"/>
+                  <a:t>be</a:t>
+                </a:r>
+                <a:r>
+                  <a:rPr kumimoji="1" lang="zh-CN" altLang="en-US" sz="2400" dirty="0"/>
+                  <a:t> </a:t>
+                </a:r>
+                <a:r>
+                  <a:rPr kumimoji="1" lang="en-US" altLang="zh-CN" sz="2400" dirty="0"/>
+                  <a:t>proved</a:t>
+                </a:r>
+                <a:r>
+                  <a:rPr kumimoji="1" lang="zh-CN" altLang="en-US" sz="2400" dirty="0"/>
+                  <a:t> </a:t>
+                </a:r>
+                <a:r>
+                  <a:rPr kumimoji="1" lang="en-US" altLang="zh-CN" sz="2400" dirty="0"/>
+                  <a:t>trivially.</a:t>
+                </a:r>
+              </a:p>
+            </p:txBody>
+          </p:sp>
+        </mc:Choice>
+        <mc:Fallback>
+          <p:sp>
+            <p:nvSpPr>
+              <p:cNvPr id="3" name="内容占位符 2">
+                <a:extLst>
+                  <a:ext uri="{FF2B5EF4-FFF2-40B4-BE49-F238E27FC236}">
+                    <a16:creationId xmlns:a16="http://schemas.microsoft.com/office/drawing/2014/main" id="{3656A17E-8388-0CE7-2E94-8629CC2D37A9}"/>
+                  </a:ext>
+                </a:extLst>
+              </p:cNvPr>
+              <p:cNvSpPr>
+                <a:spLocks noGrp="1" noRot="1" noChangeAspect="1" noMove="1" noResize="1" noEditPoints="1" noAdjustHandles="1" noChangeArrowheads="1" noChangeShapeType="1" noTextEdit="1"/>
+              </p:cNvSpPr>
+              <p:nvPr>
+                <p:ph idx="1"/>
+              </p:nvPr>
+            </p:nvSpPr>
+            <p:spPr>
+              <a:xfrm>
+                <a:off x="1182688" y="2017713"/>
+                <a:ext cx="7772400" cy="4114800"/>
+              </a:xfrm>
+              <a:blipFill>
+                <a:blip r:embed="rId2"/>
+                <a:stretch>
+                  <a:fillRect l="-1305" t="-923"/>
+                </a:stretch>
+              </a:blipFill>
+            </p:spPr>
+            <p:txBody>
+              <a:bodyPr/>
+              <a:lstStyle/>
+              <a:p>
+                <a:r>
+                  <a:rPr lang="zh-CN" altLang="en-US">
+                    <a:noFill/>
+                  </a:rPr>
+                  <a:t> </a:t>
+                </a:r>
+              </a:p>
+            </p:txBody>
+          </p:sp>
+        </mc:Fallback>
+      </mc:AlternateContent>
+    </p:spTree>
+    <p:extLst>
+      <p:ext uri="{BB962C8B-B14F-4D97-AF65-F5344CB8AC3E}">
+        <p14:creationId xmlns:p14="http://schemas.microsoft.com/office/powerpoint/2010/main" val="3171095772"/>
+      </p:ext>
+    </p:extLst>
+  </p:cSld>
+  <p:clrMapOvr>
+    <a:masterClrMapping/>
+  </p:clrMapOvr>
+</p:sld>
+</file>
+
+<file path=ppt/slides/slide21.xml><?xml version="1.0" encoding="utf-8"?>
+<p:sld xmlns:a="http://schemas.openxmlformats.org/drawingml/2006/main" xmlns:r="http://schemas.openxmlformats.org/officeDocument/2006/relationships" xmlns:p="http://schemas.openxmlformats.org/presentationml/2006/main">
+  <p:cSld>
+    <p:spTree>
+      <p:nvGrpSpPr>
+        <p:cNvPr id="1" name="">
+          <a:extLst>
+            <a:ext uri="{FF2B5EF4-FFF2-40B4-BE49-F238E27FC236}">
+              <a16:creationId xmlns:a16="http://schemas.microsoft.com/office/drawing/2014/main" id="{FD95F628-9B13-620D-686F-B9BB047926E0}"/>
+            </a:ext>
+          </a:extLst>
+        </p:cNvPr>
+        <p:cNvGrpSpPr/>
+        <p:nvPr/>
+      </p:nvGrpSpPr>
+      <p:grpSpPr>
+        <a:xfrm>
+          <a:off x="0" y="0"/>
+          <a:ext cx="0" cy="0"/>
+          <a:chOff x="0" y="0"/>
+          <a:chExt cx="0" cy="0"/>
+        </a:xfrm>
+      </p:grpSpPr>
+      <p:sp>
+        <p:nvSpPr>
+          <p:cNvPr id="2" name="标题 1">
+            <a:extLst>
+              <a:ext uri="{FF2B5EF4-FFF2-40B4-BE49-F238E27FC236}">
+                <a16:creationId xmlns:a16="http://schemas.microsoft.com/office/drawing/2014/main" id="{2CF5FA09-2939-AD47-8167-9818F785B7F7}"/>
+              </a:ext>
+            </a:extLst>
+          </p:cNvPr>
+          <p:cNvSpPr>
+            <a:spLocks noGrp="1"/>
+          </p:cNvSpPr>
+          <p:nvPr>
+            <p:ph type="title"/>
+          </p:nvPr>
+        </p:nvSpPr>
+        <p:spPr/>
+        <p:txBody>
+          <a:bodyPr/>
+          <a:lstStyle/>
+          <a:p>
+            <a:r>
+              <a:rPr kumimoji="1" lang="en-US" altLang="zh-CN" dirty="0"/>
+              <a:t>Natural</a:t>
+            </a:r>
+            <a:r>
+              <a:rPr kumimoji="1" lang="zh-CN" altLang="en-US" dirty="0"/>
+              <a:t> </a:t>
+            </a:r>
+            <a:r>
+              <a:rPr kumimoji="1" lang="en-US" altLang="zh-CN" dirty="0"/>
+              <a:t>deduction:</a:t>
+            </a:r>
+            <a:r>
+              <a:rPr kumimoji="1" lang="zh-CN" altLang="en-US" dirty="0"/>
+              <a:t> </a:t>
+            </a:r>
+            <a:r>
+              <a:rPr kumimoji="1" lang="en-US" altLang="zh-CN" dirty="0"/>
+              <a:t>judgments</a:t>
+            </a:r>
+            <a:endParaRPr kumimoji="1" lang="zh-CN" altLang="en-US" dirty="0"/>
+          </a:p>
+        </p:txBody>
+      </p:sp>
+      <mc:AlternateContent xmlns:mc="http://schemas.openxmlformats.org/markup-compatibility/2006">
+        <mc:Choice xmlns:a14="http://schemas.microsoft.com/office/drawing/2010/main" Requires="a14">
+          <p:sp>
+            <p:nvSpPr>
+              <p:cNvPr id="3" name="内容占位符 2">
+                <a:extLst>
+                  <a:ext uri="{FF2B5EF4-FFF2-40B4-BE49-F238E27FC236}">
+                    <a16:creationId xmlns:a16="http://schemas.microsoft.com/office/drawing/2014/main" id="{570A6C88-FEE9-66A9-4E2E-230FD81434BE}"/>
+                  </a:ext>
+                </a:extLst>
+              </p:cNvPr>
+              <p:cNvSpPr>
+                <a:spLocks noGrp="1"/>
+              </p:cNvSpPr>
+              <p:nvPr>
+                <p:ph idx="1"/>
+              </p:nvPr>
+            </p:nvSpPr>
+            <p:spPr>
+              <a:xfrm>
+                <a:off x="1182688" y="2017713"/>
+                <a:ext cx="7772400" cy="4114800"/>
+              </a:xfrm>
+            </p:spPr>
+            <p:txBody>
+              <a:bodyPr/>
+              <a:lstStyle/>
+              <a:p>
+                <a:r>
+                  <a:rPr kumimoji="1" lang="en-US" altLang="zh-CN" dirty="0"/>
+                  <a:t>Judgment:</a:t>
+                </a:r>
+              </a:p>
+              <a:p>
+                <a:pPr marL="0" indent="0">
+                  <a:buNone/>
+                </a:pPr>
+                <a14:m>
+                  <m:oMathPara xmlns:m="http://schemas.openxmlformats.org/officeDocument/2006/math">
+                    <m:oMath>
                       <m:r>
                         <m:rPr>
                           <m:sty m:val="p"/>
@@ -11360,7 +14128,7 @@
                 </a:pPr>
                 <a:r>
                   <a:rPr kumimoji="1" lang="en-US" altLang="zh-CN" dirty="0"/>
-                  <a:t>Where</a:t>
+                  <a:t>where</a:t>
                 </a:r>
                 <a:r>
                   <a:rPr kumimoji="1" lang="zh-CN" altLang="en-US" dirty="0"/>
@@ -11458,13 +14226,7 @@
                       <a:rPr kumimoji="1" lang="en-US" altLang="zh-CN">
                         <a:latin typeface="Cambria Math" panose="02040503050406030204" pitchFamily="18" charset="0"/>
                       </a:rPr>
-                      <m:t>,</m:t>
-                    </m:r>
-                    <m:r>
-                      <a:rPr kumimoji="1" lang="zh-CN" altLang="en-US">
-                        <a:latin typeface="Cambria Math" panose="02040503050406030204" pitchFamily="18" charset="0"/>
-                      </a:rPr>
-                      <m:t> </m:t>
+                      <m:t>, </m:t>
                     </m:r>
                     <m:r>
                       <m:rPr>
@@ -11488,10 +14250,19 @@
                       <a:rPr kumimoji="1" lang="en-US" altLang="zh-CN">
                         <a:latin typeface="Cambria Math" panose="02040503050406030204" pitchFamily="18" charset="0"/>
                       </a:rPr>
-                      <m:t>is</m:t>
+                      <m:t>i</m:t>
                     </m:r>
                     <m:r>
-                      <a:rPr kumimoji="1" lang="zh-CN" altLang="en-US">
+                      <m:rPr>
+                        <m:sty m:val="p"/>
+                      </m:rPr>
+                      <a:rPr kumimoji="1" lang="en-US" altLang="zh-CN" b="0" i="0" smtClean="0">
+                        <a:latin typeface="Cambria Math" panose="02040503050406030204" pitchFamily="18" charset="0"/>
+                      </a:rPr>
+                      <m:t>s</m:t>
+                    </m:r>
+                    <m:r>
+                      <a:rPr kumimoji="1" lang="zh-CN" altLang="en-US" b="0" i="0" smtClean="0">
                         <a:latin typeface="Cambria Math" panose="02040503050406030204" pitchFamily="18" charset="0"/>
                       </a:rPr>
                       <m:t> </m:t>
@@ -11500,13 +14271,13 @@
                       <m:rPr>
                         <m:sty m:val="p"/>
                       </m:rPr>
-                      <a:rPr kumimoji="1" lang="en-US" altLang="zh-CN">
+                      <a:rPr kumimoji="1" lang="en-US" altLang="zh-CN" b="0" i="0" smtClean="0">
                         <a:latin typeface="Cambria Math" panose="02040503050406030204" pitchFamily="18" charset="0"/>
                       </a:rPr>
-                      <m:t>a</m:t>
+                      <m:t>the</m:t>
                     </m:r>
                     <m:r>
-                      <a:rPr kumimoji="1" lang="zh-CN" altLang="en-US">
+                      <a:rPr kumimoji="1" lang="zh-CN" altLang="en-US" b="0" i="0" smtClean="0">
                         <a:latin typeface="Cambria Math" panose="02040503050406030204" pitchFamily="18" charset="0"/>
                       </a:rPr>
                       <m:t> </m:t>
@@ -11515,16 +14286,10 @@
                       <m:rPr>
                         <m:sty m:val="p"/>
                       </m:rPr>
-                      <a:rPr kumimoji="1" lang="en-US" altLang="zh-CN">
+                      <a:rPr kumimoji="1" lang="en-US" altLang="zh-CN" b="0" i="0" smtClean="0">
                         <a:latin typeface="Cambria Math" panose="02040503050406030204" pitchFamily="18" charset="0"/>
                       </a:rPr>
-                      <m:t>single</m:t>
-                    </m:r>
-                    <m:r>
-                      <a:rPr kumimoji="1" lang="zh-CN" altLang="en-US">
-                        <a:latin typeface="Cambria Math" panose="02040503050406030204" pitchFamily="18" charset="0"/>
-                      </a:rPr>
-                      <m:t> </m:t>
+                      <m:t>target</m:t>
                     </m:r>
                   </m:oMath>
                 </a14:m>
@@ -11539,7 +14304,7 @@
                     <m:oMathParaPr>
                       <m:jc m:val="left"/>
                     </m:oMathParaPr>
-                    <m:oMath xmlns:m="http://schemas.openxmlformats.org/officeDocument/2006/math">
+                    <m:oMath>
                       <m:r>
                         <m:rPr>
                           <m:sty m:val="p"/>
@@ -11561,9 +14326,6 @@
                 <a:endParaRPr kumimoji="1" lang="en-US" altLang="zh-CN" dirty="0"/>
               </a:p>
               <a:p>
-                <a:pPr marL="0" indent="0">
-                  <a:buNone/>
-                </a:pPr>
                 <a:r>
                   <a:rPr kumimoji="1" lang="en-US" altLang="zh-CN" dirty="0"/>
                   <a:t>Meaning:</a:t>
@@ -11596,6 +14358,20 @@
                   <a:rPr kumimoji="1" lang="zh-CN" altLang="en-US" dirty="0"/>
                   <a:t> </a:t>
                 </a:r>
+                <a14:m>
+                  <m:oMath xmlns:m="http://schemas.openxmlformats.org/officeDocument/2006/math">
+                    <m:r>
+                      <m:rPr>
+                        <m:sty m:val="p"/>
+                      </m:rPr>
+                      <a:rPr kumimoji="1" lang="el-GR" altLang="zh-CN" i="1">
+                        <a:latin typeface="Cambria Math" panose="02040503050406030204" pitchFamily="18" charset="0"/>
+                        <a:ea typeface="Cambria Math" panose="02040503050406030204" pitchFamily="18" charset="0"/>
+                      </a:rPr>
+                      <m:t>Γ</m:t>
+                    </m:r>
+                  </m:oMath>
+                </a14:m>
                 <a:r>
                   <a:rPr kumimoji="1" lang="en-US" altLang="zh-CN" dirty="0"/>
                   <a:t>,</a:t>
@@ -11642,7 +14418,7 @@
                     <a:latin typeface="Cambria Math" panose="02040503050406030204" pitchFamily="18" charset="0"/>
                     <a:ea typeface="Cambria Math" panose="02040503050406030204" pitchFamily="18" charset="0"/>
                   </a:rPr>
-                  <a:t>P,</a:t>
+                  <a:t>P/\Q,</a:t>
                 </a:r>
                 <a:r>
                   <a:rPr kumimoji="1" lang="zh-CN" altLang="en-US" i="1" dirty="0">
@@ -11702,13 +14478,13 @@
             </p:txBody>
           </p:sp>
         </mc:Choice>
-        <mc:Fallback xmlns="">
+        <mc:Fallback>
           <p:sp>
             <p:nvSpPr>
               <p:cNvPr id="3" name="内容占位符 2">
                 <a:extLst>
                   <a:ext uri="{FF2B5EF4-FFF2-40B4-BE49-F238E27FC236}">
-                    <a16:creationId xmlns:a16="http://schemas.microsoft.com/office/drawing/2014/main" id="{DB11951C-1764-D141-AF08-2BA3416EEABE}"/>
+                    <a16:creationId xmlns:a16="http://schemas.microsoft.com/office/drawing/2014/main" id="{570A6C88-FEE9-66A9-4E2E-230FD81434BE}"/>
                   </a:ext>
                 </a:extLst>
               </p:cNvPr>
@@ -11727,7 +14503,7 @@
               <a:blipFill>
                 <a:blip r:embed="rId2"/>
                 <a:stretch>
-                  <a:fillRect l="-1794" t="-1846" b="-8923"/>
+                  <a:fillRect l="-1958" t="-1846" b="-9231"/>
                 </a:stretch>
               </a:blipFill>
             </p:spPr>
@@ -11749,7 +14525,7 @@
     </p:spTree>
     <p:extLst>
       <p:ext uri="{BB962C8B-B14F-4D97-AF65-F5344CB8AC3E}">
-        <p14:creationId xmlns:p14="http://schemas.microsoft.com/office/powerpoint/2010/main" val="2956083337"/>
+        <p14:creationId xmlns:p14="http://schemas.microsoft.com/office/powerpoint/2010/main" val="972083947"/>
       </p:ext>
     </p:extLst>
   </p:cSld>
@@ -11759,7 +14535,7 @@
 </p:sld>
 </file>
 
-<file path=ppt/slides/slide17.xml><?xml version="1.0" encoding="utf-8"?>
+<file path=ppt/slides/slide22.xml><?xml version="1.0" encoding="utf-8"?>
 <p:sld xmlns:a="http://schemas.openxmlformats.org/drawingml/2006/main" xmlns:r="http://schemas.openxmlformats.org/officeDocument/2006/relationships" xmlns:p="http://schemas.openxmlformats.org/presentationml/2006/main">
   <p:cSld>
     <p:spTree>
@@ -11939,8 +14715,8 @@
           </a:fontRef>
         </p:style>
       </p:cxnSp>
-      <mc:AlternateContent xmlns:mc="http://schemas.openxmlformats.org/markup-compatibility/2006" xmlns:a14="http://schemas.microsoft.com/office/drawing/2010/main">
-        <mc:Choice Requires="a14">
+      <mc:AlternateContent xmlns:mc="http://schemas.openxmlformats.org/markup-compatibility/2006">
+        <mc:Choice xmlns:a14="http://schemas.microsoft.com/office/drawing/2010/main" Requires="a14">
           <p:sp>
             <p:nvSpPr>
               <p:cNvPr id="7" name="文本框 6">
@@ -11972,10 +14748,7 @@
                 <a:pPr/>
                 <a14:m>
                   <m:oMathPara xmlns:m="http://schemas.openxmlformats.org/officeDocument/2006/math">
-                    <m:oMathParaPr>
-                      <m:jc m:val="centerGroup"/>
-                    </m:oMathParaPr>
-                    <m:oMath xmlns:m="http://schemas.openxmlformats.org/officeDocument/2006/math">
+                    <m:oMath>
                       <m:r>
                         <m:rPr>
                           <m:sty m:val="p"/>
@@ -11985,13 +14758,6 @@
                           <a:ea typeface="Cambria Math" panose="02040503050406030204" pitchFamily="18" charset="0"/>
                         </a:rPr>
                         <m:t>Γ</m:t>
-                      </m:r>
-                      <m:r>
-                        <a:rPr kumimoji="1" lang="en-US" altLang="zh-CN" b="0" i="1" smtClean="0">
-                          <a:latin typeface="Cambria Math" panose="02040503050406030204" pitchFamily="18" charset="0"/>
-                          <a:ea typeface="Cambria Math" panose="02040503050406030204" pitchFamily="18" charset="0"/>
-                        </a:rPr>
-                        <m:t>1</m:t>
                       </m:r>
                       <m:r>
                         <a:rPr kumimoji="1" lang="el-GR" altLang="zh-CN" i="1">
@@ -12008,7 +14774,7 @@
                         <m:t>𝑃</m:t>
                       </m:r>
                       <m:r>
-                        <a:rPr kumimoji="1" lang="en-US" altLang="zh-CN" b="0" i="1" smtClean="0">
+                        <a:rPr kumimoji="1" lang="en-US" altLang="zh-CN" b="0" i="1" baseline="-25000" smtClean="0">
                           <a:latin typeface="Cambria Math" panose="02040503050406030204" pitchFamily="18" charset="0"/>
                           <a:ea typeface="Cambria Math" panose="02040503050406030204" pitchFamily="18" charset="0"/>
                         </a:rPr>
@@ -12017,12 +14783,12 @@
                     </m:oMath>
                   </m:oMathPara>
                 </a14:m>
-                <a:endParaRPr kumimoji="1" lang="en-US" altLang="zh-CN" dirty="0"/>
+                <a:endParaRPr kumimoji="1" lang="en-US" altLang="zh-CN" baseline="-25000" dirty="0"/>
               </a:p>
             </p:txBody>
           </p:sp>
         </mc:Choice>
-        <mc:Fallback xmlns="">
+        <mc:Fallback>
           <p:sp>
             <p:nvSpPr>
               <p:cNvPr id="7" name="文本框 6">
@@ -12067,8 +14833,8 @@
           </p:sp>
         </mc:Fallback>
       </mc:AlternateContent>
-      <mc:AlternateContent xmlns:mc="http://schemas.openxmlformats.org/markup-compatibility/2006" xmlns:a14="http://schemas.microsoft.com/office/drawing/2010/main">
-        <mc:Choice Requires="a14">
+      <mc:AlternateContent xmlns:mc="http://schemas.openxmlformats.org/markup-compatibility/2006">
+        <mc:Choice xmlns:a14="http://schemas.microsoft.com/office/drawing/2010/main" Requires="a14">
           <p:sp>
             <p:nvSpPr>
               <p:cNvPr id="8" name="文本框 7">
@@ -12100,10 +14866,7 @@
                 <a:pPr/>
                 <a14:m>
                   <m:oMathPara xmlns:m="http://schemas.openxmlformats.org/officeDocument/2006/math">
-                    <m:oMathParaPr>
-                      <m:jc m:val="centerGroup"/>
-                    </m:oMathParaPr>
-                    <m:oMath xmlns:m="http://schemas.openxmlformats.org/officeDocument/2006/math">
+                    <m:oMath>
                       <m:r>
                         <m:rPr>
                           <m:sty m:val="p"/>
@@ -12113,13 +14876,6 @@
                           <a:ea typeface="Cambria Math" panose="02040503050406030204" pitchFamily="18" charset="0"/>
                         </a:rPr>
                         <m:t>Γ</m:t>
-                      </m:r>
-                      <m:r>
-                        <a:rPr kumimoji="1" lang="en-US" altLang="zh-CN" b="0" i="1" smtClean="0">
-                          <a:latin typeface="Cambria Math" panose="02040503050406030204" pitchFamily="18" charset="0"/>
-                          <a:ea typeface="Cambria Math" panose="02040503050406030204" pitchFamily="18" charset="0"/>
-                        </a:rPr>
-                        <m:t>𝑛</m:t>
                       </m:r>
                       <m:r>
                         <a:rPr kumimoji="1" lang="el-GR" altLang="zh-CN" i="1">
@@ -12136,7 +14892,7 @@
                         <m:t>𝑃</m:t>
                       </m:r>
                       <m:r>
-                        <a:rPr kumimoji="1" lang="en-US" altLang="zh-CN" b="0" i="1" smtClean="0">
+                        <a:rPr kumimoji="1" lang="en-US" altLang="zh-CN" b="0" i="1" baseline="-25000" smtClean="0">
                           <a:latin typeface="Cambria Math" panose="02040503050406030204" pitchFamily="18" charset="0"/>
                           <a:ea typeface="Cambria Math" panose="02040503050406030204" pitchFamily="18" charset="0"/>
                         </a:rPr>
@@ -12145,12 +14901,12 @@
                     </m:oMath>
                   </m:oMathPara>
                 </a14:m>
-                <a:endParaRPr kumimoji="1" lang="en-US" altLang="zh-CN" dirty="0"/>
+                <a:endParaRPr kumimoji="1" lang="en-US" altLang="zh-CN" baseline="-25000" dirty="0"/>
               </a:p>
             </p:txBody>
           </p:sp>
         </mc:Choice>
-        <mc:Fallback xmlns="">
+        <mc:Fallback>
           <p:sp>
             <p:nvSpPr>
               <p:cNvPr id="8" name="文本框 7">
@@ -12228,10 +14984,7 @@
                 <a:pPr/>
                 <a14:m>
                   <m:oMathPara xmlns:m="http://schemas.openxmlformats.org/officeDocument/2006/math">
-                    <m:oMathParaPr>
-                      <m:jc m:val="centerGroup"/>
-                    </m:oMathParaPr>
-                    <m:oMath xmlns:m="http://schemas.openxmlformats.org/officeDocument/2006/math">
+                    <m:oMath>
                       <m:r>
                         <m:rPr>
                           <m:sty m:val="p"/>
@@ -12342,10 +15095,7 @@
                 <a:pPr/>
                 <a14:m>
                   <m:oMathPara xmlns:m="http://schemas.openxmlformats.org/officeDocument/2006/math">
-                    <m:oMathParaPr>
-                      <m:jc m:val="centerGroup"/>
-                    </m:oMathParaPr>
-                    <m:oMath xmlns:m="http://schemas.openxmlformats.org/officeDocument/2006/math">
+                    <m:oMath>
                       <m:r>
                         <a:rPr kumimoji="1" lang="en-US" altLang="zh-CN" i="1" smtClean="0">
                           <a:latin typeface="Cambria Math" panose="02040503050406030204" pitchFamily="18" charset="0"/>
@@ -12439,10 +15189,7 @@
                 <a:pPr/>
                 <a14:m>
                   <m:oMathPara xmlns:m="http://schemas.openxmlformats.org/officeDocument/2006/math">
-                    <m:oMathParaPr>
-                      <m:jc m:val="centerGroup"/>
-                    </m:oMathParaPr>
-                    <m:oMath xmlns:m="http://schemas.openxmlformats.org/officeDocument/2006/math">
+                    <m:oMath>
                       <m:r>
                         <a:rPr kumimoji="1" lang="en-US" altLang="zh-CN" i="1" smtClean="0">
                           <a:latin typeface="Cambria Math" panose="02040503050406030204" pitchFamily="18" charset="0"/>
@@ -12742,7 +15489,7 @@
           <a:p>
             <a:r>
               <a:rPr kumimoji="1" lang="en-US" altLang="zh-CN" dirty="0"/>
-              <a:t>Or</a:t>
+              <a:t>Otherwise</a:t>
             </a:r>
             <a:r>
               <a:rPr kumimoji="1" lang="zh-CN" altLang="en-US" dirty="0"/>
@@ -12750,7 +15497,7 @@
             </a:r>
             <a:r>
               <a:rPr kumimoji="1" lang="en-US" altLang="zh-CN" dirty="0"/>
-              <a:t>else</a:t>
+              <a:t>it</a:t>
             </a:r>
             <a:r>
               <a:rPr kumimoji="1" lang="zh-CN" altLang="en-US" dirty="0"/>
@@ -12758,6 +15505,14 @@
             </a:r>
             <a:r>
               <a:rPr kumimoji="1" lang="en-US" altLang="zh-CN" dirty="0"/>
+              <a:t>is</a:t>
+            </a:r>
+            <a:r>
+              <a:rPr kumimoji="1" lang="zh-CN" altLang="en-US"/>
+              <a:t> </a:t>
+            </a:r>
+            <a:r>
+              <a:rPr kumimoji="1" lang="en-US" altLang="zh-CN"/>
               <a:t>called</a:t>
             </a:r>
             <a:r>
@@ -12793,7 +15548,7 @@
 </p:sld>
 </file>
 
-<file path=ppt/slides/slide18.xml><?xml version="1.0" encoding="utf-8"?>
+<file path=ppt/slides/slide23.xml><?xml version="1.0" encoding="utf-8"?>
 <p:sld xmlns:a="http://schemas.openxmlformats.org/drawingml/2006/main" xmlns:r="http://schemas.openxmlformats.org/officeDocument/2006/relationships" xmlns:p="http://schemas.openxmlformats.org/presentationml/2006/main">
   <p:cSld>
     <p:spTree>
@@ -12990,10 +15745,7 @@
                 <a:pPr/>
                 <a14:m>
                   <m:oMathPara xmlns:m="http://schemas.openxmlformats.org/officeDocument/2006/math">
-                    <m:oMathParaPr>
-                      <m:jc m:val="centerGroup"/>
-                    </m:oMathParaPr>
-                    <m:oMath xmlns:m="http://schemas.openxmlformats.org/officeDocument/2006/math">
+                    <m:oMath>
                       <m:r>
                         <m:rPr>
                           <m:sty m:val="p"/>
@@ -13125,10 +15877,7 @@
                 <a:pPr/>
                 <a14:m>
                   <m:oMathPara xmlns:m="http://schemas.openxmlformats.org/officeDocument/2006/math">
-                    <m:oMathParaPr>
-                      <m:jc m:val="centerGroup"/>
-                    </m:oMathParaPr>
-                    <m:oMath xmlns:m="http://schemas.openxmlformats.org/officeDocument/2006/math">
+                    <m:oMath>
                       <m:r>
                         <a:rPr kumimoji="1" lang="en-US" altLang="zh-CN" i="1" smtClean="0">
                           <a:latin typeface="Cambria Math" panose="02040503050406030204" pitchFamily="18" charset="0"/>
@@ -13349,7 +16098,7 @@
 </p:sld>
 </file>
 
-<file path=ppt/slides/slide19.xml><?xml version="1.0" encoding="utf-8"?>
+<file path=ppt/slides/slide24.xml><?xml version="1.0" encoding="utf-8"?>
 <p:sld xmlns:a="http://schemas.openxmlformats.org/drawingml/2006/main" xmlns:r="http://schemas.openxmlformats.org/officeDocument/2006/relationships" xmlns:p="http://schemas.openxmlformats.org/presentationml/2006/main">
   <p:cSld>
     <p:spTree>
@@ -13549,10 +16298,7 @@
                 <a:pPr/>
                 <a14:m>
                   <m:oMathPara xmlns:m="http://schemas.openxmlformats.org/officeDocument/2006/math">
-                    <m:oMathParaPr>
-                      <m:jc m:val="centerGroup"/>
-                    </m:oMathParaPr>
-                    <m:oMath xmlns:m="http://schemas.openxmlformats.org/officeDocument/2006/math">
+                    <m:oMath>
                       <m:r>
                         <m:rPr>
                           <m:sty m:val="p"/>
@@ -13673,10 +16419,7 @@
                 <a:pPr/>
                 <a14:m>
                   <m:oMathPara xmlns:m="http://schemas.openxmlformats.org/officeDocument/2006/math">
-                    <m:oMathParaPr>
-                      <m:jc m:val="centerGroup"/>
-                    </m:oMathParaPr>
-                    <m:oMath xmlns:m="http://schemas.openxmlformats.org/officeDocument/2006/math">
+                    <m:oMath>
                       <m:r>
                         <a:rPr kumimoji="1" lang="en-US" altLang="zh-CN" i="1" smtClean="0">
                           <a:latin typeface="Cambria Math" panose="02040503050406030204" pitchFamily="18" charset="0"/>
@@ -13883,144 +16626,7 @@
 </p:sld>
 </file>
 
-<file path=ppt/slides/slide2.xml><?xml version="1.0" encoding="utf-8"?>
-<p:sld xmlns:a="http://schemas.openxmlformats.org/drawingml/2006/main" xmlns:r="http://schemas.openxmlformats.org/officeDocument/2006/relationships" xmlns:p="http://schemas.openxmlformats.org/presentationml/2006/main">
-  <p:cSld>
-    <p:spTree>
-      <p:nvGrpSpPr>
-        <p:cNvPr id="1" name=""/>
-        <p:cNvGrpSpPr/>
-        <p:nvPr/>
-      </p:nvGrpSpPr>
-      <p:grpSpPr>
-        <a:xfrm>
-          <a:off x="0" y="0"/>
-          <a:ext cx="0" cy="0"/>
-          <a:chOff x="0" y="0"/>
-          <a:chExt cx="0" cy="0"/>
-        </a:xfrm>
-      </p:grpSpPr>
-      <p:sp>
-        <p:nvSpPr>
-          <p:cNvPr id="2" name="标题 1">
-            <a:extLst>
-              <a:ext uri="{FF2B5EF4-FFF2-40B4-BE49-F238E27FC236}">
-                <a16:creationId xmlns:a16="http://schemas.microsoft.com/office/drawing/2014/main" id="{F83B1A98-5D2E-F84C-8A75-A8FC62CA10DB}"/>
-              </a:ext>
-            </a:extLst>
-          </p:cNvPr>
-          <p:cNvSpPr>
-            <a:spLocks noGrp="1"/>
-          </p:cNvSpPr>
-          <p:nvPr>
-            <p:ph type="title"/>
-          </p:nvPr>
-        </p:nvSpPr>
-        <p:spPr/>
-        <p:txBody>
-          <a:bodyPr/>
-          <a:lstStyle/>
-          <a:p>
-            <a:r>
-              <a:rPr kumimoji="1" lang="en-US" altLang="zh-CN" dirty="0"/>
-              <a:t>Mathematical</a:t>
-            </a:r>
-            <a:r>
-              <a:rPr kumimoji="1" lang="zh-CN" altLang="en-US" dirty="0"/>
-              <a:t> </a:t>
-            </a:r>
-            <a:r>
-              <a:rPr kumimoji="1" lang="en-US" altLang="zh-CN" dirty="0"/>
-              <a:t>logic</a:t>
-            </a:r>
-            <a:endParaRPr kumimoji="1" lang="zh-CN" altLang="en-US" dirty="0"/>
-          </a:p>
-        </p:txBody>
-      </p:sp>
-      <p:sp>
-        <p:nvSpPr>
-          <p:cNvPr id="3" name="内容占位符 2">
-            <a:extLst>
-              <a:ext uri="{FF2B5EF4-FFF2-40B4-BE49-F238E27FC236}">
-                <a16:creationId xmlns:a16="http://schemas.microsoft.com/office/drawing/2014/main" id="{8EA67DCE-2389-6343-AFC1-54E1B9454D1E}"/>
-              </a:ext>
-            </a:extLst>
-          </p:cNvPr>
-          <p:cNvSpPr>
-            <a:spLocks noGrp="1"/>
-          </p:cNvSpPr>
-          <p:nvPr>
-            <p:ph idx="1"/>
-          </p:nvPr>
-        </p:nvSpPr>
-        <p:spPr/>
-        <p:txBody>
-          <a:bodyPr/>
-          <a:lstStyle/>
-          <a:p>
-            <a:r>
-              <a:rPr kumimoji="1" lang="en-US" altLang="zh-CN" dirty="0"/>
-              <a:t>A mathematical field to study </a:t>
-            </a:r>
-            <a:r>
-              <a:rPr kumimoji="1" lang="en-US" altLang="zh-CN" dirty="0">
-                <a:solidFill>
-                  <a:srgbClr val="0432FF"/>
-                </a:solidFill>
-              </a:rPr>
-              <a:t>reasoning</a:t>
-            </a:r>
-          </a:p>
-          <a:p>
-            <a:pPr lvl="1"/>
-            <a:r>
-              <a:rPr kumimoji="1" lang="en-US" altLang="zh-CN" dirty="0"/>
-              <a:t>Proof theory, set theory, model theory, recursion theory</a:t>
-            </a:r>
-          </a:p>
-          <a:p>
-            <a:pPr lvl="1"/>
-            <a:r>
-              <a:rPr kumimoji="1" lang="en-US" altLang="zh-CN" dirty="0"/>
-              <a:t>Many connection to other fields of math.</a:t>
-            </a:r>
-          </a:p>
-          <a:p>
-            <a:pPr lvl="2"/>
-            <a:r>
-              <a:rPr kumimoji="1" lang="en-US" altLang="zh-CN" dirty="0"/>
-              <a:t>The foundation of math</a:t>
-            </a:r>
-          </a:p>
-          <a:p>
-            <a:r>
-              <a:rPr kumimoji="1" lang="en-US" altLang="zh-CN" dirty="0"/>
-              <a:t>Also deep connection to CS:</a:t>
-            </a:r>
-          </a:p>
-          <a:p>
-            <a:pPr lvl="1"/>
-            <a:r>
-              <a:rPr kumimoji="1" lang="en-US" altLang="zh-CN" dirty="0"/>
-              <a:t>Type theory, logic programming, computer-aided verification (CAV), etc..</a:t>
-            </a:r>
-          </a:p>
-        </p:txBody>
-      </p:sp>
-    </p:spTree>
-    <p:extLst>
-      <p:ext uri="{BB962C8B-B14F-4D97-AF65-F5344CB8AC3E}">
-        <p14:creationId xmlns:p14="http://schemas.microsoft.com/office/powerpoint/2010/main" val="539919153"/>
-      </p:ext>
-    </p:extLst>
-  </p:cSld>
-  <p:clrMapOvr>
-    <a:masterClrMapping/>
-  </p:clrMapOvr>
-</p:sld>
-</file>
-
-<file path=ppt/slides/slide20.xml><?xml version="1.0" encoding="utf-8"?>
+<file path=ppt/slides/slide25.xml><?xml version="1.0" encoding="utf-8"?>
 <p:sld xmlns:a="http://schemas.openxmlformats.org/drawingml/2006/main" xmlns:r="http://schemas.openxmlformats.org/officeDocument/2006/relationships" xmlns:p="http://schemas.openxmlformats.org/presentationml/2006/main">
   <p:cSld>
     <p:spTree>
@@ -14274,10 +16880,7 @@
                 <a:pPr/>
                 <a14:m>
                   <m:oMathPara xmlns:m="http://schemas.openxmlformats.org/officeDocument/2006/math">
-                    <m:oMathParaPr>
-                      <m:jc m:val="centerGroup"/>
-                    </m:oMathParaPr>
-                    <m:oMath xmlns:m="http://schemas.openxmlformats.org/officeDocument/2006/math">
+                    <m:oMath>
                       <m:r>
                         <m:rPr>
                           <m:sty m:val="p"/>
@@ -14388,10 +16991,7 @@
                 <a:pPr/>
                 <a14:m>
                   <m:oMathPara xmlns:m="http://schemas.openxmlformats.org/officeDocument/2006/math">
-                    <m:oMathParaPr>
-                      <m:jc m:val="centerGroup"/>
-                    </m:oMathParaPr>
-                    <m:oMath xmlns:m="http://schemas.openxmlformats.org/officeDocument/2006/math">
+                    <m:oMath>
                       <m:r>
                         <a:rPr kumimoji="1" lang="en-US" altLang="zh-CN" i="1" smtClean="0">
                           <a:latin typeface="Cambria Math" panose="02040503050406030204" pitchFamily="18" charset="0"/>
@@ -14828,7 +17428,7 @@
 </p:sld>
 </file>
 
-<file path=ppt/slides/slide21.xml><?xml version="1.0" encoding="utf-8"?>
+<file path=ppt/slides/slide26.xml><?xml version="1.0" encoding="utf-8"?>
 <p:sld xmlns:a="http://schemas.openxmlformats.org/drawingml/2006/main" xmlns:r="http://schemas.openxmlformats.org/officeDocument/2006/relationships" xmlns:p="http://schemas.openxmlformats.org/presentationml/2006/main">
   <p:cSld>
     <p:spTree>
@@ -15200,10 +17800,7 @@
                 <a:pPr/>
                 <a14:m>
                   <m:oMathPara xmlns:m="http://schemas.openxmlformats.org/officeDocument/2006/math">
-                    <m:oMathParaPr>
-                      <m:jc m:val="centerGroup"/>
-                    </m:oMathParaPr>
-                    <m:oMath xmlns:m="http://schemas.openxmlformats.org/officeDocument/2006/math">
+                    <m:oMath>
                       <m:r>
                         <a:rPr kumimoji="1" lang="en-US" altLang="zh-CN" i="1" smtClean="0">
                           <a:latin typeface="Cambria Math" panose="02040503050406030204" pitchFamily="18" charset="0"/>
@@ -15798,7 +18395,7 @@
 </p:sld>
 </file>
 
-<file path=ppt/slides/slide22.xml><?xml version="1.0" encoding="utf-8"?>
+<file path=ppt/slides/slide27.xml><?xml version="1.0" encoding="utf-8"?>
 <p:sld xmlns:a="http://schemas.openxmlformats.org/drawingml/2006/main" xmlns:r="http://schemas.openxmlformats.org/officeDocument/2006/relationships" xmlns:p="http://schemas.openxmlformats.org/presentationml/2006/main">
   <p:cSld>
     <p:spTree>
@@ -16051,10 +18648,7 @@
                 <a:pPr/>
                 <a14:m>
                   <m:oMathPara xmlns:m="http://schemas.openxmlformats.org/officeDocument/2006/math">
-                    <m:oMathParaPr>
-                      <m:jc m:val="centerGroup"/>
-                    </m:oMathParaPr>
-                    <m:oMath xmlns:m="http://schemas.openxmlformats.org/officeDocument/2006/math">
+                    <m:oMath>
                       <m:r>
                         <m:rPr>
                           <m:sty m:val="p"/>
@@ -16167,10 +18761,7 @@
                 <a:pPr/>
                 <a14:m>
                   <m:oMathPara xmlns:m="http://schemas.openxmlformats.org/officeDocument/2006/math">
-                    <m:oMathParaPr>
-                      <m:jc m:val="centerGroup"/>
-                    </m:oMathParaPr>
-                    <m:oMath xmlns:m="http://schemas.openxmlformats.org/officeDocument/2006/math">
+                    <m:oMath>
                       <m:r>
                         <a:rPr kumimoji="1" lang="en-US" altLang="zh-CN" i="1" smtClean="0">
                           <a:latin typeface="Cambria Math" panose="02040503050406030204" pitchFamily="18" charset="0"/>
@@ -16597,10 +19188,7 @@
                 <a:pPr/>
                 <a14:m>
                   <m:oMathPara xmlns:m="http://schemas.openxmlformats.org/officeDocument/2006/math">
-                    <m:oMathParaPr>
-                      <m:jc m:val="centerGroup"/>
-                    </m:oMathParaPr>
-                    <m:oMath xmlns:m="http://schemas.openxmlformats.org/officeDocument/2006/math">
+                    <m:oMath>
                       <m:r>
                         <m:rPr>
                           <m:sty m:val="p"/>
@@ -16713,10 +19301,7 @@
                 <a:pPr/>
                 <a14:m>
                   <m:oMathPara xmlns:m="http://schemas.openxmlformats.org/officeDocument/2006/math">
-                    <m:oMathParaPr>
-                      <m:jc m:val="centerGroup"/>
-                    </m:oMathParaPr>
-                    <m:oMath xmlns:m="http://schemas.openxmlformats.org/officeDocument/2006/math">
+                    <m:oMath>
                       <m:r>
                         <a:rPr kumimoji="1" lang="en-US" altLang="zh-CN" i="1" smtClean="0">
                           <a:latin typeface="Cambria Math" panose="02040503050406030204" pitchFamily="18" charset="0"/>
@@ -16941,7 +19526,7 @@
 </p:sld>
 </file>
 
-<file path=ppt/slides/slide23.xml><?xml version="1.0" encoding="utf-8"?>
+<file path=ppt/slides/slide28.xml><?xml version="1.0" encoding="utf-8"?>
 <p:sld xmlns:a="http://schemas.openxmlformats.org/drawingml/2006/main" xmlns:r="http://schemas.openxmlformats.org/officeDocument/2006/relationships" xmlns:p="http://schemas.openxmlformats.org/presentationml/2006/main">
   <p:cSld>
     <p:spTree>
@@ -17327,10 +19912,7 @@
                 <a:pPr/>
                 <a14:m>
                   <m:oMathPara xmlns:m="http://schemas.openxmlformats.org/officeDocument/2006/math">
-                    <m:oMathParaPr>
-                      <m:jc m:val="centerGroup"/>
-                    </m:oMathParaPr>
-                    <m:oMath xmlns:m="http://schemas.openxmlformats.org/officeDocument/2006/math">
+                    <m:oMath>
                       <m:r>
                         <a:rPr kumimoji="1" lang="en-US" altLang="zh-CN" i="1" smtClean="0">
                           <a:latin typeface="Cambria Math" panose="02040503050406030204" pitchFamily="18" charset="0"/>
@@ -17743,10 +20325,7 @@
                 <a:pPr/>
                 <a14:m>
                   <m:oMathPara xmlns:m="http://schemas.openxmlformats.org/officeDocument/2006/math">
-                    <m:oMathParaPr>
-                      <m:jc m:val="centerGroup"/>
-                    </m:oMathParaPr>
-                    <m:oMath xmlns:m="http://schemas.openxmlformats.org/officeDocument/2006/math">
+                    <m:oMath>
                       <m:r>
                         <m:rPr>
                           <m:sty m:val="p"/>
@@ -17775,7 +20354,7 @@
                         <m:rPr>
                           <m:nor/>
                         </m:rPr>
-                        <a:rPr kumimoji="1" lang="zh-CN" altLang="en-US" dirty="0"/>
+                        <a:rPr kumimoji="1" lang="zh-CN" altLang="en-US" i="0" dirty="0"/>
                         <m:t> </m:t>
                       </m:r>
                       <m:r>
@@ -17881,10 +20460,7 @@
                 <a:pPr/>
                 <a14:m>
                   <m:oMathPara xmlns:m="http://schemas.openxmlformats.org/officeDocument/2006/math">
-                    <m:oMathParaPr>
-                      <m:jc m:val="centerGroup"/>
-                    </m:oMathParaPr>
-                    <m:oMath xmlns:m="http://schemas.openxmlformats.org/officeDocument/2006/math">
+                    <m:oMath>
                       <m:r>
                         <a:rPr kumimoji="1" lang="en-US" altLang="zh-CN" i="1" smtClean="0">
                           <a:latin typeface="Cambria Math" panose="02040503050406030204" pitchFamily="18" charset="0"/>
@@ -18096,7 +20672,7 @@
 </p:sld>
 </file>
 
-<file path=ppt/slides/slide24.xml><?xml version="1.0" encoding="utf-8"?>
+<file path=ppt/slides/slide29.xml><?xml version="1.0" encoding="utf-8"?>
 <p:sld xmlns:a="http://schemas.openxmlformats.org/drawingml/2006/main" xmlns:r="http://schemas.openxmlformats.org/officeDocument/2006/relationships" xmlns:p="http://schemas.openxmlformats.org/presentationml/2006/main">
   <p:cSld>
     <p:spTree>
@@ -18349,10 +20925,7 @@
                 <a:pPr/>
                 <a14:m>
                   <m:oMathPara xmlns:m="http://schemas.openxmlformats.org/officeDocument/2006/math">
-                    <m:oMathParaPr>
-                      <m:jc m:val="centerGroup"/>
-                    </m:oMathParaPr>
-                    <m:oMath xmlns:m="http://schemas.openxmlformats.org/officeDocument/2006/math">
+                    <m:oMath>
                       <m:r>
                         <m:rPr>
                           <m:sty m:val="p"/>
@@ -18738,10 +21311,7 @@
                 <a:pPr/>
                 <a14:m>
                   <m:oMathPara xmlns:m="http://schemas.openxmlformats.org/officeDocument/2006/math">
-                    <m:oMathParaPr>
-                      <m:jc m:val="centerGroup"/>
-                    </m:oMathParaPr>
-                    <m:oMath xmlns:m="http://schemas.openxmlformats.org/officeDocument/2006/math">
+                    <m:oMath>
                       <m:r>
                         <a:rPr kumimoji="1" lang="en-US" altLang="zh-CN" i="1" smtClean="0">
                           <a:latin typeface="Cambria Math" panose="02040503050406030204" pitchFamily="18" charset="0"/>
@@ -19112,7 +21682,121 @@
 </p:sld>
 </file>
 
-<file path=ppt/slides/slide25.xml><?xml version="1.0" encoding="utf-8"?>
+<file path=ppt/slides/slide3.xml><?xml version="1.0" encoding="utf-8"?>
+<p:sld xmlns:a="http://schemas.openxmlformats.org/drawingml/2006/main" xmlns:r="http://schemas.openxmlformats.org/officeDocument/2006/relationships" xmlns:p="http://schemas.openxmlformats.org/presentationml/2006/main">
+  <p:cSld>
+    <p:spTree>
+      <p:nvGrpSpPr>
+        <p:cNvPr id="1" name=""/>
+        <p:cNvGrpSpPr/>
+        <p:nvPr/>
+      </p:nvGrpSpPr>
+      <p:grpSpPr>
+        <a:xfrm>
+          <a:off x="0" y="0"/>
+          <a:ext cx="0" cy="0"/>
+          <a:chOff x="0" y="0"/>
+          <a:chExt cx="0" cy="0"/>
+        </a:xfrm>
+      </p:grpSpPr>
+      <p:sp>
+        <p:nvSpPr>
+          <p:cNvPr id="2" name="标题 1">
+            <a:extLst>
+              <a:ext uri="{FF2B5EF4-FFF2-40B4-BE49-F238E27FC236}">
+                <a16:creationId xmlns:a16="http://schemas.microsoft.com/office/drawing/2014/main" id="{F83B1A98-5D2E-F84C-8A75-A8FC62CA10DB}"/>
+              </a:ext>
+            </a:extLst>
+          </p:cNvPr>
+          <p:cNvSpPr>
+            <a:spLocks noGrp="1"/>
+          </p:cNvSpPr>
+          <p:nvPr>
+            <p:ph type="title"/>
+          </p:nvPr>
+        </p:nvSpPr>
+        <p:spPr/>
+        <p:txBody>
+          <a:bodyPr/>
+          <a:lstStyle/>
+          <a:p>
+            <a:r>
+              <a:rPr kumimoji="1" lang="en-US" altLang="zh-CN" dirty="0"/>
+              <a:t>Topics in this course</a:t>
+            </a:r>
+            <a:endParaRPr kumimoji="1" lang="zh-CN" altLang="en-US" dirty="0"/>
+          </a:p>
+        </p:txBody>
+      </p:sp>
+      <p:sp>
+        <p:nvSpPr>
+          <p:cNvPr id="3" name="内容占位符 2">
+            <a:extLst>
+              <a:ext uri="{FF2B5EF4-FFF2-40B4-BE49-F238E27FC236}">
+                <a16:creationId xmlns:a16="http://schemas.microsoft.com/office/drawing/2014/main" id="{8EA67DCE-2389-6343-AFC1-54E1B9454D1E}"/>
+              </a:ext>
+            </a:extLst>
+          </p:cNvPr>
+          <p:cNvSpPr>
+            <a:spLocks noGrp="1"/>
+          </p:cNvSpPr>
+          <p:nvPr>
+            <p:ph idx="1"/>
+          </p:nvPr>
+        </p:nvSpPr>
+        <p:spPr/>
+        <p:txBody>
+          <a:bodyPr/>
+          <a:lstStyle/>
+          <a:p>
+            <a:r>
+              <a:rPr kumimoji="1" lang="en-US" altLang="zh-CN" dirty="0"/>
+              <a:t>We study propositional and predicate logic</a:t>
+            </a:r>
+          </a:p>
+          <a:p>
+            <a:pPr lvl="1"/>
+            <a:r>
+              <a:rPr kumimoji="1" lang="en-US" altLang="zh-CN" dirty="0"/>
+              <a:t>Both the classical one and constructive one</a:t>
+            </a:r>
+          </a:p>
+          <a:p>
+            <a:r>
+              <a:rPr kumimoji="1" lang="en-US" altLang="zh-CN" dirty="0"/>
+              <a:t>From a more CS and algorithmic point of view:</a:t>
+            </a:r>
+          </a:p>
+          <a:p>
+            <a:pPr lvl="1"/>
+            <a:r>
+              <a:rPr kumimoji="1" lang="en-US" altLang="zh-CN" dirty="0"/>
+              <a:t>Computer aided proof engineering, SAT/SMT, etc..</a:t>
+            </a:r>
+          </a:p>
+          <a:p>
+            <a:pPr lvl="1"/>
+            <a:r>
+              <a:rPr kumimoji="1" lang="en-US" altLang="zh-CN" dirty="0"/>
+              <a:t>Application to many practical CS problems</a:t>
+            </a:r>
+          </a:p>
+        </p:txBody>
+      </p:sp>
+    </p:spTree>
+    <p:extLst>
+      <p:ext uri="{BB962C8B-B14F-4D97-AF65-F5344CB8AC3E}">
+        <p14:creationId xmlns:p14="http://schemas.microsoft.com/office/powerpoint/2010/main" val="245371239"/>
+      </p:ext>
+    </p:extLst>
+  </p:cSld>
+  <p:clrMapOvr>
+    <a:masterClrMapping/>
+  </p:clrMapOvr>
+</p:sld>
+</file>
+
+<file path=ppt/slides/slide30.xml><?xml version="1.0" encoding="utf-8"?>
 <p:sld xmlns:a="http://schemas.openxmlformats.org/drawingml/2006/main" xmlns:r="http://schemas.openxmlformats.org/officeDocument/2006/relationships" xmlns:p="http://schemas.openxmlformats.org/presentationml/2006/main">
   <p:cSld>
     <p:spTree>
@@ -19367,10 +22051,7 @@
                 <a:pPr/>
                 <a14:m>
                   <m:oMathPara xmlns:m="http://schemas.openxmlformats.org/officeDocument/2006/math">
-                    <m:oMathParaPr>
-                      <m:jc m:val="centerGroup"/>
-                    </m:oMathParaPr>
-                    <m:oMath xmlns:m="http://schemas.openxmlformats.org/officeDocument/2006/math">
+                    <m:oMath>
                       <m:r>
                         <m:rPr>
                           <m:sty m:val="p"/>
@@ -19815,10 +22496,7 @@
                 <a:pPr/>
                 <a14:m>
                   <m:oMathPara xmlns:m="http://schemas.openxmlformats.org/officeDocument/2006/math">
-                    <m:oMathParaPr>
-                      <m:jc m:val="centerGroup"/>
-                    </m:oMathParaPr>
-                    <m:oMath xmlns:m="http://schemas.openxmlformats.org/officeDocument/2006/math">
+                    <m:oMath>
                       <m:r>
                         <a:rPr kumimoji="1" lang="en-US" altLang="zh-CN" i="1" smtClean="0">
                           <a:latin typeface="Cambria Math" panose="02040503050406030204" pitchFamily="18" charset="0"/>
@@ -19974,10 +22652,7 @@
                 <a:pPr/>
                 <a14:m>
                   <m:oMathPara xmlns:m="http://schemas.openxmlformats.org/officeDocument/2006/math">
-                    <m:oMathParaPr>
-                      <m:jc m:val="centerGroup"/>
-                    </m:oMathParaPr>
-                    <m:oMath xmlns:m="http://schemas.openxmlformats.org/officeDocument/2006/math">
+                    <m:oMath>
                       <m:r>
                         <m:rPr>
                           <m:sty m:val="p"/>
@@ -20231,10 +22906,7 @@
                 <a:pPr/>
                 <a14:m>
                   <m:oMathPara xmlns:m="http://schemas.openxmlformats.org/officeDocument/2006/math">
-                    <m:oMathParaPr>
-                      <m:jc m:val="centerGroup"/>
-                    </m:oMathParaPr>
-                    <m:oMath xmlns:m="http://schemas.openxmlformats.org/officeDocument/2006/math">
+                    <m:oMath>
                       <m:r>
                         <a:rPr kumimoji="1" lang="en-US" altLang="zh-CN" i="1" smtClean="0">
                           <a:latin typeface="Cambria Math" panose="02040503050406030204" pitchFamily="18" charset="0"/>
@@ -20347,10 +23019,7 @@
                 <a:pPr/>
                 <a14:m>
                   <m:oMathPara xmlns:m="http://schemas.openxmlformats.org/officeDocument/2006/math">
-                    <m:oMathParaPr>
-                      <m:jc m:val="centerGroup"/>
-                    </m:oMathParaPr>
-                    <m:oMath xmlns:m="http://schemas.openxmlformats.org/officeDocument/2006/math">
+                    <m:oMath>
                       <m:r>
                         <m:rPr>
                           <m:sty m:val="p"/>
@@ -20441,7 +23110,7 @@
 </p:sld>
 </file>
 
-<file path=ppt/slides/slide26.xml><?xml version="1.0" encoding="utf-8"?>
+<file path=ppt/slides/slide31.xml><?xml version="1.0" encoding="utf-8"?>
 <p:sld xmlns:a="http://schemas.openxmlformats.org/drawingml/2006/main" xmlns:r="http://schemas.openxmlformats.org/officeDocument/2006/relationships" xmlns:p="http://schemas.openxmlformats.org/presentationml/2006/main">
   <p:cSld>
     <p:spTree>
@@ -20698,10 +23367,7 @@
                 <a:pPr/>
                 <a14:m>
                   <m:oMathPara xmlns:m="http://schemas.openxmlformats.org/officeDocument/2006/math">
-                    <m:oMathParaPr>
-                      <m:jc m:val="centerGroup"/>
-                    </m:oMathParaPr>
-                    <m:oMath xmlns:m="http://schemas.openxmlformats.org/officeDocument/2006/math">
+                    <m:oMath>
                       <m:r>
                         <m:rPr>
                           <m:sty m:val="p"/>
@@ -20953,10 +23619,7 @@
                 <a:pPr/>
                 <a14:m>
                   <m:oMathPara xmlns:m="http://schemas.openxmlformats.org/officeDocument/2006/math">
-                    <m:oMathParaPr>
-                      <m:jc m:val="centerGroup"/>
-                    </m:oMathParaPr>
-                    <m:oMath xmlns:m="http://schemas.openxmlformats.org/officeDocument/2006/math">
+                    <m:oMath>
                       <m:r>
                         <m:rPr>
                           <m:sty m:val="p"/>
@@ -21095,10 +23758,7 @@
                 <a:pPr/>
                 <a14:m>
                   <m:oMathPara xmlns:m="http://schemas.openxmlformats.org/officeDocument/2006/math">
-                    <m:oMathParaPr>
-                      <m:jc m:val="centerGroup"/>
-                    </m:oMathParaPr>
-                    <m:oMath xmlns:m="http://schemas.openxmlformats.org/officeDocument/2006/math">
+                    <m:oMath>
                       <m:r>
                         <a:rPr kumimoji="1" lang="en-US" altLang="zh-CN" i="1" smtClean="0">
                           <a:latin typeface="Cambria Math" panose="02040503050406030204" pitchFamily="18" charset="0"/>
@@ -21255,10 +23915,7 @@
                 <a:pPr/>
                 <a14:m>
                   <m:oMathPara xmlns:m="http://schemas.openxmlformats.org/officeDocument/2006/math">
-                    <m:oMathParaPr>
-                      <m:jc m:val="centerGroup"/>
-                    </m:oMathParaPr>
-                    <m:oMath xmlns:m="http://schemas.openxmlformats.org/officeDocument/2006/math">
+                    <m:oMath>
                       <m:r>
                         <m:rPr>
                           <m:sty m:val="p"/>
@@ -21371,10 +24028,7 @@
                 <a:pPr/>
                 <a14:m>
                   <m:oMathPara xmlns:m="http://schemas.openxmlformats.org/officeDocument/2006/math">
-                    <m:oMathParaPr>
-                      <m:jc m:val="centerGroup"/>
-                    </m:oMathParaPr>
-                    <m:oMath xmlns:m="http://schemas.openxmlformats.org/officeDocument/2006/math">
+                    <m:oMath>
                       <m:r>
                         <m:rPr>
                           <m:sty m:val="p"/>
@@ -21485,10 +24139,7 @@
                 <a:pPr/>
                 <a14:m>
                   <m:oMathPara xmlns:m="http://schemas.openxmlformats.org/officeDocument/2006/math">
-                    <m:oMathParaPr>
-                      <m:jc m:val="centerGroup"/>
-                    </m:oMathParaPr>
-                    <m:oMath xmlns:m="http://schemas.openxmlformats.org/officeDocument/2006/math">
+                    <m:oMath>
                       <m:r>
                         <a:rPr kumimoji="1" lang="en-US" altLang="zh-CN" i="1" smtClean="0">
                           <a:latin typeface="Cambria Math" panose="02040503050406030204" pitchFamily="18" charset="0"/>
@@ -21602,10 +24253,7 @@
                 <a:pPr/>
                 <a14:m>
                   <m:oMathPara xmlns:m="http://schemas.openxmlformats.org/officeDocument/2006/math">
-                    <m:oMathParaPr>
-                      <m:jc m:val="centerGroup"/>
-                    </m:oMathParaPr>
-                    <m:oMath xmlns:m="http://schemas.openxmlformats.org/officeDocument/2006/math">
+                    <m:oMath>
                       <m:r>
                         <m:rPr>
                           <m:sty m:val="p"/>
@@ -21703,7 +24351,7 @@
 </p:sld>
 </file>
 
-<file path=ppt/slides/slide27.xml><?xml version="1.0" encoding="utf-8"?>
+<file path=ppt/slides/slide32.xml><?xml version="1.0" encoding="utf-8"?>
 <p:sld xmlns:a="http://schemas.openxmlformats.org/drawingml/2006/main" xmlns:r="http://schemas.openxmlformats.org/officeDocument/2006/relationships" xmlns:p="http://schemas.openxmlformats.org/presentationml/2006/main">
   <p:cSld>
     <p:spTree>
@@ -21969,10 +24617,7 @@
                 <a:pPr/>
                 <a14:m>
                   <m:oMathPara xmlns:m="http://schemas.openxmlformats.org/officeDocument/2006/math">
-                    <m:oMathParaPr>
-                      <m:jc m:val="centerGroup"/>
-                    </m:oMathParaPr>
-                    <m:oMath xmlns:m="http://schemas.openxmlformats.org/officeDocument/2006/math">
+                    <m:oMath>
                       <m:r>
                         <m:rPr>
                           <m:sty m:val="p"/>
@@ -22417,10 +25062,7 @@
                 <a:pPr/>
                 <a14:m>
                   <m:oMathPara xmlns:m="http://schemas.openxmlformats.org/officeDocument/2006/math">
-                    <m:oMathParaPr>
-                      <m:jc m:val="centerGroup"/>
-                    </m:oMathParaPr>
-                    <m:oMath xmlns:m="http://schemas.openxmlformats.org/officeDocument/2006/math">
+                    <m:oMath>
                       <m:r>
                         <m:rPr>
                           <m:sty m:val="p"/>
@@ -22538,10 +25180,7 @@
                 <a:pPr/>
                 <a14:m>
                   <m:oMathPara xmlns:m="http://schemas.openxmlformats.org/officeDocument/2006/math">
-                    <m:oMathParaPr>
-                      <m:jc m:val="centerGroup"/>
-                    </m:oMathParaPr>
-                    <m:oMath xmlns:m="http://schemas.openxmlformats.org/officeDocument/2006/math">
+                    <m:oMath>
                       <m:r>
                         <a:rPr kumimoji="1" lang="en-US" altLang="zh-CN" i="1" smtClean="0">
                           <a:latin typeface="Cambria Math" panose="02040503050406030204" pitchFamily="18" charset="0"/>
@@ -22636,7 +25275,7 @@
 </p:sld>
 </file>
 
-<file path=ppt/slides/slide28.xml><?xml version="1.0" encoding="utf-8"?>
+<file path=ppt/slides/slide33.xml><?xml version="1.0" encoding="utf-8"?>
 <p:sld xmlns:a="http://schemas.openxmlformats.org/drawingml/2006/main" xmlns:r="http://schemas.openxmlformats.org/officeDocument/2006/relationships" xmlns:p="http://schemas.openxmlformats.org/presentationml/2006/main">
   <p:cSld>
     <p:spTree>
@@ -22909,10 +25548,7 @@
                 <a:pPr/>
                 <a14:m>
                   <m:oMathPara xmlns:m="http://schemas.openxmlformats.org/officeDocument/2006/math">
-                    <m:oMathParaPr>
-                      <m:jc m:val="centerGroup"/>
-                    </m:oMathParaPr>
-                    <m:oMath xmlns:m="http://schemas.openxmlformats.org/officeDocument/2006/math">
+                    <m:oMath>
                       <m:r>
                         <a:rPr kumimoji="1" lang="el-GR" altLang="zh-CN" i="1">
                           <a:latin typeface="Cambria Math" panose="02040503050406030204" pitchFamily="18" charset="0"/>
@@ -23130,10 +25766,7 @@
                 <a:pPr/>
                 <a14:m>
                   <m:oMathPara xmlns:m="http://schemas.openxmlformats.org/officeDocument/2006/math">
-                    <m:oMathParaPr>
-                      <m:jc m:val="centerGroup"/>
-                    </m:oMathParaPr>
-                    <m:oMath xmlns:m="http://schemas.openxmlformats.org/officeDocument/2006/math">
+                    <m:oMath>
                       <m:r>
                         <a:rPr kumimoji="1" lang="en-US" altLang="zh-CN" i="1" dirty="0">
                           <a:latin typeface="Cambria Math" panose="02040503050406030204" pitchFamily="18" charset="0"/>
@@ -23252,10 +25885,7 @@
                 <a:pPr/>
                 <a14:m>
                   <m:oMathPara xmlns:m="http://schemas.openxmlformats.org/officeDocument/2006/math">
-                    <m:oMathParaPr>
-                      <m:jc m:val="centerGroup"/>
-                    </m:oMathParaPr>
-                    <m:oMath xmlns:m="http://schemas.openxmlformats.org/officeDocument/2006/math">
+                    <m:oMath>
                       <m:r>
                         <a:rPr kumimoji="1" lang="en-US" altLang="zh-CN" i="1" smtClean="0">
                           <a:latin typeface="Cambria Math" panose="02040503050406030204" pitchFamily="18" charset="0"/>
@@ -23590,10 +26220,7 @@
                 <a:pPr/>
                 <a14:m>
                   <m:oMathPara xmlns:m="http://schemas.openxmlformats.org/officeDocument/2006/math">
-                    <m:oMathParaPr>
-                      <m:jc m:val="centerGroup"/>
-                    </m:oMathParaPr>
-                    <m:oMath xmlns:m="http://schemas.openxmlformats.org/officeDocument/2006/math">
+                    <m:oMath>
                       <m:r>
                         <a:rPr kumimoji="1" lang="en-US" altLang="zh-CN" i="1" smtClean="0">
                           <a:latin typeface="Cambria Math" panose="02040503050406030204" pitchFamily="18" charset="0"/>
@@ -23706,10 +26333,7 @@
                 <a:pPr/>
                 <a14:m>
                   <m:oMathPara xmlns:m="http://schemas.openxmlformats.org/officeDocument/2006/math">
-                    <m:oMathParaPr>
-                      <m:jc m:val="centerGroup"/>
-                    </m:oMathParaPr>
-                    <m:oMath xmlns:m="http://schemas.openxmlformats.org/officeDocument/2006/math">
+                    <m:oMath>
                       <m:r>
                         <a:rPr kumimoji="1" lang="en-US" altLang="zh-CN" i="1" smtClean="0">
                           <a:latin typeface="Cambria Math" panose="02040503050406030204" pitchFamily="18" charset="0"/>
@@ -23802,7 +26426,7 @@
 </p:sld>
 </file>
 
-<file path=ppt/slides/slide29.xml><?xml version="1.0" encoding="utf-8"?>
+<file path=ppt/slides/slide34.xml><?xml version="1.0" encoding="utf-8"?>
 <p:sld xmlns:a="http://schemas.openxmlformats.org/drawingml/2006/main" xmlns:r="http://schemas.openxmlformats.org/officeDocument/2006/relationships" xmlns:p="http://schemas.openxmlformats.org/presentationml/2006/main">
   <p:cSld>
     <p:spTree>
@@ -24210,121 +26834,7 @@
 </p:sld>
 </file>
 
-<file path=ppt/slides/slide3.xml><?xml version="1.0" encoding="utf-8"?>
-<p:sld xmlns:a="http://schemas.openxmlformats.org/drawingml/2006/main" xmlns:r="http://schemas.openxmlformats.org/officeDocument/2006/relationships" xmlns:p="http://schemas.openxmlformats.org/presentationml/2006/main">
-  <p:cSld>
-    <p:spTree>
-      <p:nvGrpSpPr>
-        <p:cNvPr id="1" name=""/>
-        <p:cNvGrpSpPr/>
-        <p:nvPr/>
-      </p:nvGrpSpPr>
-      <p:grpSpPr>
-        <a:xfrm>
-          <a:off x="0" y="0"/>
-          <a:ext cx="0" cy="0"/>
-          <a:chOff x="0" y="0"/>
-          <a:chExt cx="0" cy="0"/>
-        </a:xfrm>
-      </p:grpSpPr>
-      <p:sp>
-        <p:nvSpPr>
-          <p:cNvPr id="2" name="标题 1">
-            <a:extLst>
-              <a:ext uri="{FF2B5EF4-FFF2-40B4-BE49-F238E27FC236}">
-                <a16:creationId xmlns:a16="http://schemas.microsoft.com/office/drawing/2014/main" id="{F83B1A98-5D2E-F84C-8A75-A8FC62CA10DB}"/>
-              </a:ext>
-            </a:extLst>
-          </p:cNvPr>
-          <p:cNvSpPr>
-            <a:spLocks noGrp="1"/>
-          </p:cNvSpPr>
-          <p:nvPr>
-            <p:ph type="title"/>
-          </p:nvPr>
-        </p:nvSpPr>
-        <p:spPr/>
-        <p:txBody>
-          <a:bodyPr/>
-          <a:lstStyle/>
-          <a:p>
-            <a:r>
-              <a:rPr kumimoji="1" lang="en-US" altLang="zh-CN" dirty="0"/>
-              <a:t>Topics in this course</a:t>
-            </a:r>
-            <a:endParaRPr kumimoji="1" lang="zh-CN" altLang="en-US" dirty="0"/>
-          </a:p>
-        </p:txBody>
-      </p:sp>
-      <p:sp>
-        <p:nvSpPr>
-          <p:cNvPr id="3" name="内容占位符 2">
-            <a:extLst>
-              <a:ext uri="{FF2B5EF4-FFF2-40B4-BE49-F238E27FC236}">
-                <a16:creationId xmlns:a16="http://schemas.microsoft.com/office/drawing/2014/main" id="{8EA67DCE-2389-6343-AFC1-54E1B9454D1E}"/>
-              </a:ext>
-            </a:extLst>
-          </p:cNvPr>
-          <p:cNvSpPr>
-            <a:spLocks noGrp="1"/>
-          </p:cNvSpPr>
-          <p:nvPr>
-            <p:ph idx="1"/>
-          </p:nvPr>
-        </p:nvSpPr>
-        <p:spPr/>
-        <p:txBody>
-          <a:bodyPr/>
-          <a:lstStyle/>
-          <a:p>
-            <a:r>
-              <a:rPr kumimoji="1" lang="en-US" altLang="zh-CN" dirty="0"/>
-              <a:t>We study propositional and predicate logic</a:t>
-            </a:r>
-          </a:p>
-          <a:p>
-            <a:pPr lvl="1"/>
-            <a:r>
-              <a:rPr kumimoji="1" lang="en-US" altLang="zh-CN" dirty="0"/>
-              <a:t>Both the classical one and constructive one</a:t>
-            </a:r>
-          </a:p>
-          <a:p>
-            <a:r>
-              <a:rPr kumimoji="1" lang="en-US" altLang="zh-CN" dirty="0"/>
-              <a:t>From a more CS and algorithmic point of view:</a:t>
-            </a:r>
-          </a:p>
-          <a:p>
-            <a:pPr lvl="1"/>
-            <a:r>
-              <a:rPr kumimoji="1" lang="en-US" altLang="zh-CN" dirty="0"/>
-              <a:t>Computer aided proof engineering, SAT/SMT, etc..</a:t>
-            </a:r>
-          </a:p>
-          <a:p>
-            <a:pPr lvl="1"/>
-            <a:r>
-              <a:rPr kumimoji="1" lang="en-US" altLang="zh-CN" dirty="0"/>
-              <a:t>Application to many practical CS problems</a:t>
-            </a:r>
-          </a:p>
-        </p:txBody>
-      </p:sp>
-    </p:spTree>
-    <p:extLst>
-      <p:ext uri="{BB962C8B-B14F-4D97-AF65-F5344CB8AC3E}">
-        <p14:creationId xmlns:p14="http://schemas.microsoft.com/office/powerpoint/2010/main" val="245371239"/>
-      </p:ext>
-    </p:extLst>
-  </p:cSld>
-  <p:clrMapOvr>
-    <a:masterClrMapping/>
-  </p:clrMapOvr>
-</p:sld>
-</file>
-
-<file path=ppt/slides/slide30.xml><?xml version="1.0" encoding="utf-8"?>
+<file path=ppt/slides/slide35.xml><?xml version="1.0" encoding="utf-8"?>
 <p:sld xmlns:a="http://schemas.openxmlformats.org/drawingml/2006/main" xmlns:r="http://schemas.openxmlformats.org/officeDocument/2006/relationships" xmlns:p="http://schemas.openxmlformats.org/presentationml/2006/main">
   <p:cSld>
     <p:spTree>
@@ -24450,7 +26960,7 @@
 </p:sld>
 </file>
 
-<file path=ppt/slides/slide31.xml><?xml version="1.0" encoding="utf-8"?>
+<file path=ppt/slides/slide36.xml><?xml version="1.0" encoding="utf-8"?>
 <p:sld xmlns:a="http://schemas.openxmlformats.org/drawingml/2006/main" xmlns:r="http://schemas.openxmlformats.org/officeDocument/2006/relationships" xmlns:p="http://schemas.openxmlformats.org/presentationml/2006/main">
   <p:cSld>
     <p:spTree>
@@ -24792,7 +27302,7 @@
 </p:sld>
 </file>
 
-<file path=ppt/slides/slide32.xml><?xml version="1.0" encoding="utf-8"?>
+<file path=ppt/slides/slide37.xml><?xml version="1.0" encoding="utf-8"?>
 <p:sld xmlns:a="http://schemas.openxmlformats.org/drawingml/2006/main" xmlns:r="http://schemas.openxmlformats.org/officeDocument/2006/relationships" xmlns:p="http://schemas.openxmlformats.org/presentationml/2006/main">
   <p:cSld>
     <p:spTree>
@@ -25510,7 +28020,7 @@
 </p:sld>
 </file>
 
-<file path=ppt/slides/slide33.xml><?xml version="1.0" encoding="utf-8"?>
+<file path=ppt/slides/slide38.xml><?xml version="1.0" encoding="utf-8"?>
 <p:sld xmlns:a="http://schemas.openxmlformats.org/drawingml/2006/main" xmlns:r="http://schemas.openxmlformats.org/officeDocument/2006/relationships" xmlns:p="http://schemas.openxmlformats.org/presentationml/2006/main">
   <p:cSld>
     <p:spTree>
@@ -26041,7 +28551,7 @@
 </p:sld>
 </file>
 
-<file path=ppt/slides/slide34.xml><?xml version="1.0" encoding="utf-8"?>
+<file path=ppt/slides/slide39.xml><?xml version="1.0" encoding="utf-8"?>
 <p:sld xmlns:a="http://schemas.openxmlformats.org/drawingml/2006/main" xmlns:r="http://schemas.openxmlformats.org/officeDocument/2006/relationships" xmlns:p="http://schemas.openxmlformats.org/presentationml/2006/main">
   <p:cSld>
     <p:spTree>
@@ -26527,10 +29037,7 @@
                           </a:pPr>
                           <a14:m>
                             <m:oMathPara xmlns:m="http://schemas.openxmlformats.org/officeDocument/2006/math">
-                              <m:oMathParaPr>
-                                <m:jc m:val="centerGroup"/>
-                              </m:oMathParaPr>
-                              <m:oMath xmlns:m="http://schemas.openxmlformats.org/officeDocument/2006/math">
+                              <m:oMath>
                                 <m:r>
                                   <a:rPr kumimoji="1" lang="en-US" altLang="zh-CN" i="1" smtClean="0">
                                     <a:latin typeface="Cambria Math" panose="02040503050406030204" pitchFamily="18" charset="0"/>
@@ -27785,7 +30292,116 @@
 </p:sld>
 </file>
 
-<file path=ppt/slides/slide35.xml><?xml version="1.0" encoding="utf-8"?>
+<file path=ppt/slides/slide4.xml><?xml version="1.0" encoding="utf-8"?>
+<p:sld xmlns:a="http://schemas.openxmlformats.org/drawingml/2006/main" xmlns:r="http://schemas.openxmlformats.org/officeDocument/2006/relationships" xmlns:p="http://schemas.openxmlformats.org/presentationml/2006/main">
+  <p:cSld>
+    <p:spTree>
+      <p:nvGrpSpPr>
+        <p:cNvPr id="1" name=""/>
+        <p:cNvGrpSpPr/>
+        <p:nvPr/>
+      </p:nvGrpSpPr>
+      <p:grpSpPr>
+        <a:xfrm>
+          <a:off x="0" y="0"/>
+          <a:ext cx="0" cy="0"/>
+          <a:chOff x="0" y="0"/>
+          <a:chExt cx="0" cy="0"/>
+        </a:xfrm>
+      </p:grpSpPr>
+      <p:sp>
+        <p:nvSpPr>
+          <p:cNvPr id="2" name="标题 1">
+            <a:extLst>
+              <a:ext uri="{FF2B5EF4-FFF2-40B4-BE49-F238E27FC236}">
+                <a16:creationId xmlns:a16="http://schemas.microsoft.com/office/drawing/2014/main" id="{99C17B9B-B834-E347-80F2-CCDBC8D91B03}"/>
+              </a:ext>
+            </a:extLst>
+          </p:cNvPr>
+          <p:cNvSpPr>
+            <a:spLocks noGrp="1"/>
+          </p:cNvSpPr>
+          <p:nvPr>
+            <p:ph type="title"/>
+          </p:nvPr>
+        </p:nvSpPr>
+        <p:spPr/>
+        <p:txBody>
+          <a:bodyPr/>
+          <a:lstStyle/>
+          <a:p>
+            <a:r>
+              <a:rPr kumimoji="1" lang="en-US" altLang="zh-CN" dirty="0"/>
+              <a:t> </a:t>
+            </a:r>
+            <a:endParaRPr kumimoji="1" lang="zh-CN" altLang="en-US" dirty="0"/>
+          </a:p>
+        </p:txBody>
+      </p:sp>
+      <p:sp>
+        <p:nvSpPr>
+          <p:cNvPr id="3" name="内容占位符 2">
+            <a:extLst>
+              <a:ext uri="{FF2B5EF4-FFF2-40B4-BE49-F238E27FC236}">
+                <a16:creationId xmlns:a16="http://schemas.microsoft.com/office/drawing/2014/main" id="{41622823-CB4B-6B47-ABD2-04954DD6D50E}"/>
+              </a:ext>
+            </a:extLst>
+          </p:cNvPr>
+          <p:cNvSpPr>
+            <a:spLocks noGrp="1"/>
+          </p:cNvSpPr>
+          <p:nvPr>
+            <p:ph idx="1"/>
+          </p:nvPr>
+        </p:nvSpPr>
+        <p:spPr/>
+        <p:txBody>
+          <a:bodyPr/>
+          <a:lstStyle/>
+          <a:p>
+            <a:pPr marL="0" indent="0">
+              <a:buNone/>
+            </a:pPr>
+            <a:endParaRPr kumimoji="1" lang="en-US" altLang="zh-CN" dirty="0"/>
+          </a:p>
+          <a:p>
+            <a:pPr marL="0" indent="0">
+              <a:buNone/>
+            </a:pPr>
+            <a:endParaRPr kumimoji="1" lang="en-US" altLang="zh-CN" dirty="0"/>
+          </a:p>
+          <a:p>
+            <a:pPr marL="0" indent="0">
+              <a:buNone/>
+            </a:pPr>
+            <a:endParaRPr kumimoji="1" lang="en-US" altLang="zh-CN" dirty="0"/>
+          </a:p>
+          <a:p>
+            <a:pPr marL="0" indent="0" algn="ctr">
+              <a:buNone/>
+            </a:pPr>
+            <a:r>
+              <a:rPr kumimoji="1" lang="en-US" altLang="zh-CN" i="1" dirty="0"/>
+              <a:t>Brief history</a:t>
+            </a:r>
+            <a:endParaRPr kumimoji="1" lang="zh-CN" altLang="en-US" i="1" dirty="0"/>
+          </a:p>
+        </p:txBody>
+      </p:sp>
+    </p:spTree>
+    <p:extLst>
+      <p:ext uri="{BB962C8B-B14F-4D97-AF65-F5344CB8AC3E}">
+        <p14:creationId xmlns:p14="http://schemas.microsoft.com/office/powerpoint/2010/main" val="209095152"/>
+      </p:ext>
+    </p:extLst>
+  </p:cSld>
+  <p:clrMapOvr>
+    <a:masterClrMapping/>
+  </p:clrMapOvr>
+</p:sld>
+</file>
+
+<file path=ppt/slides/slide40.xml><?xml version="1.0" encoding="utf-8"?>
 <p:sld xmlns:a="http://schemas.openxmlformats.org/drawingml/2006/main" xmlns:r="http://schemas.openxmlformats.org/officeDocument/2006/relationships" xmlns:p="http://schemas.openxmlformats.org/presentationml/2006/main">
   <p:cSld>
     <p:spTree>
@@ -28245,7 +30861,7 @@
                               <m:oMathParaPr>
                                 <m:jc m:val="left"/>
                               </m:oMathParaPr>
-                              <m:oMath xmlns:m="http://schemas.openxmlformats.org/officeDocument/2006/math">
+                              <m:oMath>
                                 <m:r>
                                   <a:rPr kumimoji="1" lang="en-US" altLang="zh-CN" b="1" i="0" smtClean="0">
                                     <a:latin typeface="Cambria Math" panose="02040503050406030204" pitchFamily="18" charset="0"/>
@@ -29490,7 +32106,7 @@
 </p:sld>
 </file>
 
-<file path=ppt/slides/slide36.xml><?xml version="1.0" encoding="utf-8"?>
+<file path=ppt/slides/slide41.xml><?xml version="1.0" encoding="utf-8"?>
 <p:sld xmlns:a="http://schemas.openxmlformats.org/drawingml/2006/main" xmlns:r="http://schemas.openxmlformats.org/officeDocument/2006/relationships" xmlns:p="http://schemas.openxmlformats.org/presentationml/2006/main">
   <p:cSld>
     <p:spTree>
@@ -29919,7 +32535,7 @@
 </p:sld>
 </file>
 
-<file path=ppt/slides/slide37.xml><?xml version="1.0" encoding="utf-8"?>
+<file path=ppt/slides/slide42.xml><?xml version="1.0" encoding="utf-8"?>
 <p:sld xmlns:a="http://schemas.openxmlformats.org/drawingml/2006/main" xmlns:r="http://schemas.openxmlformats.org/officeDocument/2006/relationships" xmlns:p="http://schemas.openxmlformats.org/presentationml/2006/main">
   <p:cSld>
     <p:spTree>
@@ -30164,7 +32780,7 @@
                       <m:rPr>
                         <m:nor/>
                       </m:rPr>
-                      <a:rPr kumimoji="1" lang="zh-CN" altLang="en-US" dirty="0">
+                      <a:rPr kumimoji="1" lang="zh-CN" altLang="en-US" i="0" dirty="0">
                         <a:solidFill>
                           <a:srgbClr val="0432FF"/>
                         </a:solidFill>
@@ -30175,7 +32791,7 @@
                       <m:rPr>
                         <m:nor/>
                       </m:rPr>
-                      <a:rPr kumimoji="1" lang="en-US" altLang="zh-CN" dirty="0">
+                      <a:rPr kumimoji="1" lang="en-US" altLang="zh-CN" i="0" dirty="0">
                         <a:solidFill>
                           <a:srgbClr val="0432FF"/>
                         </a:solidFill>
@@ -30442,115 +33058,6 @@
     <p:extLst>
       <p:ext uri="{BB962C8B-B14F-4D97-AF65-F5344CB8AC3E}">
         <p14:creationId xmlns:p14="http://schemas.microsoft.com/office/powerpoint/2010/main" val="1339036036"/>
-      </p:ext>
-    </p:extLst>
-  </p:cSld>
-  <p:clrMapOvr>
-    <a:masterClrMapping/>
-  </p:clrMapOvr>
-</p:sld>
-</file>
-
-<file path=ppt/slides/slide4.xml><?xml version="1.0" encoding="utf-8"?>
-<p:sld xmlns:a="http://schemas.openxmlformats.org/drawingml/2006/main" xmlns:r="http://schemas.openxmlformats.org/officeDocument/2006/relationships" xmlns:p="http://schemas.openxmlformats.org/presentationml/2006/main">
-  <p:cSld>
-    <p:spTree>
-      <p:nvGrpSpPr>
-        <p:cNvPr id="1" name=""/>
-        <p:cNvGrpSpPr/>
-        <p:nvPr/>
-      </p:nvGrpSpPr>
-      <p:grpSpPr>
-        <a:xfrm>
-          <a:off x="0" y="0"/>
-          <a:ext cx="0" cy="0"/>
-          <a:chOff x="0" y="0"/>
-          <a:chExt cx="0" cy="0"/>
-        </a:xfrm>
-      </p:grpSpPr>
-      <p:sp>
-        <p:nvSpPr>
-          <p:cNvPr id="2" name="标题 1">
-            <a:extLst>
-              <a:ext uri="{FF2B5EF4-FFF2-40B4-BE49-F238E27FC236}">
-                <a16:creationId xmlns:a16="http://schemas.microsoft.com/office/drawing/2014/main" id="{99C17B9B-B834-E347-80F2-CCDBC8D91B03}"/>
-              </a:ext>
-            </a:extLst>
-          </p:cNvPr>
-          <p:cNvSpPr>
-            <a:spLocks noGrp="1"/>
-          </p:cNvSpPr>
-          <p:nvPr>
-            <p:ph type="title"/>
-          </p:nvPr>
-        </p:nvSpPr>
-        <p:spPr/>
-        <p:txBody>
-          <a:bodyPr/>
-          <a:lstStyle/>
-          <a:p>
-            <a:r>
-              <a:rPr kumimoji="1" lang="en-US" altLang="zh-CN" dirty="0"/>
-              <a:t> </a:t>
-            </a:r>
-            <a:endParaRPr kumimoji="1" lang="zh-CN" altLang="en-US" dirty="0"/>
-          </a:p>
-        </p:txBody>
-      </p:sp>
-      <p:sp>
-        <p:nvSpPr>
-          <p:cNvPr id="3" name="内容占位符 2">
-            <a:extLst>
-              <a:ext uri="{FF2B5EF4-FFF2-40B4-BE49-F238E27FC236}">
-                <a16:creationId xmlns:a16="http://schemas.microsoft.com/office/drawing/2014/main" id="{41622823-CB4B-6B47-ABD2-04954DD6D50E}"/>
-              </a:ext>
-            </a:extLst>
-          </p:cNvPr>
-          <p:cNvSpPr>
-            <a:spLocks noGrp="1"/>
-          </p:cNvSpPr>
-          <p:nvPr>
-            <p:ph idx="1"/>
-          </p:nvPr>
-        </p:nvSpPr>
-        <p:spPr/>
-        <p:txBody>
-          <a:bodyPr/>
-          <a:lstStyle/>
-          <a:p>
-            <a:pPr marL="0" indent="0">
-              <a:buNone/>
-            </a:pPr>
-            <a:endParaRPr kumimoji="1" lang="en-US" altLang="zh-CN" dirty="0"/>
-          </a:p>
-          <a:p>
-            <a:pPr marL="0" indent="0">
-              <a:buNone/>
-            </a:pPr>
-            <a:endParaRPr kumimoji="1" lang="en-US" altLang="zh-CN" dirty="0"/>
-          </a:p>
-          <a:p>
-            <a:pPr marL="0" indent="0">
-              <a:buNone/>
-            </a:pPr>
-            <a:endParaRPr kumimoji="1" lang="en-US" altLang="zh-CN" dirty="0"/>
-          </a:p>
-          <a:p>
-            <a:pPr marL="0" indent="0" algn="ctr">
-              <a:buNone/>
-            </a:pPr>
-            <a:r>
-              <a:rPr kumimoji="1" lang="en-US" altLang="zh-CN" i="1" dirty="0"/>
-              <a:t>Brief history</a:t>
-            </a:r>
-            <a:endParaRPr kumimoji="1" lang="zh-CN" altLang="en-US" i="1" dirty="0"/>
-          </a:p>
-        </p:txBody>
-      </p:sp>
-    </p:spTree>
-    <p:extLst>
-      <p:ext uri="{BB962C8B-B14F-4D97-AF65-F5344CB8AC3E}">
-        <p14:creationId xmlns:p14="http://schemas.microsoft.com/office/powerpoint/2010/main" val="209095152"/>
       </p:ext>
     </p:extLst>
   </p:cSld>
